--- a/A0_Poster/2026-03-09/A0_Final_Poster_revised.pptx
+++ b/A0_Poster/2026-03-09/A0_Final_Poster_revised.pptx
@@ -4534,8 +4534,8 @@
         </p:nvSpPr>
         <p:spPr>
           <a:xfrm>
-            <a:off x="15320772" y="5433365"/>
-            <a:ext cx="14497812" cy="2819095"/>
+            <a:off x="15320772" y="5577840"/>
+            <a:ext cx="14497812" cy="3291840"/>
           </a:xfrm>
           <a:prstGeom prst="rect">
             <a:avLst/>
@@ -4561,8 +4561,8 @@
         </p:nvSpPr>
         <p:spPr>
           <a:xfrm>
-            <a:off x="15320772" y="5433365"/>
-            <a:ext cx="14497812" cy="2819095"/>
+            <a:off x="15320772" y="5577840"/>
+            <a:ext cx="14497812" cy="3291840"/>
           </a:xfrm>
           <a:prstGeom prst="rect">
             <a:avLst/>
@@ -4655,7 +4655,7 @@
         </p:nvSpPr>
         <p:spPr>
           <a:xfrm>
-            <a:off x="15320772" y="8409737"/>
+            <a:off x="15320772" y="9052560"/>
             <a:ext cx="822960" cy="822960"/>
           </a:xfrm>
           <a:prstGeom prst="ellipse">
@@ -4675,7 +4675,7 @@
         </p:nvSpPr>
         <p:spPr>
           <a:xfrm>
-            <a:off x="15320772" y="8409737"/>
+            <a:off x="15320772" y="9052560"/>
             <a:ext cx="822960" cy="822960"/>
           </a:xfrm>
           <a:prstGeom prst="rect">
@@ -4714,7 +4714,7 @@
         </p:nvSpPr>
         <p:spPr>
           <a:xfrm>
-            <a:off x="16280892" y="8409737"/>
+            <a:off x="16280892" y="9052560"/>
             <a:ext cx="13537692" cy="822960"/>
           </a:xfrm>
           <a:prstGeom prst="rect">
@@ -4753,8 +4753,8 @@
         </p:nvSpPr>
         <p:spPr>
           <a:xfrm>
-            <a:off x="15320772" y="9271102"/>
-            <a:ext cx="14497812" cy="4385462"/>
+            <a:off x="15320772" y="10058400"/>
+            <a:ext cx="14497812" cy="5120640"/>
           </a:xfrm>
           <a:prstGeom prst="rect">
             <a:avLst/>
@@ -4780,8 +4780,8 @@
         </p:nvSpPr>
         <p:spPr>
           <a:xfrm>
-            <a:off x="15503652" y="9349740"/>
-            <a:ext cx="14132052" cy="391363"/>
+            <a:off x="15503652" y="10149840"/>
+            <a:ext cx="14132052" cy="457200"/>
           </a:xfrm>
           <a:prstGeom prst="rect">
             <a:avLst/>
@@ -4826,7 +4826,7 @@
           </p:nvPr>
         </p:nvGraphicFramePr>
         <p:xfrm>
-          <a:off x="15503652" y="9819742"/>
+          <a:off x="15503652" y="10698480"/>
           <a:ext cx="14132052" cy="914400"/>
         </p:xfrm>
         <a:graphic>
@@ -4838,7 +4838,7 @@
                 <a:gridCol w="6359423"/>
                 <a:gridCol w="5228859"/>
               </a:tblGrid>
-              <a:tr h="352044">
+              <a:tr h="411480">
                 <a:tc>
                   <a:txBody>
                     <a:bodyPr/>
@@ -5023,7 +5023,7 @@
                   </a:tcPr>
                 </a:tc>
               </a:tr>
-              <a:tr h="782726">
+              <a:tr h="914400">
                 <a:tc>
                   <a:txBody>
                     <a:bodyPr/>
@@ -5213,7 +5213,7 @@
                   </a:tcPr>
                 </a:tc>
               </a:tr>
-              <a:tr h="782726">
+              <a:tr h="914400">
                 <a:tc>
                   <a:txBody>
                     <a:bodyPr/>
@@ -5403,7 +5403,7 @@
                   </a:tcPr>
                 </a:tc>
               </a:tr>
-              <a:tr h="782726">
+              <a:tr h="914400">
                 <a:tc>
                   <a:txBody>
                     <a:bodyPr/>
@@ -5593,7 +5593,7 @@
                   </a:tcPr>
                 </a:tc>
               </a:tr>
-              <a:tr h="782726">
+              <a:tr h="914400">
                 <a:tc>
                   <a:txBody>
                     <a:bodyPr/>
@@ -5795,8 +5795,8 @@
         </p:nvSpPr>
         <p:spPr>
           <a:xfrm>
-            <a:off x="15503652" y="13030200"/>
-            <a:ext cx="14132052" cy="470002"/>
+            <a:off x="15503652" y="14447520"/>
+            <a:ext cx="14132052" cy="548640"/>
           </a:xfrm>
           <a:prstGeom prst="rect">
             <a:avLst/>
@@ -5834,7 +5834,7 @@
         </p:nvSpPr>
         <p:spPr>
           <a:xfrm>
-            <a:off x="15320772" y="13812926"/>
+            <a:off x="15320772" y="15361920"/>
             <a:ext cx="822960" cy="822960"/>
           </a:xfrm>
           <a:prstGeom prst="ellipse">
@@ -5854,7 +5854,7 @@
         </p:nvSpPr>
         <p:spPr>
           <a:xfrm>
-            <a:off x="15320772" y="13812926"/>
+            <a:off x="15320772" y="15361920"/>
             <a:ext cx="822960" cy="822960"/>
           </a:xfrm>
           <a:prstGeom prst="rect">
@@ -5893,7 +5893,7 @@
         </p:nvSpPr>
         <p:spPr>
           <a:xfrm>
-            <a:off x="16280892" y="13812926"/>
+            <a:off x="16280892" y="15361920"/>
             <a:ext cx="13537692" cy="822960"/>
           </a:xfrm>
           <a:prstGeom prst="rect">
@@ -5932,8 +5932,8 @@
         </p:nvSpPr>
         <p:spPr>
           <a:xfrm>
-            <a:off x="15320772" y="14674291"/>
-            <a:ext cx="14497812" cy="2192731"/>
+            <a:off x="15320772" y="16367760"/>
+            <a:ext cx="14497812" cy="2560320"/>
           </a:xfrm>
           <a:prstGeom prst="rect">
             <a:avLst/>
@@ -5959,8 +5959,8 @@
         </p:nvSpPr>
         <p:spPr>
           <a:xfrm>
-            <a:off x="15503652" y="14752930"/>
-            <a:ext cx="14132052" cy="391363"/>
+            <a:off x="15503652" y="16459200"/>
+            <a:ext cx="14132052" cy="457200"/>
           </a:xfrm>
           <a:prstGeom prst="rect">
             <a:avLst/>
@@ -6005,7 +6005,7 @@
           </p:nvPr>
         </p:nvGraphicFramePr>
         <p:xfrm>
-          <a:off x="15503652" y="15183612"/>
+          <a:off x="15503652" y="16962120"/>
           <a:ext cx="14132052" cy="914400"/>
         </p:xfrm>
         <a:graphic>
@@ -6016,7 +6016,7 @@
                 <a:gridCol w="3109051"/>
                 <a:gridCol w="11023001"/>
               </a:tblGrid>
-              <a:tr h="313639">
+              <a:tr h="365760">
                 <a:tc>
                   <a:txBody>
                     <a:bodyPr/>
@@ -6140,7 +6140,7 @@
                   </a:tcPr>
                 </a:tc>
               </a:tr>
-              <a:tr h="313639">
+              <a:tr h="365760">
                 <a:tc>
                   <a:txBody>
                     <a:bodyPr/>
@@ -6258,7 +6258,7 @@
                   </a:tcPr>
                 </a:tc>
               </a:tr>
-              <a:tr h="313639">
+              <a:tr h="365760">
                 <a:tc>
                   <a:txBody>
                     <a:bodyPr/>
@@ -6376,7 +6376,7 @@
                   </a:tcPr>
                 </a:tc>
               </a:tr>
-              <a:tr h="313639">
+              <a:tr h="365760">
                 <a:tc>
                   <a:txBody>
                     <a:bodyPr/>
@@ -6494,7 +6494,7 @@
                   </a:tcPr>
                 </a:tc>
               </a:tr>
-              <a:tr h="313639">
+              <a:tr h="365760">
                 <a:tc>
                   <a:txBody>
                     <a:bodyPr/>
@@ -6612,7 +6612,7 @@
                   </a:tcPr>
                 </a:tc>
               </a:tr>
-              <a:tr h="313639">
+              <a:tr h="365760">
                 <a:tc>
                   <a:txBody>
                     <a:bodyPr/>
@@ -6730,7 +6730,7 @@
                   </a:tcPr>
                 </a:tc>
               </a:tr>
-              <a:tr h="274320">
+              <a:tr h="320040">
                 <a:tc>
                   <a:txBody>
                     <a:bodyPr/>
@@ -6860,8 +6860,8 @@
         </p:nvSpPr>
         <p:spPr>
           <a:xfrm>
-            <a:off x="15320772" y="17493386"/>
-            <a:ext cx="14497812" cy="4306824"/>
+            <a:off x="15320772" y="19659600"/>
+            <a:ext cx="14497812" cy="5029200"/>
           </a:xfrm>
           <a:prstGeom prst="rect">
             <a:avLst/>
@@ -6887,8 +6887,8 @@
         </p:nvSpPr>
         <p:spPr>
           <a:xfrm>
-            <a:off x="15503652" y="17572025"/>
-            <a:ext cx="14132052" cy="391363"/>
+            <a:off x="15503652" y="19751040"/>
+            <a:ext cx="14132052" cy="457200"/>
           </a:xfrm>
           <a:prstGeom prst="rect">
             <a:avLst/>
@@ -6933,7 +6933,7 @@
           </p:nvPr>
         </p:nvGraphicFramePr>
         <p:xfrm>
-          <a:off x="15503652" y="18002707"/>
+          <a:off x="15503652" y="20253960"/>
           <a:ext cx="14132052" cy="914400"/>
         </p:xfrm>
         <a:graphic>
@@ -6945,7 +6945,7 @@
                 <a:gridCol w="5652821"/>
                 <a:gridCol w="5652821"/>
               </a:tblGrid>
-              <a:tr h="470002">
+              <a:tr h="548640">
                 <a:tc>
                   <a:txBody>
                     <a:bodyPr/>
@@ -7158,7 +7158,7 @@
                   </a:tcPr>
                 </a:tc>
               </a:tr>
-              <a:tr h="430682">
+              <a:tr h="502920">
                 <a:tc>
                   <a:txBody>
                     <a:bodyPr/>
@@ -7334,7 +7334,7 @@
                   </a:tcPr>
                 </a:tc>
               </a:tr>
-              <a:tr h="430682">
+              <a:tr h="502920">
                 <a:tc>
                   <a:txBody>
                     <a:bodyPr/>
@@ -7510,7 +7510,7 @@
                   </a:tcPr>
                 </a:tc>
               </a:tr>
-              <a:tr h="430682">
+              <a:tr h="502920">
                 <a:tc>
                   <a:txBody>
                     <a:bodyPr/>
@@ -7686,7 +7686,7 @@
                   </a:tcPr>
                 </a:tc>
               </a:tr>
-              <a:tr h="430682">
+              <a:tr h="502920">
                 <a:tc>
                   <a:txBody>
                     <a:bodyPr/>
@@ -7874,8 +7874,8 @@
         </p:nvSpPr>
         <p:spPr>
           <a:xfrm>
-            <a:off x="15503652" y="20234758"/>
-            <a:ext cx="14132052" cy="1175004"/>
+            <a:off x="15503652" y="22860000"/>
+            <a:ext cx="14132052" cy="1371600"/>
           </a:xfrm>
           <a:prstGeom prst="rect">
             <a:avLst/>
@@ -7969,8 +7969,8 @@
         </p:nvSpPr>
         <p:spPr>
           <a:xfrm>
-            <a:off x="15503652" y="21408847"/>
-            <a:ext cx="14132052" cy="626364"/>
+            <a:off x="15503652" y="24231600"/>
+            <a:ext cx="14132052" cy="731520"/>
           </a:xfrm>
           <a:prstGeom prst="rect">
             <a:avLst/>
@@ -8022,8 +8022,8 @@
         </p:nvSpPr>
         <p:spPr>
           <a:xfrm>
-            <a:off x="15320772" y="22192488"/>
-            <a:ext cx="14497812" cy="2819095"/>
+            <a:off x="15320772" y="25146000"/>
+            <a:ext cx="14497812" cy="3291840"/>
           </a:xfrm>
           <a:prstGeom prst="rect">
             <a:avLst/>
@@ -8049,8 +8049,8 @@
         </p:nvSpPr>
         <p:spPr>
           <a:xfrm>
-            <a:off x="15503652" y="22271126"/>
-            <a:ext cx="14132052" cy="391363"/>
+            <a:off x="15503652" y="25237440"/>
+            <a:ext cx="14132052" cy="457200"/>
           </a:xfrm>
           <a:prstGeom prst="rect">
             <a:avLst/>
@@ -8095,7 +8095,7 @@
           </p:nvPr>
         </p:nvGraphicFramePr>
         <p:xfrm>
-          <a:off x="15503652" y="22701809"/>
+          <a:off x="15503652" y="25740360"/>
           <a:ext cx="14132052" cy="914400"/>
         </p:xfrm>
         <a:graphic>
@@ -8107,7 +8107,7 @@
                 <a:gridCol w="5652821"/>
                 <a:gridCol w="5370180"/>
               </a:tblGrid>
-              <a:tr h="313639">
+              <a:tr h="365760">
                 <a:tc>
                   <a:txBody>
                     <a:bodyPr/>
@@ -8292,7 +8292,7 @@
                   </a:tcPr>
                 </a:tc>
               </a:tr>
-              <a:tr h="509321">
+              <a:tr h="594360">
                 <a:tc>
                   <a:txBody>
                     <a:bodyPr/>
@@ -8496,7 +8496,7 @@
                   </a:tcPr>
                 </a:tc>
               </a:tr>
-              <a:tr h="509321">
+              <a:tr h="594360">
                 <a:tc>
                   <a:txBody>
                     <a:bodyPr/>
@@ -8700,7 +8700,7 @@
                   </a:tcPr>
                 </a:tc>
               </a:tr>
-              <a:tr h="509321">
+              <a:tr h="594360">
                 <a:tc>
                   <a:txBody>
                     <a:bodyPr/>
@@ -8916,8 +8916,8 @@
         </p:nvSpPr>
         <p:spPr>
           <a:xfrm>
-            <a:off x="15320772" y="25168860"/>
-            <a:ext cx="14497812" cy="2036369"/>
+            <a:off x="15320772" y="28620720"/>
+            <a:ext cx="14497812" cy="2377440"/>
           </a:xfrm>
           <a:prstGeom prst="rect">
             <a:avLst/>
@@ -8943,8 +8943,8 @@
         </p:nvSpPr>
         <p:spPr>
           <a:xfrm>
-            <a:off x="15503652" y="25247498"/>
-            <a:ext cx="14132052" cy="391363"/>
+            <a:off x="15503652" y="28712160"/>
+            <a:ext cx="14132052" cy="457200"/>
           </a:xfrm>
           <a:prstGeom prst="rect">
             <a:avLst/>
@@ -8982,8 +8982,8 @@
         </p:nvSpPr>
         <p:spPr>
           <a:xfrm>
-            <a:off x="15503652" y="25678181"/>
-            <a:ext cx="14132052" cy="1410005"/>
+            <a:off x="15503652" y="29215080"/>
+            <a:ext cx="14132052" cy="1645920"/>
           </a:xfrm>
           <a:prstGeom prst="rect">
             <a:avLst/>
@@ -9072,8 +9072,8 @@
         </p:nvSpPr>
         <p:spPr>
           <a:xfrm>
-            <a:off x="15320772" y="27361591"/>
-            <a:ext cx="14497812" cy="2036369"/>
+            <a:off x="15320772" y="31181040"/>
+            <a:ext cx="14497812" cy="2377440"/>
           </a:xfrm>
           <a:prstGeom prst="rect">
             <a:avLst/>
@@ -9099,8 +9099,8 @@
         </p:nvSpPr>
         <p:spPr>
           <a:xfrm>
-            <a:off x="15503652" y="27440230"/>
-            <a:ext cx="14132052" cy="352044"/>
+            <a:off x="15503652" y="31272480"/>
+            <a:ext cx="14132052" cy="411480"/>
           </a:xfrm>
           <a:prstGeom prst="rect">
             <a:avLst/>
@@ -9138,8 +9138,8 @@
         </p:nvSpPr>
         <p:spPr>
           <a:xfrm>
-            <a:off x="15503652" y="27792274"/>
-            <a:ext cx="14132052" cy="1487729"/>
+            <a:off x="15503652" y="31683960"/>
+            <a:ext cx="14132052" cy="1737360"/>
           </a:xfrm>
           <a:prstGeom prst="rect">
             <a:avLst/>
@@ -9234,7 +9234,7 @@
         </p:nvSpPr>
         <p:spPr>
           <a:xfrm>
-            <a:off x="457200" y="37179504"/>
+            <a:off x="457200" y="34015680"/>
             <a:ext cx="29361384" cy="4572000"/>
           </a:xfrm>
           <a:prstGeom prst="rect">
@@ -9261,7 +9261,7 @@
         </p:nvSpPr>
         <p:spPr>
           <a:xfrm>
-            <a:off x="731520" y="37362384"/>
+            <a:off x="731520" y="34198560"/>
             <a:ext cx="822960" cy="822960"/>
           </a:xfrm>
           <a:prstGeom prst="ellipse">
@@ -9281,7 +9281,7 @@
         </p:nvSpPr>
         <p:spPr>
           <a:xfrm>
-            <a:off x="731520" y="37362384"/>
+            <a:off x="731520" y="34198560"/>
             <a:ext cx="822960" cy="822960"/>
           </a:xfrm>
           <a:prstGeom prst="rect">
@@ -9320,7 +9320,7 @@
         </p:nvSpPr>
         <p:spPr>
           <a:xfrm>
-            <a:off x="1691640" y="37362384"/>
+            <a:off x="1691640" y="34198560"/>
             <a:ext cx="27852624" cy="822960"/>
           </a:xfrm>
           <a:prstGeom prst="rect">
@@ -9359,7 +9359,7 @@
         </p:nvSpPr>
         <p:spPr>
           <a:xfrm>
-            <a:off x="731520" y="38459664"/>
+            <a:off x="731520" y="35295840"/>
             <a:ext cx="9421368" cy="2926080"/>
           </a:xfrm>
           <a:prstGeom prst="rect">
@@ -9386,7 +9386,7 @@
         </p:nvSpPr>
         <p:spPr>
           <a:xfrm>
-            <a:off x="731520" y="38459664"/>
+            <a:off x="731520" y="35295840"/>
             <a:ext cx="9421368" cy="73152"/>
           </a:xfrm>
           <a:prstGeom prst="rect">
@@ -9406,7 +9406,7 @@
         </p:nvSpPr>
         <p:spPr>
           <a:xfrm>
-            <a:off x="914400" y="38642544"/>
+            <a:off x="914400" y="35478720"/>
             <a:ext cx="457200" cy="457200"/>
           </a:xfrm>
           <a:prstGeom prst="rect">
@@ -9442,7 +9442,7 @@
         </p:nvSpPr>
         <p:spPr>
           <a:xfrm>
-            <a:off x="1463040" y="38642544"/>
+            <a:off x="1463040" y="35478720"/>
             <a:ext cx="8506968" cy="548640"/>
           </a:xfrm>
           <a:prstGeom prst="rect">
@@ -9481,7 +9481,7 @@
         </p:nvSpPr>
         <p:spPr>
           <a:xfrm>
-            <a:off x="1005840" y="39282624"/>
+            <a:off x="1005840" y="36118800"/>
             <a:ext cx="8872728" cy="1920240"/>
           </a:xfrm>
           <a:prstGeom prst="rect">
@@ -9520,7 +9520,7 @@
         </p:nvSpPr>
         <p:spPr>
           <a:xfrm>
-            <a:off x="10427208" y="38459664"/>
+            <a:off x="10427208" y="35295840"/>
             <a:ext cx="9421368" cy="2926080"/>
           </a:xfrm>
           <a:prstGeom prst="rect">
@@ -9547,7 +9547,7 @@
         </p:nvSpPr>
         <p:spPr>
           <a:xfrm>
-            <a:off x="10427208" y="38459664"/>
+            <a:off x="10427208" y="35295840"/>
             <a:ext cx="9421368" cy="73152"/>
           </a:xfrm>
           <a:prstGeom prst="rect">
@@ -9567,7 +9567,7 @@
         </p:nvSpPr>
         <p:spPr>
           <a:xfrm>
-            <a:off x="10610088" y="38642544"/>
+            <a:off x="10610088" y="35478720"/>
             <a:ext cx="457200" cy="457200"/>
           </a:xfrm>
           <a:prstGeom prst="rect">
@@ -9603,7 +9603,7 @@
         </p:nvSpPr>
         <p:spPr>
           <a:xfrm>
-            <a:off x="11158728" y="38642544"/>
+            <a:off x="11158728" y="35478720"/>
             <a:ext cx="8506968" cy="548640"/>
           </a:xfrm>
           <a:prstGeom prst="rect">
@@ -9642,7 +9642,7 @@
         </p:nvSpPr>
         <p:spPr>
           <a:xfrm>
-            <a:off x="10701528" y="39282624"/>
+            <a:off x="10701528" y="36118800"/>
             <a:ext cx="8872728" cy="1920240"/>
           </a:xfrm>
           <a:prstGeom prst="rect">
@@ -9681,7 +9681,7 @@
         </p:nvSpPr>
         <p:spPr>
           <a:xfrm>
-            <a:off x="20122896" y="38459664"/>
+            <a:off x="20122896" y="35295840"/>
             <a:ext cx="9421368" cy="2926080"/>
           </a:xfrm>
           <a:prstGeom prst="rect">
@@ -9708,7 +9708,7 @@
         </p:nvSpPr>
         <p:spPr>
           <a:xfrm>
-            <a:off x="20122896" y="38459664"/>
+            <a:off x="20122896" y="35295840"/>
             <a:ext cx="9421368" cy="73152"/>
           </a:xfrm>
           <a:prstGeom prst="rect">
@@ -9728,7 +9728,7 @@
         </p:nvSpPr>
         <p:spPr>
           <a:xfrm>
-            <a:off x="20305776" y="38642544"/>
+            <a:off x="20305776" y="35478720"/>
             <a:ext cx="457200" cy="457200"/>
           </a:xfrm>
           <a:prstGeom prst="rect">
@@ -9764,7 +9764,7 @@
         </p:nvSpPr>
         <p:spPr>
           <a:xfrm>
-            <a:off x="20854416" y="38642544"/>
+            <a:off x="20854416" y="35478720"/>
             <a:ext cx="8506968" cy="548640"/>
           </a:xfrm>
           <a:prstGeom prst="rect">
@@ -9803,7 +9803,7 @@
         </p:nvSpPr>
         <p:spPr>
           <a:xfrm>
-            <a:off x="20397216" y="39282624"/>
+            <a:off x="20397216" y="36118800"/>
             <a:ext cx="8872728" cy="1920240"/>
           </a:xfrm>
           <a:prstGeom prst="rect">

--- a/A0_Poster/2026-03-09/A0_Final_Poster_revised.pptx
+++ b/A0_Poster/2026-03-09/A0_Final_Poster_revised.pptx
@@ -4,14 +4,14 @@
   <p:sldMasterIdLst>
     <p:sldMasterId id="2147483648" r:id="rId1"/>
   </p:sldMasterIdLst>
+  <p:notesMasterIdLst>
+    <p:notesMasterId r:id="rId3"/>
+  </p:notesMasterIdLst>
   <p:sldIdLst>
     <p:sldId id="256" r:id="rId2"/>
   </p:sldIdLst>
-  <p:notesMasterIdLst>
-    <p:notesMasterId r:id="rId3"/>
-  </p:notesMasterIdLst>
-  <p:sldSz cx="30275784" cy="42803064"/>
-  <p:notesSz cx="42803064" cy="30275784"/>
+  <p:sldSz cx="30275213" cy="42803763"/>
+  <p:notesSz cx="42803763" cy="30275213"/>
   <p:defaultTextStyle>
     <a:lvl1pPr marL="0" algn="l" defTabSz="914400" rtl="0" eaLnBrk="1" latinLnBrk="0" hangingPunct="1">
       <a:defRPr sz="1800" kern="1200">
@@ -104,6 +104,11 @@
       </a:defRPr>
     </a:lvl9pPr>
   </p:defaultTextStyle>
+  <p:extLst>
+    <p:ext uri="{EFAFB233-063F-42B5-8137-9DF3F51BA10A}">
+      <p15:sldGuideLst xmlns:p15="http://schemas.microsoft.com/office/powerpoint/2012/main"/>
+    </p:ext>
+  </p:extLst>
 </p:presentation>
 </file>
 
@@ -129,241 +134,17 @@
           <a:chExt cx="0" cy="0"/>
         </a:xfrm>
       </p:grpSpPr>
-      <p:sp>
-        <p:nvSpPr>
-          <p:cNvPr id="2" name="Header Placeholder 1"/>
-          <p:cNvSpPr>
-            <a:spLocks noGrp="1"/>
-          </p:cNvSpPr>
-          <p:nvPr>
-            <p:ph type="hdr" sz="quarter"/>
-          </p:nvPr>
-        </p:nvSpPr>
-        <p:spPr>
-          <a:xfrm>
-            <a:off x="0" y="0"/>
-            <a:ext cx="2971800" cy="458788"/>
-          </a:xfrm>
-          <a:prstGeom prst="rect">
-            <a:avLst/>
-          </a:prstGeom>
-        </p:spPr>
-        <p:txBody>
-          <a:bodyPr vert="horz" lIns="91440" tIns="45720" rIns="91440" bIns="45720" rtlCol="0"/>
-          <a:lstStyle>
-            <a:lvl1pPr algn="l">
-              <a:defRPr sz="1200"/>
-            </a:lvl1pPr>
-          </a:lstStyle>
-          <a:p>
-            <a:endParaRPr lang="en-US"/>
-          </a:p>
-        </p:txBody>
-      </p:sp>
-      <p:sp>
-        <p:nvSpPr>
-          <p:cNvPr id="3" name="Date Placeholder 2"/>
-          <p:cNvSpPr>
-            <a:spLocks noGrp="1"/>
-          </p:cNvSpPr>
-          <p:nvPr>
-            <p:ph type="dt" idx="1"/>
-          </p:nvPr>
-        </p:nvSpPr>
-        <p:spPr>
-          <a:xfrm>
-            <a:off x="3884613" y="0"/>
-            <a:ext cx="2971800" cy="458788"/>
-          </a:xfrm>
-          <a:prstGeom prst="rect">
-            <a:avLst/>
-          </a:prstGeom>
-        </p:spPr>
-        <p:txBody>
-          <a:bodyPr vert="horz" lIns="91440" tIns="45720" rIns="91440" bIns="45720" rtlCol="0"/>
-          <a:lstStyle>
-            <a:lvl1pPr algn="r">
-              <a:defRPr sz="1200"/>
-            </a:lvl1pPr>
-          </a:lstStyle>
-          <a:p>
-            <a:fld id="{5282F153-3F37-0F45-9E97-73ACFA13230C}" type="datetimeFigureOut">
-              <a:rPr lang="en-US"/>
-              <a:t>7/23/19</a:t>
-            </a:fld>
-            <a:endParaRPr lang="en-US"/>
-          </a:p>
-        </p:txBody>
-      </p:sp>
-      <p:sp>
-        <p:nvSpPr>
-          <p:cNvPr id="4" name="Slide Image Placeholder 3"/>
-          <p:cNvSpPr>
-            <a:spLocks noGrp="1" noRot="1" noChangeAspect="1"/>
-          </p:cNvSpPr>
-          <p:nvPr>
-            <p:ph type="sldImg" idx="2"/>
-          </p:nvPr>
-        </p:nvSpPr>
-        <p:spPr>
-          <a:xfrm>
-            <a:off x="685800" y="1143000"/>
-            <a:ext cx="5486400" cy="3086100"/>
-          </a:xfrm>
-          <a:prstGeom prst="rect">
-            <a:avLst/>
-          </a:prstGeom>
-          <a:noFill/>
-          <a:ln w="12700">
-            <a:solidFill>
-              <a:prstClr val="black"/>
-            </a:solidFill>
-          </a:ln>
-        </p:spPr>
-        <p:txBody>
-          <a:bodyPr vert="horz" lIns="91440" tIns="45720" rIns="91440" bIns="45720" rtlCol="0" anchor="ctr"/>
-          <a:lstStyle/>
-          <a:p>
-            <a:endParaRPr lang="en-US"/>
-          </a:p>
-        </p:txBody>
-      </p:sp>
-      <p:sp>
-        <p:nvSpPr>
-          <p:cNvPr id="5" name="Notes Placeholder 4"/>
-          <p:cNvSpPr>
-            <a:spLocks noGrp="1"/>
-          </p:cNvSpPr>
-          <p:nvPr>
-            <p:ph type="body" sz="quarter" idx="3"/>
-          </p:nvPr>
-        </p:nvSpPr>
-        <p:spPr>
-          <a:xfrm>
-            <a:off x="685800" y="4400550"/>
-            <a:ext cx="5486400" cy="3600450"/>
-          </a:xfrm>
-          <a:prstGeom prst="rect">
-            <a:avLst/>
-          </a:prstGeom>
-        </p:spPr>
-        <p:txBody>
-          <a:bodyPr vert="horz" lIns="91440" tIns="45720" rIns="91440" bIns="45720" rtlCol="0"/>
-          <a:lstStyle/>
-          <a:p>
-            <a:pPr lvl="0"/>
-            <a:r>
-              <a:rPr lang="en-US"/>
-              <a:t>Click to edit Master text styles</a:t>
-            </a:r>
-          </a:p>
-          <a:p>
-            <a:pPr lvl="1"/>
-            <a:r>
-              <a:rPr lang="en-US"/>
-              <a:t>Second level</a:t>
-            </a:r>
-          </a:p>
-          <a:p>
-            <a:pPr lvl="2"/>
-            <a:r>
-              <a:rPr lang="en-US"/>
-              <a:t>Third level</a:t>
-            </a:r>
-          </a:p>
-          <a:p>
-            <a:pPr lvl="3"/>
-            <a:r>
-              <a:rPr lang="en-US"/>
-              <a:t>Fourth level</a:t>
-            </a:r>
-          </a:p>
-          <a:p>
-            <a:pPr lvl="4"/>
-            <a:r>
-              <a:rPr lang="en-US"/>
-              <a:t>Fifth level</a:t>
-            </a:r>
-          </a:p>
-        </p:txBody>
-      </p:sp>
-      <p:sp>
-        <p:nvSpPr>
-          <p:cNvPr id="6" name="Footer Placeholder 5"/>
-          <p:cNvSpPr>
-            <a:spLocks noGrp="1"/>
-          </p:cNvSpPr>
-          <p:nvPr>
-            <p:ph type="ftr" sz="quarter" idx="4"/>
-          </p:nvPr>
-        </p:nvSpPr>
-        <p:spPr>
-          <a:xfrm>
-            <a:off x="0" y="8685213"/>
-            <a:ext cx="2971800" cy="458787"/>
-          </a:xfrm>
-          <a:prstGeom prst="rect">
-            <a:avLst/>
-          </a:prstGeom>
-        </p:spPr>
-        <p:txBody>
-          <a:bodyPr vert="horz" lIns="91440" tIns="45720" rIns="91440" bIns="45720" rtlCol="0" anchor="b"/>
-          <a:lstStyle>
-            <a:lvl1pPr algn="l">
-              <a:defRPr sz="1200"/>
-            </a:lvl1pPr>
-          </a:lstStyle>
-          <a:p>
-            <a:endParaRPr lang="en-US"/>
-          </a:p>
-        </p:txBody>
-      </p:sp>
-      <p:sp>
-        <p:nvSpPr>
-          <p:cNvPr id="7" name="Slide Number Placeholder 6"/>
-          <p:cNvSpPr>
-            <a:spLocks noGrp="1"/>
-          </p:cNvSpPr>
-          <p:nvPr>
-            <p:ph type="sldNum" sz="quarter" idx="5"/>
-          </p:nvPr>
-        </p:nvSpPr>
-        <p:spPr>
-          <a:xfrm>
-            <a:off x="3884613" y="8685213"/>
-            <a:ext cx="2971800" cy="458787"/>
-          </a:xfrm>
-          <a:prstGeom prst="rect">
-            <a:avLst/>
-          </a:prstGeom>
-        </p:spPr>
-        <p:txBody>
-          <a:bodyPr vert="horz" lIns="91440" tIns="45720" rIns="91440" bIns="45720" rtlCol="0" anchor="b"/>
-          <a:lstStyle>
-            <a:lvl1pPr algn="r">
-              <a:defRPr sz="1200"/>
-            </a:lvl1pPr>
-          </a:lstStyle>
-          <a:p>
-            <a:fld id="{CE5E9CC1-C706-0F49-92D6-E571CC5EEA8F}" type="slidenum">
-              <a:rPr lang="en-US"/>
-              <a:t>‹#›</a:t>
-            </a:fld>
-            <a:endParaRPr lang="en-US"/>
-          </a:p>
-        </p:txBody>
-      </p:sp>
     </p:spTree>
     <p:extLst>
       <p:ext uri="{BB962C8B-B14F-4D97-AF65-F5344CB8AC3E}">
-        <p14:creationId xmlns:p14="http://schemas.microsoft.com/office/powerpoint/2010/main" val="1024086991"/>
+        <p14:creationId xmlns:p14="http://schemas.microsoft.com/office/powerpoint/2010/main" val="3099086631"/>
       </p:ext>
     </p:extLst>
   </p:cSld>
   <p:clrMap bg1="lt1" tx1="dk1" bg2="lt2" tx2="dk2" accent1="accent1" accent2="accent2" accent3="accent3" accent4="accent4" accent5="accent5" accent6="accent6" hlink="hlink" folHlink="folHlink"/>
   <p:notesStyle>
     <a:lvl1pPr marL="0" algn="l" defTabSz="914400" rtl="0" eaLnBrk="1" latinLnBrk="0" hangingPunct="1">
-      <a:defRPr sz="1200" kern="1200">
+      <a:defRPr kumimoji="1" sz="1200" kern="1200">
         <a:solidFill>
           <a:schemeClr val="tx1"/>
         </a:solidFill>
@@ -373,7 +154,7 @@
       </a:defRPr>
     </a:lvl1pPr>
     <a:lvl2pPr marL="457200" algn="l" defTabSz="914400" rtl="0" eaLnBrk="1" latinLnBrk="0" hangingPunct="1">
-      <a:defRPr sz="1200" kern="1200">
+      <a:defRPr kumimoji="1" sz="1200" kern="1200">
         <a:solidFill>
           <a:schemeClr val="tx1"/>
         </a:solidFill>
@@ -383,7 +164,7 @@
       </a:defRPr>
     </a:lvl2pPr>
     <a:lvl3pPr marL="914400" algn="l" defTabSz="914400" rtl="0" eaLnBrk="1" latinLnBrk="0" hangingPunct="1">
-      <a:defRPr sz="1200" kern="1200">
+      <a:defRPr kumimoji="1" sz="1200" kern="1200">
         <a:solidFill>
           <a:schemeClr val="tx1"/>
         </a:solidFill>
@@ -393,7 +174,7 @@
       </a:defRPr>
     </a:lvl3pPr>
     <a:lvl4pPr marL="1371600" algn="l" defTabSz="914400" rtl="0" eaLnBrk="1" latinLnBrk="0" hangingPunct="1">
-      <a:defRPr sz="1200" kern="1200">
+      <a:defRPr kumimoji="1" sz="1200" kern="1200">
         <a:solidFill>
           <a:schemeClr val="tx1"/>
         </a:solidFill>
@@ -403,7 +184,7 @@
       </a:defRPr>
     </a:lvl4pPr>
     <a:lvl5pPr marL="1828800" algn="l" defTabSz="914400" rtl="0" eaLnBrk="1" latinLnBrk="0" hangingPunct="1">
-      <a:defRPr sz="1200" kern="1200">
+      <a:defRPr kumimoji="1" sz="1200" kern="1200">
         <a:solidFill>
           <a:schemeClr val="tx1"/>
         </a:solidFill>
@@ -413,7 +194,7 @@
       </a:defRPr>
     </a:lvl5pPr>
     <a:lvl6pPr marL="2286000" algn="l" defTabSz="914400" rtl="0" eaLnBrk="1" latinLnBrk="0" hangingPunct="1">
-      <a:defRPr sz="1200" kern="1200">
+      <a:defRPr kumimoji="1" sz="1200" kern="1200">
         <a:solidFill>
           <a:schemeClr val="tx1"/>
         </a:solidFill>
@@ -423,7 +204,7 @@
       </a:defRPr>
     </a:lvl6pPr>
     <a:lvl7pPr marL="2743200" algn="l" defTabSz="914400" rtl="0" eaLnBrk="1" latinLnBrk="0" hangingPunct="1">
-      <a:defRPr sz="1200" kern="1200">
+      <a:defRPr kumimoji="1" sz="1200" kern="1200">
         <a:solidFill>
           <a:schemeClr val="tx1"/>
         </a:solidFill>
@@ -433,7 +214,7 @@
       </a:defRPr>
     </a:lvl7pPr>
     <a:lvl8pPr marL="3200400" algn="l" defTabSz="914400" rtl="0" eaLnBrk="1" latinLnBrk="0" hangingPunct="1">
-      <a:defRPr sz="1200" kern="1200">
+      <a:defRPr kumimoji="1" sz="1200" kern="1200">
         <a:solidFill>
           <a:schemeClr val="tx1"/>
         </a:solidFill>
@@ -443,7 +224,7 @@
       </a:defRPr>
     </a:lvl8pPr>
     <a:lvl9pPr marL="3657600" algn="l" defTabSz="914400" rtl="0" eaLnBrk="1" latinLnBrk="0" hangingPunct="1">
-      <a:defRPr sz="1200" kern="1200">
+      <a:defRPr kumimoji="1" sz="1200" kern="1200">
         <a:solidFill>
           <a:schemeClr val="tx1"/>
         </a:solidFill>
@@ -500,10 +281,6 @@
           <a:bodyPr/>
           <a:lstStyle/>
           <a:p>
-            <a:r>
-              <a:rPr lang="en-US" dirty="0"/>
-              <a:t/>
-            </a:r>
             <a:endParaRPr lang="en-US" dirty="0"/>
           </a:p>
         </p:txBody>
@@ -577,6 +354,11 @@
 <file path=ppt/slideMasters/slideMaster1.xml><?xml version="1.0" encoding="utf-8"?>
 <p:sldMaster xmlns:a="http://schemas.openxmlformats.org/drawingml/2006/main" xmlns:r="http://schemas.openxmlformats.org/officeDocument/2006/relationships" xmlns:p="http://schemas.openxmlformats.org/presentationml/2006/main">
   <p:cSld>
+    <p:bg>
+      <p:bgRef idx="1001">
+        <a:schemeClr val="bg1"/>
+      </p:bgRef>
+    </p:bg>
     <p:spTree>
       <p:nvGrpSpPr>
         <p:cNvPr id="1" name=""/>
@@ -859,6 +641,7 @@
         <a:solidFill>
           <a:srgbClr val="FFFFFF"/>
         </a:solidFill>
+        <a:effectLst/>
       </p:bgPr>
     </p:bg>
     <p:spTree>
@@ -894,6 +677,13 @@
           </a:solidFill>
           <a:ln/>
         </p:spPr>
+        <p:txBody>
+          <a:bodyPr/>
+          <a:lstStyle/>
+          <a:p>
+            <a:endParaRPr lang="ja-JP" altLang="en-US"/>
+          </a:p>
+        </p:txBody>
       </p:sp>
       <p:sp>
         <p:nvSpPr>
@@ -914,6 +704,13 @@
           </a:solidFill>
           <a:ln/>
         </p:spPr>
+        <p:txBody>
+          <a:bodyPr/>
+          <a:lstStyle/>
+          <a:p>
+            <a:endParaRPr lang="ja-JP" altLang="en-US"/>
+          </a:p>
+        </p:txBody>
       </p:sp>
       <p:sp>
         <p:nvSpPr>
@@ -936,7 +733,7 @@
           <a:bodyPr wrap="square" rtlCol="0" anchor="ctr"/>
           <a:lstStyle/>
           <a:p>
-            <a:pPr algn="ctr" indent="0" marL="0">
+            <a:pPr marL="0" indent="0" algn="ctr">
               <a:buNone/>
             </a:pPr>
             <a:r>
@@ -975,7 +772,7 @@
           <a:bodyPr wrap="square" rtlCol="0" anchor="ctr"/>
           <a:lstStyle/>
           <a:p>
-            <a:pPr algn="ctr" indent="0" marL="0">
+            <a:pPr marL="0" indent="0" algn="ctr">
               <a:buNone/>
             </a:pPr>
             <a:r>
@@ -1014,7 +811,7 @@
           <a:bodyPr wrap="square" rtlCol="0" anchor="ctr"/>
           <a:lstStyle/>
           <a:p>
-            <a:pPr algn="ctr" indent="0" marL="0">
+            <a:pPr marL="0" indent="0" algn="ctr">
               <a:buNone/>
             </a:pPr>
             <a:r>
@@ -1053,7 +850,7 @@
           <a:bodyPr wrap="square" rtlCol="0" anchor="ctr"/>
           <a:lstStyle/>
           <a:p>
-            <a:pPr algn="ctr" indent="0" marL="0">
+            <a:pPr marL="0" indent="0" algn="ctr">
               <a:buNone/>
             </a:pPr>
             <a:r>
@@ -1090,6 +887,13 @@
           </a:solidFill>
           <a:ln/>
         </p:spPr>
+        <p:txBody>
+          <a:bodyPr/>
+          <a:lstStyle/>
+          <a:p>
+            <a:endParaRPr lang="ja-JP" altLang="en-US"/>
+          </a:p>
+        </p:txBody>
       </p:sp>
       <p:sp>
         <p:nvSpPr>
@@ -1112,7 +916,7 @@
           <a:bodyPr wrap="square" rtlCol="0" anchor="ctr"/>
           <a:lstStyle/>
           <a:p>
-            <a:pPr algn="ctr" indent="0" marL="0">
+            <a:pPr marL="0" indent="0" algn="ctr">
               <a:buNone/>
             </a:pPr>
             <a:r>
@@ -1151,7 +955,7 @@
           <a:bodyPr wrap="square" lIns="0" tIns="0" rIns="0" bIns="0" rtlCol="0" anchor="ctr"/>
           <a:lstStyle/>
           <a:p>
-            <a:pPr indent="0" marL="0">
+            <a:pPr marL="0" indent="0">
               <a:buNone/>
             </a:pPr>
             <a:r>
@@ -1188,13 +992,20 @@
           </a:solidFill>
           <a:ln/>
           <a:effectLst>
-            <a:outerShdw sx="100000" sy="100000" kx="0" ky="0" algn="bl" rotWithShape="0" blurRad="25400" dist="12700" dir="8100000">
+            <a:outerShdw blurRad="25400" dist="12700" dir="8100000" algn="bl" rotWithShape="0">
               <a:srgbClr val="000000">
                 <a:alpha val="8000"/>
               </a:srgbClr>
             </a:outerShdw>
           </a:effectLst>
         </p:spPr>
+        <p:txBody>
+          <a:bodyPr/>
+          <a:lstStyle/>
+          <a:p>
+            <a:endParaRPr lang="ja-JP" altLang="en-US"/>
+          </a:p>
+        </p:txBody>
       </p:sp>
       <p:sp>
         <p:nvSpPr>
@@ -1204,8 +1015,8 @@
         </p:nvSpPr>
         <p:spPr>
           <a:xfrm>
-            <a:off x="457200" y="5577840"/>
-            <a:ext cx="14497812" cy="3291840"/>
+            <a:off x="457200" y="5792724"/>
+            <a:ext cx="14497812" cy="2971800"/>
           </a:xfrm>
           <a:prstGeom prst="rect">
             <a:avLst/>
@@ -1218,6 +1029,9 @@
           <a:lstStyle/>
           <a:p>
             <a:pPr marL="342900" indent="-342900">
+              <a:lnSpc>
+                <a:spcPct val="150000"/>
+              </a:lnSpc>
               <a:buSzPct val="100000"/>
               <a:buChar char="•"/>
             </a:pPr>
@@ -1230,12 +1044,15 @@
                 <a:ea typeface="Calibri" pitchFamily="34" charset="-122"/>
                 <a:cs typeface="Calibri" pitchFamily="34" charset="-120"/>
               </a:rPr>
-              <a:t>Official support matrices exclude gfx900 in ROCm 7.2, but real systems can still execute through residual code and artifact paths.</a:t>
+              <a:t>Official support matrices not listed gfx900 in ROCm 7.2, but real systems can still execute through residual code and artifact paths.</a:t>
             </a:r>
             <a:endParaRPr lang="en-US" sz="2200" dirty="0"/>
           </a:p>
           <a:p>
             <a:pPr marL="342900" indent="-342900">
+              <a:lnSpc>
+                <a:spcPct val="150000"/>
+              </a:lnSpc>
               <a:buSzPct val="100000"/>
               <a:buChar char="•"/>
             </a:pPr>
@@ -1254,6 +1071,9 @@
           </a:p>
           <a:p>
             <a:pPr marL="342900" indent="-342900">
+              <a:lnSpc>
+                <a:spcPct val="150000"/>
+              </a:lnSpc>
               <a:buSzPct val="100000"/>
               <a:buChar char="•"/>
             </a:pPr>
@@ -1272,6 +1092,9 @@
           </a:p>
           <a:p>
             <a:pPr marL="342900" indent="-342900">
+              <a:lnSpc>
+                <a:spcPct val="150000"/>
+              </a:lnSpc>
               <a:buSzPct val="100000"/>
               <a:buChar char="•"/>
             </a:pPr>
@@ -1309,6 +1132,13 @@
           </a:solidFill>
           <a:ln/>
         </p:spPr>
+        <p:txBody>
+          <a:bodyPr/>
+          <a:lstStyle/>
+          <a:p>
+            <a:endParaRPr lang="ja-JP" altLang="en-US"/>
+          </a:p>
+        </p:txBody>
       </p:sp>
       <p:sp>
         <p:nvSpPr>
@@ -1331,7 +1161,7 @@
           <a:bodyPr wrap="square" rtlCol="0" anchor="ctr"/>
           <a:lstStyle/>
           <a:p>
-            <a:pPr algn="ctr" indent="0" marL="0">
+            <a:pPr marL="0" indent="0" algn="ctr">
               <a:buNone/>
             </a:pPr>
             <a:r>
@@ -1370,7 +1200,7 @@
           <a:bodyPr wrap="square" lIns="0" tIns="0" rIns="0" bIns="0" rtlCol="0" anchor="ctr"/>
           <a:lstStyle/>
           <a:p>
-            <a:pPr indent="0" marL="0">
+            <a:pPr marL="0" indent="0">
               <a:buNone/>
             </a:pPr>
             <a:r>
@@ -1397,7 +1227,7 @@
         <p:spPr>
           <a:xfrm>
             <a:off x="457200" y="10058400"/>
-            <a:ext cx="14497812" cy="2743200"/>
+            <a:ext cx="14497812" cy="2560320"/>
           </a:xfrm>
           <a:prstGeom prst="rect">
             <a:avLst/>
@@ -1407,13 +1237,20 @@
           </a:solidFill>
           <a:ln/>
           <a:effectLst>
-            <a:outerShdw sx="100000" sy="100000" kx="0" ky="0" algn="bl" rotWithShape="0" blurRad="25400" dist="12700" dir="8100000">
+            <a:outerShdw blurRad="25400" dist="12700" dir="8100000" algn="bl" rotWithShape="0">
               <a:srgbClr val="000000">
                 <a:alpha val="8000"/>
               </a:srgbClr>
             </a:outerShdw>
           </a:effectLst>
         </p:spPr>
+        <p:txBody>
+          <a:bodyPr/>
+          <a:lstStyle/>
+          <a:p>
+            <a:endParaRPr lang="ja-JP" altLang="en-US"/>
+          </a:p>
+        </p:txBody>
       </p:sp>
       <p:sp>
         <p:nvSpPr>
@@ -1423,7 +1260,7 @@
         </p:nvSpPr>
         <p:spPr>
           <a:xfrm>
-            <a:off x="457200" y="10058400"/>
+            <a:off x="456629" y="10241280"/>
             <a:ext cx="14497812" cy="2743200"/>
           </a:xfrm>
           <a:prstGeom prst="rect">
@@ -1437,6 +1274,9 @@
           <a:lstStyle/>
           <a:p>
             <a:pPr marL="342900" indent="-342900">
+              <a:lnSpc>
+                <a:spcPct val="150000"/>
+              </a:lnSpc>
               <a:buSzPct val="100000"/>
               <a:buChar char="•"/>
             </a:pPr>
@@ -1455,6 +1295,9 @@
           </a:p>
           <a:p>
             <a:pPr marL="342900" indent="-342900">
+              <a:lnSpc>
+                <a:spcPct val="150000"/>
+              </a:lnSpc>
               <a:buSzPct val="100000"/>
               <a:buChar char="•"/>
             </a:pPr>
@@ -1473,6 +1316,9 @@
           </a:p>
           <a:p>
             <a:pPr marL="342900" indent="-342900">
+              <a:lnSpc>
+                <a:spcPct val="150000"/>
+              </a:lnSpc>
               <a:buSzPct val="100000"/>
               <a:buChar char="•"/>
             </a:pPr>
@@ -1510,6 +1356,13 @@
           </a:solidFill>
           <a:ln/>
         </p:spPr>
+        <p:txBody>
+          <a:bodyPr/>
+          <a:lstStyle/>
+          <a:p>
+            <a:endParaRPr lang="ja-JP" altLang="en-US"/>
+          </a:p>
+        </p:txBody>
       </p:sp>
       <p:sp>
         <p:nvSpPr>
@@ -1532,7 +1385,7 @@
           <a:bodyPr wrap="square" rtlCol="0" anchor="ctr"/>
           <a:lstStyle/>
           <a:p>
-            <a:pPr algn="ctr" indent="0" marL="0">
+            <a:pPr marL="0" indent="0" algn="ctr">
               <a:buNone/>
             </a:pPr>
             <a:r>
@@ -1571,7 +1424,7 @@
           <a:bodyPr wrap="square" lIns="0" tIns="0" rIns="0" bIns="0" rtlCol="0" anchor="ctr"/>
           <a:lstStyle/>
           <a:p>
-            <a:pPr indent="0" marL="0">
+            <a:pPr marL="0" indent="0">
               <a:buNone/>
             </a:pPr>
             <a:r>
@@ -1608,13 +1461,20 @@
           </a:solidFill>
           <a:ln/>
           <a:effectLst>
-            <a:outerShdw sx="100000" sy="100000" kx="0" ky="0" algn="bl" rotWithShape="0" blurRad="25400" dist="12700" dir="8100000">
+            <a:outerShdw blurRad="25400" dist="12700" dir="8100000" algn="bl" rotWithShape="0">
               <a:srgbClr val="000000">
                 <a:alpha val="8000"/>
               </a:srgbClr>
             </a:outerShdw>
           </a:effectLst>
         </p:spPr>
+        <p:txBody>
+          <a:bodyPr/>
+          <a:lstStyle/>
+          <a:p>
+            <a:endParaRPr lang="ja-JP" altLang="en-US"/>
+          </a:p>
+        </p:txBody>
       </p:sp>
       <p:sp>
         <p:nvSpPr>
@@ -1637,7 +1497,7 @@
           <a:bodyPr wrap="square" rtlCol="0" anchor="ctr"/>
           <a:lstStyle/>
           <a:p>
-            <a:pPr indent="0" marL="0">
+            <a:pPr marL="0" indent="0">
               <a:buNone/>
             </a:pPr>
             <a:r>
@@ -1657,7 +1517,7 @@
       </p:sp>
       <p:graphicFrame>
         <p:nvGraphicFramePr>
-          <p:cNvPr id="2" name="Table 0"/>
+          <p:cNvPr id="23" name="Table 0"/>
           <p:cNvGraphicFramePr>
             <a:graphicFrameLocks noGrp="1"/>
           </p:cNvGraphicFramePr>
@@ -1671,16 +1531,34 @@
         </p:nvGraphicFramePr>
         <p:xfrm>
           <a:off x="640080" y="14721840"/>
-          <a:ext cx="14132052" cy="914400"/>
+          <a:ext cx="14132052" cy="4709160"/>
         </p:xfrm>
         <a:graphic>
           <a:graphicData uri="http://schemas.openxmlformats.org/drawingml/2006/table">
             <a:tbl>
               <a:tblPr/>
               <a:tblGrid>
-                <a:gridCol w="2826410"/>
-                <a:gridCol w="7348667"/>
-                <a:gridCol w="3956975"/>
+                <a:gridCol w="2826410">
+                  <a:extLst>
+                    <a:ext uri="{9D8B030D-6E8A-4147-A177-3AD203B41FA5}">
+                      <a16:colId xmlns:a16="http://schemas.microsoft.com/office/drawing/2014/main" val="20000"/>
+                    </a:ext>
+                  </a:extLst>
+                </a:gridCol>
+                <a:gridCol w="7348667">
+                  <a:extLst>
+                    <a:ext uri="{9D8B030D-6E8A-4147-A177-3AD203B41FA5}">
+                      <a16:colId xmlns:a16="http://schemas.microsoft.com/office/drawing/2014/main" val="20001"/>
+                    </a:ext>
+                  </a:extLst>
+                </a:gridCol>
+                <a:gridCol w="3956975">
+                  <a:extLst>
+                    <a:ext uri="{9D8B030D-6E8A-4147-A177-3AD203B41FA5}">
+                      <a16:colId xmlns:a16="http://schemas.microsoft.com/office/drawing/2014/main" val="20002"/>
+                    </a:ext>
+                  </a:extLst>
+                </a:gridCol>
               </a:tblGrid>
               <a:tr h="411480">
                 <a:tc>
@@ -1688,7 +1566,7 @@
                     <a:bodyPr/>
                     <a:lstStyle/>
                     <a:p>
-                      <a:pPr indent="0" marL="0">
+                      <a:pPr marL="0" indent="0">
                         <a:buNone/>
                       </a:pPr>
                       <a:r>
@@ -1702,7 +1580,7 @@
                       <a:endParaRPr lang="en-US" sz="2000" dirty="0"/>
                     </a:p>
                   </a:txBody>
-                  <a:tcPr marL="91440" marR="91440" marT="45720" marB="45720">
+                  <a:tcPr>
                     <a:lnL w="12700" cap="flat" cmpd="sng" algn="ctr">
                       <a:solidFill>
                         <a:srgbClr val="BDBDBD"/>
@@ -1749,7 +1627,7 @@
                     <a:bodyPr/>
                     <a:lstStyle/>
                     <a:p>
-                      <a:pPr indent="0" marL="0">
+                      <a:pPr marL="0" indent="0">
                         <a:buNone/>
                       </a:pPr>
                       <a:r>
@@ -1763,7 +1641,7 @@
                       <a:endParaRPr lang="en-US" sz="2000" dirty="0"/>
                     </a:p>
                   </a:txBody>
-                  <a:tcPr marL="91440" marR="91440" marT="45720" marB="45720">
+                  <a:tcPr>
                     <a:lnL w="12700" cap="flat" cmpd="sng" algn="ctr">
                       <a:solidFill>
                         <a:srgbClr val="BDBDBD"/>
@@ -1810,7 +1688,7 @@
                     <a:bodyPr/>
                     <a:lstStyle/>
                     <a:p>
-                      <a:pPr indent="0" marL="0">
+                      <a:pPr marL="0" indent="0">
                         <a:buNone/>
                       </a:pPr>
                       <a:r>
@@ -1824,7 +1702,7 @@
                       <a:endParaRPr lang="en-US" sz="2000" dirty="0"/>
                     </a:p>
                   </a:txBody>
-                  <a:tcPr marL="91440" marR="91440" marT="45720" marB="45720">
+                  <a:tcPr>
                     <a:lnL w="12700" cap="flat" cmpd="sng" algn="ctr">
                       <a:solidFill>
                         <a:srgbClr val="BDBDBD"/>
@@ -1866,6 +1744,11 @@
                     </a:solidFill>
                   </a:tcPr>
                 </a:tc>
+                <a:extLst>
+                  <a:ext uri="{0D108BD9-81ED-4DB2-BD59-A6C34878D82A}">
+                    <a16:rowId xmlns:a16="http://schemas.microsoft.com/office/drawing/2014/main" val="10000"/>
+                  </a:ext>
+                </a:extLst>
               </a:tr>
               <a:tr h="685800">
                 <a:tc>
@@ -1873,7 +1756,7 @@
                     <a:bodyPr/>
                     <a:lstStyle/>
                     <a:p>
-                      <a:pPr indent="0" marL="0">
+                      <a:pPr marL="0" indent="0">
                         <a:buNone/>
                       </a:pPr>
                       <a:r>
@@ -1887,7 +1770,7 @@
                       <a:endParaRPr lang="en-US" sz="1800" dirty="0"/>
                     </a:p>
                     <a:p>
-                      <a:pPr indent="0" marL="0">
+                      <a:pPr marL="0" indent="0">
                         <a:buNone/>
                       </a:pPr>
                       <a:r>
@@ -1901,7 +1784,7 @@
                       <a:endParaRPr lang="en-US" sz="1800" dirty="0"/>
                     </a:p>
                   </a:txBody>
-                  <a:tcPr marL="91440" marR="91440" marT="45720" marB="45720">
+                  <a:tcPr>
                     <a:lnL w="12700" cap="flat" cmpd="sng" algn="ctr">
                       <a:solidFill>
                         <a:srgbClr val="BDBDBD"/>
@@ -1945,7 +1828,7 @@
                     <a:bodyPr/>
                     <a:lstStyle/>
                     <a:p>
-                      <a:pPr indent="0" marL="0">
+                      <a:pPr marL="0" indent="0">
                         <a:buNone/>
                       </a:pPr>
                       <a:r>
@@ -1959,7 +1842,7 @@
                       <a:endParaRPr lang="en-US" sz="1800" dirty="0"/>
                     </a:p>
                   </a:txBody>
-                  <a:tcPr marL="91440" marR="91440" marT="45720" marB="45720">
+                  <a:tcPr>
                     <a:lnL w="12700" cap="flat" cmpd="sng" algn="ctr">
                       <a:solidFill>
                         <a:srgbClr val="BDBDBD"/>
@@ -2003,7 +1886,7 @@
                     <a:bodyPr/>
                     <a:lstStyle/>
                     <a:p>
-                      <a:pPr indent="0" marL="0">
+                      <a:pPr marL="0" indent="0">
                         <a:buNone/>
                       </a:pPr>
                       <a:r>
@@ -2017,7 +1900,7 @@
                       <a:endParaRPr lang="en-US" sz="1800" dirty="0"/>
                     </a:p>
                     <a:p>
-                      <a:pPr indent="0" marL="0">
+                      <a:pPr marL="0" indent="0">
                         <a:buNone/>
                       </a:pPr>
                       <a:r>
@@ -2031,7 +1914,7 @@
                       <a:endParaRPr lang="en-US" sz="1800" dirty="0"/>
                     </a:p>
                   </a:txBody>
-                  <a:tcPr marL="91440" marR="91440" marT="45720" marB="45720">
+                  <a:tcPr>
                     <a:lnL w="12700" cap="flat" cmpd="sng" algn="ctr">
                       <a:solidFill>
                         <a:srgbClr val="BDBDBD"/>
@@ -2070,6 +1953,11 @@
                     </a:lnB>
                   </a:tcPr>
                 </a:tc>
+                <a:extLst>
+                  <a:ext uri="{0D108BD9-81ED-4DB2-BD59-A6C34878D82A}">
+                    <a16:rowId xmlns:a16="http://schemas.microsoft.com/office/drawing/2014/main" val="10001"/>
+                  </a:ext>
+                </a:extLst>
               </a:tr>
               <a:tr h="777240">
                 <a:tc>
@@ -2077,7 +1965,7 @@
                     <a:bodyPr/>
                     <a:lstStyle/>
                     <a:p>
-                      <a:pPr indent="0" marL="0">
+                      <a:pPr marL="0" indent="0">
                         <a:buNone/>
                       </a:pPr>
                       <a:r>
@@ -2091,7 +1979,7 @@
                       <a:endParaRPr lang="en-US" sz="1800" dirty="0"/>
                     </a:p>
                     <a:p>
-                      <a:pPr indent="0" marL="0">
+                      <a:pPr marL="0" indent="0">
                         <a:buNone/>
                       </a:pPr>
                       <a:r>
@@ -2105,7 +1993,7 @@
                       <a:endParaRPr lang="en-US" sz="1800" dirty="0"/>
                     </a:p>
                   </a:txBody>
-                  <a:tcPr marL="91440" marR="91440" marT="45720" marB="45720">
+                  <a:tcPr>
                     <a:lnL w="12700" cap="flat" cmpd="sng" algn="ctr">
                       <a:solidFill>
                         <a:srgbClr val="BDBDBD"/>
@@ -2149,7 +2037,7 @@
                     <a:bodyPr/>
                     <a:lstStyle/>
                     <a:p>
-                      <a:pPr indent="0" marL="0">
+                      <a:pPr marL="0" indent="0">
                         <a:buNone/>
                       </a:pPr>
                       <a:r>
@@ -2163,7 +2051,7 @@
                       <a:endParaRPr lang="en-US" sz="1800" dirty="0"/>
                     </a:p>
                   </a:txBody>
-                  <a:tcPr marL="91440" marR="91440" marT="45720" marB="45720">
+                  <a:tcPr>
                     <a:lnL w="12700" cap="flat" cmpd="sng" algn="ctr">
                       <a:solidFill>
                         <a:srgbClr val="BDBDBD"/>
@@ -2207,7 +2095,7 @@
                     <a:bodyPr/>
                     <a:lstStyle/>
                     <a:p>
-                      <a:pPr indent="0" marL="0">
+                      <a:pPr marL="0" indent="0">
                         <a:buNone/>
                       </a:pPr>
                       <a:r>
@@ -2221,7 +2109,7 @@
                       <a:endParaRPr lang="en-US" sz="1800" dirty="0"/>
                     </a:p>
                     <a:p>
-                      <a:pPr indent="0" marL="0">
+                      <a:pPr marL="0" indent="0">
                         <a:buNone/>
                       </a:pPr>
                       <a:r>
@@ -2235,7 +2123,7 @@
                       <a:endParaRPr lang="en-US" sz="1800" dirty="0"/>
                     </a:p>
                   </a:txBody>
-                  <a:tcPr marL="91440" marR="91440" marT="45720" marB="45720">
+                  <a:tcPr>
                     <a:lnL w="12700" cap="flat" cmpd="sng" algn="ctr">
                       <a:solidFill>
                         <a:srgbClr val="BDBDBD"/>
@@ -2274,6 +2162,11 @@
                     </a:lnB>
                   </a:tcPr>
                 </a:tc>
+                <a:extLst>
+                  <a:ext uri="{0D108BD9-81ED-4DB2-BD59-A6C34878D82A}">
+                    <a16:rowId xmlns:a16="http://schemas.microsoft.com/office/drawing/2014/main" val="10002"/>
+                  </a:ext>
+                </a:extLst>
               </a:tr>
               <a:tr h="685800">
                 <a:tc>
@@ -2281,7 +2174,7 @@
                     <a:bodyPr/>
                     <a:lstStyle/>
                     <a:p>
-                      <a:pPr indent="0" marL="0">
+                      <a:pPr marL="0" indent="0">
                         <a:buNone/>
                       </a:pPr>
                       <a:r>
@@ -2295,7 +2188,7 @@
                       <a:endParaRPr lang="en-US" sz="1800" dirty="0"/>
                     </a:p>
                     <a:p>
-                      <a:pPr indent="0" marL="0">
+                      <a:pPr marL="0" indent="0">
                         <a:buNone/>
                       </a:pPr>
                       <a:r>
@@ -2309,7 +2202,7 @@
                       <a:endParaRPr lang="en-US" sz="1800" dirty="0"/>
                     </a:p>
                   </a:txBody>
-                  <a:tcPr marL="91440" marR="91440" marT="45720" marB="45720">
+                  <a:tcPr>
                     <a:lnL w="12700" cap="flat" cmpd="sng" algn="ctr">
                       <a:solidFill>
                         <a:srgbClr val="BDBDBD"/>
@@ -2353,7 +2246,7 @@
                     <a:bodyPr/>
                     <a:lstStyle/>
                     <a:p>
-                      <a:pPr indent="0" marL="0">
+                      <a:pPr marL="0" indent="0">
                         <a:buNone/>
                       </a:pPr>
                       <a:r>
@@ -2367,7 +2260,7 @@
                       <a:endParaRPr lang="en-US" sz="1800" dirty="0"/>
                     </a:p>
                   </a:txBody>
-                  <a:tcPr marL="91440" marR="91440" marT="45720" marB="45720">
+                  <a:tcPr>
                     <a:lnL w="12700" cap="flat" cmpd="sng" algn="ctr">
                       <a:solidFill>
                         <a:srgbClr val="BDBDBD"/>
@@ -2411,7 +2304,7 @@
                     <a:bodyPr/>
                     <a:lstStyle/>
                     <a:p>
-                      <a:pPr indent="0" marL="0">
+                      <a:pPr marL="0" indent="0">
                         <a:buNone/>
                       </a:pPr>
                       <a:r>
@@ -2425,7 +2318,7 @@
                       <a:endParaRPr lang="en-US" sz="1800" dirty="0"/>
                     </a:p>
                   </a:txBody>
-                  <a:tcPr marL="91440" marR="91440" marT="45720" marB="45720">
+                  <a:tcPr>
                     <a:lnL w="12700" cap="flat" cmpd="sng" algn="ctr">
                       <a:solidFill>
                         <a:srgbClr val="BDBDBD"/>
@@ -2464,6 +2357,11 @@
                     </a:lnB>
                   </a:tcPr>
                 </a:tc>
+                <a:extLst>
+                  <a:ext uri="{0D108BD9-81ED-4DB2-BD59-A6C34878D82A}">
+                    <a16:rowId xmlns:a16="http://schemas.microsoft.com/office/drawing/2014/main" val="10003"/>
+                  </a:ext>
+                </a:extLst>
               </a:tr>
               <a:tr h="685800">
                 <a:tc>
@@ -2471,7 +2369,7 @@
                     <a:bodyPr/>
                     <a:lstStyle/>
                     <a:p>
-                      <a:pPr indent="0" marL="0">
+                      <a:pPr marL="0" indent="0">
                         <a:buNone/>
                       </a:pPr>
                       <a:r>
@@ -2485,7 +2383,7 @@
                       <a:endParaRPr lang="en-US" sz="1800" dirty="0"/>
                     </a:p>
                     <a:p>
-                      <a:pPr indent="0" marL="0">
+                      <a:pPr marL="0" indent="0">
                         <a:buNone/>
                       </a:pPr>
                       <a:r>
@@ -2499,7 +2397,7 @@
                       <a:endParaRPr lang="en-US" sz="1800" dirty="0"/>
                     </a:p>
                   </a:txBody>
-                  <a:tcPr marL="91440" marR="91440" marT="45720" marB="45720">
+                  <a:tcPr>
                     <a:lnL w="12700" cap="flat" cmpd="sng" algn="ctr">
                       <a:solidFill>
                         <a:srgbClr val="BDBDBD"/>
@@ -2543,7 +2441,7 @@
                     <a:bodyPr/>
                     <a:lstStyle/>
                     <a:p>
-                      <a:pPr indent="0" marL="0">
+                      <a:pPr marL="0" indent="0">
                         <a:buNone/>
                       </a:pPr>
                       <a:r>
@@ -2557,7 +2455,7 @@
                       <a:endParaRPr lang="en-US" sz="1800" dirty="0"/>
                     </a:p>
                   </a:txBody>
-                  <a:tcPr marL="91440" marR="91440" marT="45720" marB="45720">
+                  <a:tcPr>
                     <a:lnL w="12700" cap="flat" cmpd="sng" algn="ctr">
                       <a:solidFill>
                         <a:srgbClr val="BDBDBD"/>
@@ -2601,7 +2499,7 @@
                     <a:bodyPr/>
                     <a:lstStyle/>
                     <a:p>
-                      <a:pPr indent="0" marL="0">
+                      <a:pPr marL="0" indent="0">
                         <a:buNone/>
                       </a:pPr>
                       <a:r>
@@ -2615,7 +2513,7 @@
                       <a:endParaRPr lang="en-US" sz="1800" dirty="0"/>
                     </a:p>
                   </a:txBody>
-                  <a:tcPr marL="91440" marR="91440" marT="45720" marB="45720">
+                  <a:tcPr>
                     <a:lnL w="12700" cap="flat" cmpd="sng" algn="ctr">
                       <a:solidFill>
                         <a:srgbClr val="BDBDBD"/>
@@ -2654,6 +2552,11 @@
                     </a:lnB>
                   </a:tcPr>
                 </a:tc>
+                <a:extLst>
+                  <a:ext uri="{0D108BD9-81ED-4DB2-BD59-A6C34878D82A}">
+                    <a16:rowId xmlns:a16="http://schemas.microsoft.com/office/drawing/2014/main" val="10004"/>
+                  </a:ext>
+                </a:extLst>
               </a:tr>
               <a:tr h="685800">
                 <a:tc>
@@ -2661,7 +2564,7 @@
                     <a:bodyPr/>
                     <a:lstStyle/>
                     <a:p>
-                      <a:pPr indent="0" marL="0">
+                      <a:pPr marL="0" indent="0">
                         <a:buNone/>
                       </a:pPr>
                       <a:r>
@@ -2675,7 +2578,7 @@
                       <a:endParaRPr lang="en-US" sz="1800" dirty="0"/>
                     </a:p>
                     <a:p>
-                      <a:pPr indent="0" marL="0">
+                      <a:pPr marL="0" indent="0">
                         <a:buNone/>
                       </a:pPr>
                       <a:r>
@@ -2689,7 +2592,7 @@
                       <a:endParaRPr lang="en-US" sz="1800" dirty="0"/>
                     </a:p>
                   </a:txBody>
-                  <a:tcPr marL="91440" marR="91440" marT="45720" marB="45720">
+                  <a:tcPr>
                     <a:lnL w="12700" cap="flat" cmpd="sng" algn="ctr">
                       <a:solidFill>
                         <a:srgbClr val="BDBDBD"/>
@@ -2733,7 +2636,7 @@
                     <a:bodyPr/>
                     <a:lstStyle/>
                     <a:p>
-                      <a:pPr indent="0" marL="0">
+                      <a:pPr marL="0" indent="0">
                         <a:buNone/>
                       </a:pPr>
                       <a:r>
@@ -2747,7 +2650,7 @@
                       <a:endParaRPr lang="en-US" sz="1800" dirty="0"/>
                     </a:p>
                   </a:txBody>
-                  <a:tcPr marL="91440" marR="91440" marT="45720" marB="45720">
+                  <a:tcPr>
                     <a:lnL w="12700" cap="flat" cmpd="sng" algn="ctr">
                       <a:solidFill>
                         <a:srgbClr val="BDBDBD"/>
@@ -2791,7 +2694,7 @@
                     <a:bodyPr/>
                     <a:lstStyle/>
                     <a:p>
-                      <a:pPr indent="0" marL="0">
+                      <a:pPr marL="0" indent="0">
                         <a:buNone/>
                       </a:pPr>
                       <a:r>
@@ -2805,7 +2708,7 @@
                       <a:endParaRPr lang="en-US" sz="1800" dirty="0"/>
                     </a:p>
                   </a:txBody>
-                  <a:tcPr marL="91440" marR="91440" marT="45720" marB="45720">
+                  <a:tcPr>
                     <a:lnL w="12700" cap="flat" cmpd="sng" algn="ctr">
                       <a:solidFill>
                         <a:srgbClr val="BDBDBD"/>
@@ -2844,6 +2747,11 @@
                     </a:lnB>
                   </a:tcPr>
                 </a:tc>
+                <a:extLst>
+                  <a:ext uri="{0D108BD9-81ED-4DB2-BD59-A6C34878D82A}">
+                    <a16:rowId xmlns:a16="http://schemas.microsoft.com/office/drawing/2014/main" val="10005"/>
+                  </a:ext>
+                </a:extLst>
               </a:tr>
               <a:tr h="777240">
                 <a:tc>
@@ -2851,7 +2759,7 @@
                     <a:bodyPr/>
                     <a:lstStyle/>
                     <a:p>
-                      <a:pPr indent="0" marL="0">
+                      <a:pPr marL="0" indent="0">
                         <a:buNone/>
                       </a:pPr>
                       <a:r>
@@ -2865,7 +2773,7 @@
                       <a:endParaRPr lang="en-US" sz="1800" dirty="0"/>
                     </a:p>
                     <a:p>
-                      <a:pPr indent="0" marL="0">
+                      <a:pPr marL="0" indent="0">
                         <a:buNone/>
                       </a:pPr>
                       <a:r>
@@ -2879,7 +2787,7 @@
                       <a:endParaRPr lang="en-US" sz="1800" dirty="0"/>
                     </a:p>
                   </a:txBody>
-                  <a:tcPr marL="91440" marR="91440" marT="45720" marB="45720">
+                  <a:tcPr>
                     <a:lnL w="12700" cap="flat" cmpd="sng" algn="ctr">
                       <a:solidFill>
                         <a:srgbClr val="BDBDBD"/>
@@ -2923,7 +2831,7 @@
                     <a:bodyPr/>
                     <a:lstStyle/>
                     <a:p>
-                      <a:pPr indent="0" marL="0">
+                      <a:pPr marL="0" indent="0">
                         <a:buNone/>
                       </a:pPr>
                       <a:r>
@@ -2937,7 +2845,7 @@
                       <a:endParaRPr lang="en-US" sz="1800" dirty="0"/>
                     </a:p>
                   </a:txBody>
-                  <a:tcPr marL="91440" marR="91440" marT="45720" marB="45720">
+                  <a:tcPr>
                     <a:lnL w="12700" cap="flat" cmpd="sng" algn="ctr">
                       <a:solidFill>
                         <a:srgbClr val="BDBDBD"/>
@@ -2981,7 +2889,7 @@
                     <a:bodyPr/>
                     <a:lstStyle/>
                     <a:p>
-                      <a:pPr indent="0" marL="0">
+                      <a:pPr marL="0" indent="0">
                         <a:buNone/>
                       </a:pPr>
                       <a:r>
@@ -2995,7 +2903,7 @@
                       <a:endParaRPr lang="en-US" sz="1800" dirty="0"/>
                     </a:p>
                     <a:p>
-                      <a:pPr indent="0" marL="0">
+                      <a:pPr marL="0" indent="0">
                         <a:buNone/>
                       </a:pPr>
                       <a:r>
@@ -3009,7 +2917,7 @@
                       <a:endParaRPr lang="en-US" sz="1800" dirty="0"/>
                     </a:p>
                   </a:txBody>
-                  <a:tcPr marL="91440" marR="91440" marT="45720" marB="45720">
+                  <a:tcPr>
                     <a:lnL w="12700" cap="flat" cmpd="sng" algn="ctr">
                       <a:solidFill>
                         <a:srgbClr val="BDBDBD"/>
@@ -3048,6 +2956,11 @@
                     </a:lnB>
                   </a:tcPr>
                 </a:tc>
+                <a:extLst>
+                  <a:ext uri="{0D108BD9-81ED-4DB2-BD59-A6C34878D82A}">
+                    <a16:rowId xmlns:a16="http://schemas.microsoft.com/office/drawing/2014/main" val="10006"/>
+                  </a:ext>
+                </a:extLst>
               </a:tr>
             </a:tbl>
           </a:graphicData>
@@ -3072,13 +2985,20 @@
           </a:solidFill>
           <a:ln/>
           <a:effectLst>
-            <a:outerShdw sx="100000" sy="100000" kx="0" ky="0" algn="bl" rotWithShape="0" blurRad="25400" dist="12700" dir="8100000">
+            <a:outerShdw blurRad="25400" dist="12700" dir="8100000" algn="bl" rotWithShape="0">
               <a:srgbClr val="000000">
                 <a:alpha val="8000"/>
               </a:srgbClr>
             </a:outerShdw>
           </a:effectLst>
         </p:spPr>
+        <p:txBody>
+          <a:bodyPr/>
+          <a:lstStyle/>
+          <a:p>
+            <a:endParaRPr lang="ja-JP" altLang="en-US"/>
+          </a:p>
+        </p:txBody>
       </p:sp>
       <p:sp>
         <p:nvSpPr>
@@ -3101,7 +3021,7 @@
           <a:bodyPr wrap="square" rtlCol="0" anchor="ctr"/>
           <a:lstStyle/>
           <a:p>
-            <a:pPr indent="0" marL="0">
+            <a:pPr marL="0" indent="0">
               <a:buNone/>
             </a:pPr>
             <a:r>
@@ -3121,7 +3041,7 @@
       </p:sp>
       <p:graphicFrame>
         <p:nvGraphicFramePr>
-          <p:cNvPr id="3" name="Table 1"/>
+          <p:cNvPr id="26" name="Table 1"/>
           <p:cNvGraphicFramePr>
             <a:graphicFrameLocks noGrp="1"/>
           </p:cNvGraphicFramePr>
@@ -3135,16 +3055,34 @@
         </p:nvGraphicFramePr>
         <p:xfrm>
           <a:off x="640080" y="20848320"/>
-          <a:ext cx="14132052" cy="914400"/>
+          <a:ext cx="14132052" cy="2926080"/>
         </p:xfrm>
         <a:graphic>
           <a:graphicData uri="http://schemas.openxmlformats.org/drawingml/2006/table">
             <a:tbl>
               <a:tblPr/>
               <a:tblGrid>
-                <a:gridCol w="2826410"/>
-                <a:gridCol w="5935462"/>
-                <a:gridCol w="5370180"/>
+                <a:gridCol w="2826410">
+                  <a:extLst>
+                    <a:ext uri="{9D8B030D-6E8A-4147-A177-3AD203B41FA5}">
+                      <a16:colId xmlns:a16="http://schemas.microsoft.com/office/drawing/2014/main" val="20000"/>
+                    </a:ext>
+                  </a:extLst>
+                </a:gridCol>
+                <a:gridCol w="5935462">
+                  <a:extLst>
+                    <a:ext uri="{9D8B030D-6E8A-4147-A177-3AD203B41FA5}">
+                      <a16:colId xmlns:a16="http://schemas.microsoft.com/office/drawing/2014/main" val="20001"/>
+                    </a:ext>
+                  </a:extLst>
+                </a:gridCol>
+                <a:gridCol w="5370180">
+                  <a:extLst>
+                    <a:ext uri="{9D8B030D-6E8A-4147-A177-3AD203B41FA5}">
+                      <a16:colId xmlns:a16="http://schemas.microsoft.com/office/drawing/2014/main" val="20002"/>
+                    </a:ext>
+                  </a:extLst>
+                </a:gridCol>
               </a:tblGrid>
               <a:tr h="365760">
                 <a:tc>
@@ -3152,7 +3090,7 @@
                     <a:bodyPr/>
                     <a:lstStyle/>
                     <a:p>
-                      <a:pPr indent="0" marL="0">
+                      <a:pPr marL="0" indent="0">
                         <a:buNone/>
                       </a:pPr>
                       <a:r>
@@ -3166,7 +3104,7 @@
                       <a:endParaRPr lang="en-US" sz="1800" dirty="0"/>
                     </a:p>
                   </a:txBody>
-                  <a:tcPr marL="91440" marR="91440" marT="45720" marB="45720">
+                  <a:tcPr>
                     <a:lnL w="12700" cap="flat" cmpd="sng" algn="ctr">
                       <a:solidFill>
                         <a:srgbClr val="BDBDBD"/>
@@ -3213,7 +3151,7 @@
                     <a:bodyPr/>
                     <a:lstStyle/>
                     <a:p>
-                      <a:pPr indent="0" marL="0">
+                      <a:pPr marL="0" indent="0">
                         <a:buNone/>
                       </a:pPr>
                       <a:r>
@@ -3227,7 +3165,7 @@
                       <a:endParaRPr lang="en-US" sz="1800" dirty="0"/>
                     </a:p>
                   </a:txBody>
-                  <a:tcPr marL="91440" marR="91440" marT="45720" marB="45720">
+                  <a:tcPr>
                     <a:lnL w="12700" cap="flat" cmpd="sng" algn="ctr">
                       <a:solidFill>
                         <a:srgbClr val="BDBDBD"/>
@@ -3274,7 +3212,7 @@
                     <a:bodyPr/>
                     <a:lstStyle/>
                     <a:p>
-                      <a:pPr indent="0" marL="0">
+                      <a:pPr marL="0" indent="0">
                         <a:buNone/>
                       </a:pPr>
                       <a:r>
@@ -3288,7 +3226,7 @@
                       <a:endParaRPr lang="en-US" sz="1800" dirty="0"/>
                     </a:p>
                   </a:txBody>
-                  <a:tcPr marL="91440" marR="91440" marT="45720" marB="45720">
+                  <a:tcPr>
                     <a:lnL w="12700" cap="flat" cmpd="sng" algn="ctr">
                       <a:solidFill>
                         <a:srgbClr val="BDBDBD"/>
@@ -3330,6 +3268,11 @@
                     </a:solidFill>
                   </a:tcPr>
                 </a:tc>
+                <a:extLst>
+                  <a:ext uri="{0D108BD9-81ED-4DB2-BD59-A6C34878D82A}">
+                    <a16:rowId xmlns:a16="http://schemas.microsoft.com/office/drawing/2014/main" val="10000"/>
+                  </a:ext>
+                </a:extLst>
               </a:tr>
               <a:tr h="502920">
                 <a:tc>
@@ -3337,7 +3280,7 @@
                     <a:bodyPr/>
                     <a:lstStyle/>
                     <a:p>
-                      <a:pPr indent="0" marL="0">
+                      <a:pPr marL="0" indent="0">
                         <a:buNone/>
                       </a:pPr>
                       <a:r>
@@ -3351,7 +3294,7 @@
                       <a:endParaRPr lang="en-US" sz="1800" dirty="0"/>
                     </a:p>
                   </a:txBody>
-                  <a:tcPr marL="91440" marR="91440" marT="45720" marB="45720">
+                  <a:tcPr>
                     <a:lnL w="12700" cap="flat" cmpd="sng" algn="ctr">
                       <a:solidFill>
                         <a:srgbClr val="BDBDBD"/>
@@ -3395,7 +3338,7 @@
                     <a:bodyPr/>
                     <a:lstStyle/>
                     <a:p>
-                      <a:pPr indent="0" marL="0">
+                      <a:pPr marL="0" indent="0">
                         <a:buNone/>
                       </a:pPr>
                       <a:r>
@@ -3409,7 +3352,7 @@
                       <a:endParaRPr lang="en-US" sz="1800" dirty="0"/>
                     </a:p>
                   </a:txBody>
-                  <a:tcPr marL="91440" marR="91440" marT="45720" marB="45720">
+                  <a:tcPr>
                     <a:lnL w="12700" cap="flat" cmpd="sng" algn="ctr">
                       <a:solidFill>
                         <a:srgbClr val="BDBDBD"/>
@@ -3453,7 +3396,7 @@
                     <a:bodyPr/>
                     <a:lstStyle/>
                     <a:p>
-                      <a:pPr indent="0" marL="0">
+                      <a:pPr marL="0" indent="0">
                         <a:buNone/>
                       </a:pPr>
                       <a:r>
@@ -3467,7 +3410,7 @@
                       <a:endParaRPr lang="en-US" sz="1800" dirty="0"/>
                     </a:p>
                   </a:txBody>
-                  <a:tcPr marL="91440" marR="91440" marT="45720" marB="45720">
+                  <a:tcPr>
                     <a:lnL w="12700" cap="flat" cmpd="sng" algn="ctr">
                       <a:solidFill>
                         <a:srgbClr val="BDBDBD"/>
@@ -3506,6 +3449,11 @@
                     </a:lnB>
                   </a:tcPr>
                 </a:tc>
+                <a:extLst>
+                  <a:ext uri="{0D108BD9-81ED-4DB2-BD59-A6C34878D82A}">
+                    <a16:rowId xmlns:a16="http://schemas.microsoft.com/office/drawing/2014/main" val="10001"/>
+                  </a:ext>
+                </a:extLst>
               </a:tr>
               <a:tr h="548640">
                 <a:tc>
@@ -3513,7 +3461,7 @@
                     <a:bodyPr/>
                     <a:lstStyle/>
                     <a:p>
-                      <a:pPr indent="0" marL="0">
+                      <a:pPr marL="0" indent="0">
                         <a:buNone/>
                       </a:pPr>
                       <a:r>
@@ -3527,7 +3475,7 @@
                       <a:endParaRPr lang="en-US" sz="1800" dirty="0"/>
                     </a:p>
                   </a:txBody>
-                  <a:tcPr marL="91440" marR="91440" marT="45720" marB="45720">
+                  <a:tcPr>
                     <a:lnL w="12700" cap="flat" cmpd="sng" algn="ctr">
                       <a:solidFill>
                         <a:srgbClr val="BDBDBD"/>
@@ -3571,7 +3519,7 @@
                     <a:bodyPr/>
                     <a:lstStyle/>
                     <a:p>
-                      <a:pPr indent="0" marL="0">
+                      <a:pPr marL="0" indent="0">
                         <a:buNone/>
                       </a:pPr>
                       <a:r>
@@ -3585,7 +3533,7 @@
                       <a:endParaRPr lang="en-US" sz="1800" dirty="0"/>
                     </a:p>
                   </a:txBody>
-                  <a:tcPr marL="91440" marR="91440" marT="45720" marB="45720">
+                  <a:tcPr>
                     <a:lnL w="12700" cap="flat" cmpd="sng" algn="ctr">
                       <a:solidFill>
                         <a:srgbClr val="BDBDBD"/>
@@ -3629,7 +3577,7 @@
                     <a:bodyPr/>
                     <a:lstStyle/>
                     <a:p>
-                      <a:pPr indent="0" marL="0">
+                      <a:pPr marL="0" indent="0">
                         <a:buNone/>
                       </a:pPr>
                       <a:r>
@@ -3643,7 +3591,7 @@
                       <a:endParaRPr lang="en-US" sz="1800" dirty="0"/>
                     </a:p>
                   </a:txBody>
-                  <a:tcPr marL="91440" marR="91440" marT="45720" marB="45720">
+                  <a:tcPr>
                     <a:lnL w="12700" cap="flat" cmpd="sng" algn="ctr">
                       <a:solidFill>
                         <a:srgbClr val="BDBDBD"/>
@@ -3682,6 +3630,11 @@
                     </a:lnB>
                   </a:tcPr>
                 </a:tc>
+                <a:extLst>
+                  <a:ext uri="{0D108BD9-81ED-4DB2-BD59-A6C34878D82A}">
+                    <a16:rowId xmlns:a16="http://schemas.microsoft.com/office/drawing/2014/main" val="10002"/>
+                  </a:ext>
+                </a:extLst>
               </a:tr>
               <a:tr h="502920">
                 <a:tc>
@@ -3689,7 +3642,7 @@
                     <a:bodyPr/>
                     <a:lstStyle/>
                     <a:p>
-                      <a:pPr indent="0" marL="0">
+                      <a:pPr marL="0" indent="0">
                         <a:buNone/>
                       </a:pPr>
                       <a:r>
@@ -3703,7 +3656,7 @@
                       <a:endParaRPr lang="en-US" sz="1800" dirty="0"/>
                     </a:p>
                   </a:txBody>
-                  <a:tcPr marL="91440" marR="91440" marT="45720" marB="45720">
+                  <a:tcPr>
                     <a:lnL w="12700" cap="flat" cmpd="sng" algn="ctr">
                       <a:solidFill>
                         <a:srgbClr val="BDBDBD"/>
@@ -3747,7 +3700,7 @@
                     <a:bodyPr/>
                     <a:lstStyle/>
                     <a:p>
-                      <a:pPr indent="0" marL="0">
+                      <a:pPr marL="0" indent="0">
                         <a:buNone/>
                       </a:pPr>
                       <a:r>
@@ -3761,7 +3714,7 @@
                       <a:endParaRPr lang="en-US" sz="1800" dirty="0"/>
                     </a:p>
                   </a:txBody>
-                  <a:tcPr marL="91440" marR="91440" marT="45720" marB="45720">
+                  <a:tcPr>
                     <a:lnL w="12700" cap="flat" cmpd="sng" algn="ctr">
                       <a:solidFill>
                         <a:srgbClr val="BDBDBD"/>
@@ -3805,7 +3758,7 @@
                     <a:bodyPr/>
                     <a:lstStyle/>
                     <a:p>
-                      <a:pPr indent="0" marL="0">
+                      <a:pPr marL="0" indent="0">
                         <a:buNone/>
                       </a:pPr>
                       <a:r>
@@ -3819,7 +3772,7 @@
                       <a:endParaRPr lang="en-US" sz="1800" dirty="0"/>
                     </a:p>
                   </a:txBody>
-                  <a:tcPr marL="91440" marR="91440" marT="45720" marB="45720">
+                  <a:tcPr>
                     <a:lnL w="12700" cap="flat" cmpd="sng" algn="ctr">
                       <a:solidFill>
                         <a:srgbClr val="BDBDBD"/>
@@ -3858,6 +3811,11 @@
                     </a:lnB>
                   </a:tcPr>
                 </a:tc>
+                <a:extLst>
+                  <a:ext uri="{0D108BD9-81ED-4DB2-BD59-A6C34878D82A}">
+                    <a16:rowId xmlns:a16="http://schemas.microsoft.com/office/drawing/2014/main" val="10003"/>
+                  </a:ext>
+                </a:extLst>
               </a:tr>
               <a:tr h="502920">
                 <a:tc>
@@ -3865,7 +3823,7 @@
                     <a:bodyPr/>
                     <a:lstStyle/>
                     <a:p>
-                      <a:pPr indent="0" marL="0">
+                      <a:pPr marL="0" indent="0">
                         <a:buNone/>
                       </a:pPr>
                       <a:r>
@@ -3879,7 +3837,7 @@
                       <a:endParaRPr lang="en-US" sz="1800" dirty="0"/>
                     </a:p>
                   </a:txBody>
-                  <a:tcPr marL="91440" marR="91440" marT="45720" marB="45720">
+                  <a:tcPr>
                     <a:lnL w="12700" cap="flat" cmpd="sng" algn="ctr">
                       <a:solidFill>
                         <a:srgbClr val="BDBDBD"/>
@@ -3923,7 +3881,7 @@
                     <a:bodyPr/>
                     <a:lstStyle/>
                     <a:p>
-                      <a:pPr indent="0" marL="0">
+                      <a:pPr marL="0" indent="0">
                         <a:buNone/>
                       </a:pPr>
                       <a:r>
@@ -3937,7 +3895,7 @@
                       <a:endParaRPr lang="en-US" sz="1800" dirty="0"/>
                     </a:p>
                   </a:txBody>
-                  <a:tcPr marL="91440" marR="91440" marT="45720" marB="45720">
+                  <a:tcPr>
                     <a:lnL w="12700" cap="flat" cmpd="sng" algn="ctr">
                       <a:solidFill>
                         <a:srgbClr val="BDBDBD"/>
@@ -3981,7 +3939,7 @@
                     <a:bodyPr/>
                     <a:lstStyle/>
                     <a:p>
-                      <a:pPr indent="0" marL="0">
+                      <a:pPr marL="0" indent="0">
                         <a:buNone/>
                       </a:pPr>
                       <a:r>
@@ -3995,7 +3953,7 @@
                       <a:endParaRPr lang="en-US" sz="1800" dirty="0"/>
                     </a:p>
                   </a:txBody>
-                  <a:tcPr marL="91440" marR="91440" marT="45720" marB="45720">
+                  <a:tcPr>
                     <a:lnL w="12700" cap="flat" cmpd="sng" algn="ctr">
                       <a:solidFill>
                         <a:srgbClr val="BDBDBD"/>
@@ -4034,6 +3992,11 @@
                     </a:lnB>
                   </a:tcPr>
                 </a:tc>
+                <a:extLst>
+                  <a:ext uri="{0D108BD9-81ED-4DB2-BD59-A6C34878D82A}">
+                    <a16:rowId xmlns:a16="http://schemas.microsoft.com/office/drawing/2014/main" val="10004"/>
+                  </a:ext>
+                </a:extLst>
               </a:tr>
               <a:tr h="502920">
                 <a:tc>
@@ -4041,7 +4004,7 @@
                     <a:bodyPr/>
                     <a:lstStyle/>
                     <a:p>
-                      <a:pPr indent="0" marL="0">
+                      <a:pPr marL="0" indent="0">
                         <a:buNone/>
                       </a:pPr>
                       <a:r>
@@ -4055,7 +4018,7 @@
                       <a:endParaRPr lang="en-US" sz="1800" dirty="0"/>
                     </a:p>
                   </a:txBody>
-                  <a:tcPr marL="91440" marR="91440" marT="45720" marB="45720">
+                  <a:tcPr>
                     <a:lnL w="12700" cap="flat" cmpd="sng" algn="ctr">
                       <a:solidFill>
                         <a:srgbClr val="BDBDBD"/>
@@ -4099,7 +4062,7 @@
                     <a:bodyPr/>
                     <a:lstStyle/>
                     <a:p>
-                      <a:pPr indent="0" marL="0">
+                      <a:pPr marL="0" indent="0">
                         <a:buNone/>
                       </a:pPr>
                       <a:r>
@@ -4113,7 +4076,7 @@
                       <a:endParaRPr lang="en-US" sz="1800" dirty="0"/>
                     </a:p>
                   </a:txBody>
-                  <a:tcPr marL="91440" marR="91440" marT="45720" marB="45720">
+                  <a:tcPr>
                     <a:lnL w="12700" cap="flat" cmpd="sng" algn="ctr">
                       <a:solidFill>
                         <a:srgbClr val="BDBDBD"/>
@@ -4157,7 +4120,7 @@
                     <a:bodyPr/>
                     <a:lstStyle/>
                     <a:p>
-                      <a:pPr indent="0" marL="0">
+                      <a:pPr marL="0" indent="0">
                         <a:buNone/>
                       </a:pPr>
                       <a:r>
@@ -4171,7 +4134,7 @@
                       <a:endParaRPr lang="en-US" sz="1800" dirty="0"/>
                     </a:p>
                   </a:txBody>
-                  <a:tcPr marL="91440" marR="91440" marT="45720" marB="45720">
+                  <a:tcPr>
                     <a:lnL w="12700" cap="flat" cmpd="sng" algn="ctr">
                       <a:solidFill>
                         <a:srgbClr val="BDBDBD"/>
@@ -4210,6 +4173,11 @@
                     </a:lnB>
                   </a:tcPr>
                 </a:tc>
+                <a:extLst>
+                  <a:ext uri="{0D108BD9-81ED-4DB2-BD59-A6C34878D82A}">
+                    <a16:rowId xmlns:a16="http://schemas.microsoft.com/office/drawing/2014/main" val="10005"/>
+                  </a:ext>
+                </a:extLst>
               </a:tr>
             </a:tbl>
           </a:graphicData>
@@ -4223,7 +4191,7 @@
         </p:nvSpPr>
         <p:spPr>
           <a:xfrm>
-            <a:off x="640080" y="23500080"/>
+            <a:off x="640080" y="23797259"/>
             <a:ext cx="14132052" cy="548640"/>
           </a:xfrm>
           <a:prstGeom prst="rect">
@@ -4236,7 +4204,7 @@
           <a:bodyPr wrap="square" rtlCol="0" anchor="t"/>
           <a:lstStyle/>
           <a:p>
-            <a:pPr indent="0" marL="0">
+            <a:pPr marL="0" indent="0">
               <a:buNone/>
             </a:pPr>
             <a:r>
@@ -4250,9 +4218,6 @@
               </a:rPr>
               <a:t>Conclusion: </a:t>
             </a:r>
-            <a:pPr indent="0" marL="0">
-              <a:buNone/>
-            </a:pPr>
             <a:r>
               <a:rPr lang="en-US" sz="2200" dirty="0">
                 <a:solidFill>
@@ -4276,8 +4241,8 @@
         </p:nvSpPr>
         <p:spPr>
           <a:xfrm>
-            <a:off x="457200" y="24414480"/>
-            <a:ext cx="14497812" cy="3840480"/>
+            <a:off x="457200" y="24414479"/>
+            <a:ext cx="14497812" cy="4517135"/>
           </a:xfrm>
           <a:prstGeom prst="rect">
             <a:avLst/>
@@ -4287,13 +4252,20 @@
           </a:solidFill>
           <a:ln/>
           <a:effectLst>
-            <a:outerShdw sx="100000" sy="100000" kx="0" ky="0" algn="bl" rotWithShape="0" blurRad="25400" dist="12700" dir="8100000">
+            <a:outerShdw blurRad="25400" dist="12700" dir="8100000" algn="bl" rotWithShape="0">
               <a:srgbClr val="000000">
                 <a:alpha val="8000"/>
               </a:srgbClr>
             </a:outerShdw>
           </a:effectLst>
         </p:spPr>
+        <p:txBody>
+          <a:bodyPr/>
+          <a:lstStyle/>
+          <a:p>
+            <a:endParaRPr lang="ja-JP" altLang="en-US"/>
+          </a:p>
+        </p:txBody>
       </p:sp>
       <p:sp>
         <p:nvSpPr>
@@ -4316,7 +4288,7 @@
           <a:bodyPr wrap="square" rtlCol="0" anchor="ctr"/>
           <a:lstStyle/>
           <a:p>
-            <a:pPr indent="0" marL="0">
+            <a:pPr marL="0" indent="0">
               <a:buNone/>
             </a:pPr>
             <a:r>
@@ -4356,11 +4328,14 @@
           <a:lstStyle/>
           <a:p>
             <a:pPr marL="342900" indent="-342900">
+              <a:lnSpc>
+                <a:spcPct val="150000"/>
+              </a:lnSpc>
               <a:buSzPct val="100000"/>
               <a:buChar char="•"/>
             </a:pPr>
             <a:r>
-              <a:rPr lang="en-US" sz="1800" dirty="0">
+              <a:rPr lang="en-US" sz="2000" dirty="0">
                 <a:solidFill>
                   <a:srgbClr val="212121"/>
                 </a:solidFill>
@@ -4370,15 +4345,18 @@
               </a:rPr>
               <a:t>LLNL differential testing (arXiv:2410.09172): 600K+ auto-generated kernels showed FP32 divergence ~9% between NVIDIA V100 and AMD MI250. Root causes: vendor-specific math libraries, compiler flags, HIPIFY artifacts. Motivates our backend-aware validation approach.</a:t>
             </a:r>
-            <a:endParaRPr lang="en-US" sz="1800" dirty="0"/>
+            <a:endParaRPr lang="en-US" sz="2000" dirty="0"/>
           </a:p>
           <a:p>
             <a:pPr marL="342900" indent="-342900">
+              <a:lnSpc>
+                <a:spcPct val="150000"/>
+              </a:lnSpc>
               <a:buSzPct val="100000"/>
               <a:buChar char="•"/>
             </a:pPr>
             <a:r>
-              <a:rPr lang="en-US" sz="1800" dirty="0">
+              <a:rPr lang="en-US" sz="2000" dirty="0">
                 <a:solidFill>
                   <a:srgbClr val="212121"/>
                 </a:solidFill>
@@ -4388,15 +4366,18 @@
               </a:rPr>
               <a:t>gem5 Vega modeling (Univ. Wisconsin-Madison): GPUFS mode runs real Linux kernel + unmodified amdkfd driver. Validated against physical Vega 56 with avg 6% error. Establishes Vega as academically credible.</a:t>
             </a:r>
-            <a:endParaRPr lang="en-US" sz="1800" dirty="0"/>
+            <a:endParaRPr lang="en-US" sz="2000" dirty="0"/>
           </a:p>
           <a:p>
             <a:pPr marL="342900" indent="-342900">
+              <a:lnSpc>
+                <a:spcPct val="150000"/>
+              </a:lnSpc>
               <a:buSzPct val="100000"/>
               <a:buChar char="•"/>
             </a:pPr>
             <a:r>
-              <a:rPr lang="en-US" sz="1800" dirty="0">
+              <a:rPr lang="en-US" sz="2000" dirty="0">
                 <a:solidFill>
                   <a:srgbClr val="212121"/>
                 </a:solidFill>
@@ -4406,15 +4387,18 @@
               </a:rPr>
               <a:t>ROCm SDMA workarounds (AMD docs + LUMI reports): HSA_ENABLE_SDMA=0 bypasses faulty DMA with Blit kernel fallback (~80% bandwidth). HSA_OVERRIDE_GFX_VERSION enables unsupported GPU execution — the override used in our experiments.</a:t>
             </a:r>
-            <a:endParaRPr lang="en-US" sz="1800" dirty="0"/>
+            <a:endParaRPr lang="en-US" sz="2000" dirty="0"/>
           </a:p>
           <a:p>
             <a:pPr marL="342900" indent="-342900">
+              <a:lnSpc>
+                <a:spcPct val="150000"/>
+              </a:lnSpc>
               <a:buSzPct val="100000"/>
               <a:buChar char="•"/>
             </a:pPr>
             <a:r>
-              <a:rPr lang="en-US" sz="1800" b="1" dirty="0">
+              <a:rPr lang="en-US" sz="2000" b="1" dirty="0">
                 <a:solidFill>
                   <a:srgbClr val="616161"/>
                 </a:solidFill>
@@ -4424,7 +4408,7 @@
               </a:rPr>
               <a:t>These are external references. All claims in this poster are based solely on repo-internal evidence (Sections 3A, 3B, 6).</a:t>
             </a:r>
-            <a:endParaRPr lang="en-US" sz="1800" dirty="0"/>
+            <a:endParaRPr lang="en-US" sz="2000" dirty="0"/>
           </a:p>
         </p:txBody>
       </p:sp>
@@ -4436,7 +4420,7 @@
         </p:nvSpPr>
         <p:spPr>
           <a:xfrm>
-            <a:off x="15320772" y="4572000"/>
+            <a:off x="457200" y="29205935"/>
             <a:ext cx="822960" cy="822960"/>
           </a:xfrm>
           <a:prstGeom prst="ellipse">
@@ -4447,6 +4431,13 @@
           </a:solidFill>
           <a:ln/>
         </p:spPr>
+        <p:txBody>
+          <a:bodyPr/>
+          <a:lstStyle/>
+          <a:p>
+            <a:endParaRPr lang="ja-JP" altLang="en-US"/>
+          </a:p>
+        </p:txBody>
       </p:sp>
       <p:sp>
         <p:nvSpPr>
@@ -4456,7 +4447,7 @@
         </p:nvSpPr>
         <p:spPr>
           <a:xfrm>
-            <a:off x="15320772" y="4572000"/>
+            <a:off x="457200" y="29205935"/>
             <a:ext cx="822960" cy="822960"/>
           </a:xfrm>
           <a:prstGeom prst="rect">
@@ -4469,7 +4460,7 @@
           <a:bodyPr wrap="square" rtlCol="0" anchor="ctr"/>
           <a:lstStyle/>
           <a:p>
-            <a:pPr algn="ctr" indent="0" marL="0">
+            <a:pPr marL="0" indent="0" algn="ctr">
               <a:buNone/>
             </a:pPr>
             <a:r>
@@ -4495,7 +4486,7 @@
         </p:nvSpPr>
         <p:spPr>
           <a:xfrm>
-            <a:off x="16280892" y="4572000"/>
+            <a:off x="1417320" y="29205935"/>
             <a:ext cx="13537692" cy="822960"/>
           </a:xfrm>
           <a:prstGeom prst="rect">
@@ -4508,7 +4499,7 @@
           <a:bodyPr wrap="square" lIns="0" tIns="0" rIns="0" bIns="0" rtlCol="0" anchor="ctr"/>
           <a:lstStyle/>
           <a:p>
-            <a:pPr indent="0" marL="0">
+            <a:pPr marL="0" indent="0">
               <a:buNone/>
             </a:pPr>
             <a:r>
@@ -4534,8 +4525,8 @@
         </p:nvSpPr>
         <p:spPr>
           <a:xfrm>
-            <a:off x="15320772" y="5577840"/>
-            <a:ext cx="14497812" cy="3291840"/>
+            <a:off x="457200" y="30083759"/>
+            <a:ext cx="14497812" cy="2359153"/>
           </a:xfrm>
           <a:prstGeom prst="rect">
             <a:avLst/>
@@ -4545,13 +4536,20 @@
           </a:solidFill>
           <a:ln/>
           <a:effectLst>
-            <a:outerShdw sx="100000" sy="100000" kx="0" ky="0" algn="bl" rotWithShape="0" blurRad="25400" dist="12700" dir="8100000">
+            <a:outerShdw blurRad="25400" dist="12700" dir="8100000" algn="bl" rotWithShape="0">
               <a:srgbClr val="000000">
                 <a:alpha val="8000"/>
               </a:srgbClr>
             </a:outerShdw>
           </a:effectLst>
         </p:spPr>
+        <p:txBody>
+          <a:bodyPr/>
+          <a:lstStyle/>
+          <a:p>
+            <a:endParaRPr lang="ja-JP" altLang="en-US"/>
+          </a:p>
+        </p:txBody>
       </p:sp>
       <p:sp>
         <p:nvSpPr>
@@ -4561,8 +4559,8 @@
         </p:nvSpPr>
         <p:spPr>
           <a:xfrm>
-            <a:off x="15320772" y="5577840"/>
-            <a:ext cx="14497812" cy="3291840"/>
+            <a:off x="548640" y="30303215"/>
+            <a:ext cx="14497812" cy="1719072"/>
           </a:xfrm>
           <a:prstGeom prst="rect">
             <a:avLst/>
@@ -4575,6 +4573,9 @@
           <a:lstStyle/>
           <a:p>
             <a:pPr marL="342900" indent="-342900">
+              <a:lnSpc>
+                <a:spcPct val="150000"/>
+              </a:lnSpc>
               <a:buSzPct val="100000"/>
               <a:buChar char="•"/>
             </a:pPr>
@@ -4593,6 +4594,9 @@
           </a:p>
           <a:p>
             <a:pPr marL="342900" indent="-342900">
+              <a:lnSpc>
+                <a:spcPct val="150000"/>
+              </a:lnSpc>
               <a:buSzPct val="100000"/>
               <a:buChar char="•"/>
             </a:pPr>
@@ -4611,6 +4615,9 @@
           </a:p>
           <a:p>
             <a:pPr marL="342900" indent="-342900">
+              <a:lnSpc>
+                <a:spcPct val="150000"/>
+              </a:lnSpc>
               <a:buSzPct val="100000"/>
               <a:buChar char="•"/>
             </a:pPr>
@@ -4629,6 +4636,9 @@
           </a:p>
           <a:p>
             <a:pPr marL="342900" indent="-342900">
+              <a:lnSpc>
+                <a:spcPct val="150000"/>
+              </a:lnSpc>
               <a:buSzPct val="100000"/>
               <a:buChar char="•"/>
             </a:pPr>
@@ -4655,7 +4665,7 @@
         </p:nvSpPr>
         <p:spPr>
           <a:xfrm>
-            <a:off x="15320772" y="9052560"/>
+            <a:off x="15137606" y="4579901"/>
             <a:ext cx="822960" cy="822960"/>
           </a:xfrm>
           <a:prstGeom prst="ellipse">
@@ -4666,6 +4676,13 @@
           </a:solidFill>
           <a:ln/>
         </p:spPr>
+        <p:txBody>
+          <a:bodyPr/>
+          <a:lstStyle/>
+          <a:p>
+            <a:endParaRPr lang="ja-JP" altLang="en-US"/>
+          </a:p>
+        </p:txBody>
       </p:sp>
       <p:sp>
         <p:nvSpPr>
@@ -4675,7 +4692,7 @@
         </p:nvSpPr>
         <p:spPr>
           <a:xfrm>
-            <a:off x="15320772" y="9052560"/>
+            <a:off x="15137606" y="4579901"/>
             <a:ext cx="822960" cy="822960"/>
           </a:xfrm>
           <a:prstGeom prst="rect">
@@ -4688,7 +4705,7 @@
           <a:bodyPr wrap="square" rtlCol="0" anchor="ctr"/>
           <a:lstStyle/>
           <a:p>
-            <a:pPr algn="ctr" indent="0" marL="0">
+            <a:pPr marL="0" indent="0" algn="ctr">
               <a:buNone/>
             </a:pPr>
             <a:r>
@@ -4714,7 +4731,7 @@
         </p:nvSpPr>
         <p:spPr>
           <a:xfrm>
-            <a:off x="16280892" y="9052560"/>
+            <a:off x="16097726" y="4579901"/>
             <a:ext cx="13537692" cy="822960"/>
           </a:xfrm>
           <a:prstGeom prst="rect">
@@ -4727,7 +4744,7 @@
           <a:bodyPr wrap="square" lIns="0" tIns="0" rIns="0" bIns="0" rtlCol="0" anchor="ctr"/>
           <a:lstStyle/>
           <a:p>
-            <a:pPr indent="0" marL="0">
+            <a:pPr marL="0" indent="0">
               <a:buNone/>
             </a:pPr>
             <a:r>
@@ -4753,8 +4770,8 @@
         </p:nvSpPr>
         <p:spPr>
           <a:xfrm>
-            <a:off x="15320772" y="10058400"/>
-            <a:ext cx="14497812" cy="5120640"/>
+            <a:off x="15137606" y="5585740"/>
+            <a:ext cx="14497812" cy="5329311"/>
           </a:xfrm>
           <a:prstGeom prst="rect">
             <a:avLst/>
@@ -4764,13 +4781,20 @@
           </a:solidFill>
           <a:ln/>
           <a:effectLst>
-            <a:outerShdw sx="100000" sy="100000" kx="0" ky="0" algn="bl" rotWithShape="0" blurRad="25400" dist="12700" dir="8100000">
+            <a:outerShdw blurRad="25400" dist="12700" dir="8100000" algn="bl" rotWithShape="0">
               <a:srgbClr val="000000">
                 <a:alpha val="8000"/>
               </a:srgbClr>
             </a:outerShdw>
           </a:effectLst>
         </p:spPr>
+        <p:txBody>
+          <a:bodyPr/>
+          <a:lstStyle/>
+          <a:p>
+            <a:endParaRPr lang="ja-JP" altLang="en-US"/>
+          </a:p>
+        </p:txBody>
       </p:sp>
       <p:sp>
         <p:nvSpPr>
@@ -4780,7 +4804,7 @@
         </p:nvSpPr>
         <p:spPr>
           <a:xfrm>
-            <a:off x="15503652" y="10149840"/>
+            <a:off x="15320486" y="5677181"/>
             <a:ext cx="14132052" cy="457200"/>
           </a:xfrm>
           <a:prstGeom prst="rect">
@@ -4793,7 +4817,7 @@
           <a:bodyPr wrap="square" rtlCol="0" anchor="ctr"/>
           <a:lstStyle/>
           <a:p>
-            <a:pPr indent="0" marL="0">
+            <a:pPr marL="0" indent="0">
               <a:buNone/>
             </a:pPr>
             <a:r>
@@ -4813,30 +4837,48 @@
       </p:sp>
       <p:graphicFrame>
         <p:nvGraphicFramePr>
-          <p:cNvPr id="4" name="Table 2"/>
+          <p:cNvPr id="41" name="Table 2"/>
           <p:cNvGraphicFramePr>
             <a:graphicFrameLocks noGrp="1"/>
           </p:cNvGraphicFramePr>
           <p:nvPr>
             <p:extLst>
               <p:ext uri="{D42A27DB-BD31-4B8C-83A1-F6EECF244321}">
-                <p14:modId xmlns:p14="http://schemas.microsoft.com/office/powerpoint/2010/main" val="1579011935"/>
+                <p14:modId xmlns:p14="http://schemas.microsoft.com/office/powerpoint/2010/main" val="3453227269"/>
               </p:ext>
             </p:extLst>
           </p:nvPr>
         </p:nvGraphicFramePr>
         <p:xfrm>
-          <a:off x="15503652" y="10698480"/>
-          <a:ext cx="14132052" cy="914400"/>
+          <a:off x="15320486" y="6225821"/>
+          <a:ext cx="14132051" cy="4069080"/>
         </p:xfrm>
         <a:graphic>
           <a:graphicData uri="http://schemas.openxmlformats.org/drawingml/2006/table">
             <a:tbl>
               <a:tblPr/>
               <a:tblGrid>
-                <a:gridCol w="2543769"/>
-                <a:gridCol w="6359423"/>
-                <a:gridCol w="5228859"/>
+                <a:gridCol w="2543769">
+                  <a:extLst>
+                    <a:ext uri="{9D8B030D-6E8A-4147-A177-3AD203B41FA5}">
+                      <a16:colId xmlns:a16="http://schemas.microsoft.com/office/drawing/2014/main" val="20000"/>
+                    </a:ext>
+                  </a:extLst>
+                </a:gridCol>
+                <a:gridCol w="6359423">
+                  <a:extLst>
+                    <a:ext uri="{9D8B030D-6E8A-4147-A177-3AD203B41FA5}">
+                      <a16:colId xmlns:a16="http://schemas.microsoft.com/office/drawing/2014/main" val="20001"/>
+                    </a:ext>
+                  </a:extLst>
+                </a:gridCol>
+                <a:gridCol w="5228859">
+                  <a:extLst>
+                    <a:ext uri="{9D8B030D-6E8A-4147-A177-3AD203B41FA5}">
+                      <a16:colId xmlns:a16="http://schemas.microsoft.com/office/drawing/2014/main" val="20002"/>
+                    </a:ext>
+                  </a:extLst>
+                </a:gridCol>
               </a:tblGrid>
               <a:tr h="411480">
                 <a:tc>
@@ -4844,7 +4886,7 @@
                     <a:bodyPr/>
                     <a:lstStyle/>
                     <a:p>
-                      <a:pPr indent="0" marL="0">
+                      <a:pPr marL="0" indent="0">
                         <a:buNone/>
                       </a:pPr>
                       <a:r>
@@ -4858,7 +4900,7 @@
                       <a:endParaRPr lang="en-US" sz="2000" dirty="0"/>
                     </a:p>
                   </a:txBody>
-                  <a:tcPr marL="91440" marR="91440" marT="45720" marB="45720">
+                  <a:tcPr>
                     <a:lnL w="12700" cap="flat" cmpd="sng" algn="ctr">
                       <a:solidFill>
                         <a:srgbClr val="BDBDBD"/>
@@ -4905,7 +4947,7 @@
                     <a:bodyPr/>
                     <a:lstStyle/>
                     <a:p>
-                      <a:pPr indent="0" marL="0">
+                      <a:pPr marL="0" indent="0">
                         <a:buNone/>
                       </a:pPr>
                       <a:r>
@@ -4919,7 +4961,7 @@
                       <a:endParaRPr lang="en-US" sz="2000" dirty="0"/>
                     </a:p>
                   </a:txBody>
-                  <a:tcPr marL="91440" marR="91440" marT="45720" marB="45720">
+                  <a:tcPr>
                     <a:lnL w="12700" cap="flat" cmpd="sng" algn="ctr">
                       <a:solidFill>
                         <a:srgbClr val="BDBDBD"/>
@@ -4966,7 +5008,7 @@
                     <a:bodyPr/>
                     <a:lstStyle/>
                     <a:p>
-                      <a:pPr indent="0" marL="0">
+                      <a:pPr marL="0" indent="0">
                         <a:buNone/>
                       </a:pPr>
                       <a:r>
@@ -4980,7 +5022,7 @@
                       <a:endParaRPr lang="en-US" sz="2000" dirty="0"/>
                     </a:p>
                   </a:txBody>
-                  <a:tcPr marL="91440" marR="91440" marT="45720" marB="45720">
+                  <a:tcPr>
                     <a:lnL w="12700" cap="flat" cmpd="sng" algn="ctr">
                       <a:solidFill>
                         <a:srgbClr val="BDBDBD"/>
@@ -5022,6 +5064,11 @@
                     </a:solidFill>
                   </a:tcPr>
                 </a:tc>
+                <a:extLst>
+                  <a:ext uri="{0D108BD9-81ED-4DB2-BD59-A6C34878D82A}">
+                    <a16:rowId xmlns:a16="http://schemas.microsoft.com/office/drawing/2014/main" val="10000"/>
+                  </a:ext>
+                </a:extLst>
               </a:tr>
               <a:tr h="914400">
                 <a:tc>
@@ -5029,7 +5076,7 @@
                     <a:bodyPr/>
                     <a:lstStyle/>
                     <a:p>
-                      <a:pPr indent="0" marL="0">
+                      <a:pPr marL="0" indent="0">
                         <a:buNone/>
                       </a:pPr>
                       <a:r>
@@ -5043,7 +5090,7 @@
                       <a:endParaRPr lang="en-US" sz="2000" dirty="0"/>
                     </a:p>
                     <a:p>
-                      <a:pPr indent="0" marL="0">
+                      <a:pPr marL="0" indent="0">
                         <a:buNone/>
                       </a:pPr>
                       <a:r>
@@ -5057,7 +5104,7 @@
                       <a:endParaRPr lang="en-US" sz="2000" dirty="0"/>
                     </a:p>
                   </a:txBody>
-                  <a:tcPr marL="91440" marR="91440" marT="45720" marB="45720">
+                  <a:tcPr>
                     <a:lnL w="12700" cap="flat" cmpd="sng" algn="ctr">
                       <a:solidFill>
                         <a:srgbClr val="BDBDBD"/>
@@ -5101,7 +5148,7 @@
                     <a:bodyPr/>
                     <a:lstStyle/>
                     <a:p>
-                      <a:pPr indent="0" marL="0">
+                      <a:pPr marL="0" indent="0">
                         <a:buNone/>
                       </a:pPr>
                       <a:r>
@@ -5115,7 +5162,7 @@
                       <a:endParaRPr lang="en-US" sz="2000" dirty="0"/>
                     </a:p>
                   </a:txBody>
-                  <a:tcPr marL="91440" marR="91440" marT="45720" marB="45720">
+                  <a:tcPr>
                     <a:lnL w="12700" cap="flat" cmpd="sng" algn="ctr">
                       <a:solidFill>
                         <a:srgbClr val="BDBDBD"/>
@@ -5159,7 +5206,7 @@
                     <a:bodyPr/>
                     <a:lstStyle/>
                     <a:p>
-                      <a:pPr indent="0" marL="0">
+                      <a:pPr marL="0" indent="0">
                         <a:buNone/>
                       </a:pPr>
                       <a:r>
@@ -5173,7 +5220,7 @@
                       <a:endParaRPr lang="en-US" sz="2000" dirty="0"/>
                     </a:p>
                   </a:txBody>
-                  <a:tcPr marL="91440" marR="91440" marT="45720" marB="45720">
+                  <a:tcPr>
                     <a:lnL w="12700" cap="flat" cmpd="sng" algn="ctr">
                       <a:solidFill>
                         <a:srgbClr val="BDBDBD"/>
@@ -5212,6 +5259,11 @@
                     </a:lnB>
                   </a:tcPr>
                 </a:tc>
+                <a:extLst>
+                  <a:ext uri="{0D108BD9-81ED-4DB2-BD59-A6C34878D82A}">
+                    <a16:rowId xmlns:a16="http://schemas.microsoft.com/office/drawing/2014/main" val="10001"/>
+                  </a:ext>
+                </a:extLst>
               </a:tr>
               <a:tr h="914400">
                 <a:tc>
@@ -5219,7 +5271,7 @@
                     <a:bodyPr/>
                     <a:lstStyle/>
                     <a:p>
-                      <a:pPr indent="0" marL="0">
+                      <a:pPr marL="0" indent="0">
                         <a:buNone/>
                       </a:pPr>
                       <a:r>
@@ -5233,7 +5285,7 @@
                       <a:endParaRPr lang="en-US" sz="2000" dirty="0"/>
                     </a:p>
                     <a:p>
-                      <a:pPr indent="0" marL="0">
+                      <a:pPr marL="0" indent="0">
                         <a:buNone/>
                       </a:pPr>
                       <a:r>
@@ -5247,7 +5299,7 @@
                       <a:endParaRPr lang="en-US" sz="2000" dirty="0"/>
                     </a:p>
                   </a:txBody>
-                  <a:tcPr marL="91440" marR="91440" marT="45720" marB="45720">
+                  <a:tcPr>
                     <a:lnL w="12700" cap="flat" cmpd="sng" algn="ctr">
                       <a:solidFill>
                         <a:srgbClr val="BDBDBD"/>
@@ -5291,7 +5343,7 @@
                     <a:bodyPr/>
                     <a:lstStyle/>
                     <a:p>
-                      <a:pPr indent="0" marL="0">
+                      <a:pPr marL="0" indent="0">
                         <a:buNone/>
                       </a:pPr>
                       <a:r>
@@ -5305,7 +5357,7 @@
                       <a:endParaRPr lang="en-US" sz="2000" dirty="0"/>
                     </a:p>
                   </a:txBody>
-                  <a:tcPr marL="91440" marR="91440" marT="45720" marB="45720">
+                  <a:tcPr>
                     <a:lnL w="12700" cap="flat" cmpd="sng" algn="ctr">
                       <a:solidFill>
                         <a:srgbClr val="BDBDBD"/>
@@ -5349,7 +5401,7 @@
                     <a:bodyPr/>
                     <a:lstStyle/>
                     <a:p>
-                      <a:pPr indent="0" marL="0">
+                      <a:pPr marL="0" indent="0">
                         <a:buNone/>
                       </a:pPr>
                       <a:r>
@@ -5363,7 +5415,7 @@
                       <a:endParaRPr lang="en-US" sz="2000" dirty="0"/>
                     </a:p>
                   </a:txBody>
-                  <a:tcPr marL="91440" marR="91440" marT="45720" marB="45720">
+                  <a:tcPr>
                     <a:lnL w="12700" cap="flat" cmpd="sng" algn="ctr">
                       <a:solidFill>
                         <a:srgbClr val="BDBDBD"/>
@@ -5402,6 +5454,11 @@
                     </a:lnB>
                   </a:tcPr>
                 </a:tc>
+                <a:extLst>
+                  <a:ext uri="{0D108BD9-81ED-4DB2-BD59-A6C34878D82A}">
+                    <a16:rowId xmlns:a16="http://schemas.microsoft.com/office/drawing/2014/main" val="10002"/>
+                  </a:ext>
+                </a:extLst>
               </a:tr>
               <a:tr h="914400">
                 <a:tc>
@@ -5409,7 +5466,7 @@
                     <a:bodyPr/>
                     <a:lstStyle/>
                     <a:p>
-                      <a:pPr indent="0" marL="0">
+                      <a:pPr marL="0" indent="0">
                         <a:buNone/>
                       </a:pPr>
                       <a:r>
@@ -5423,7 +5480,7 @@
                       <a:endParaRPr lang="en-US" sz="2000" dirty="0"/>
                     </a:p>
                     <a:p>
-                      <a:pPr indent="0" marL="0">
+                      <a:pPr marL="0" indent="0">
                         <a:buNone/>
                       </a:pPr>
                       <a:r>
@@ -5437,7 +5494,7 @@
                       <a:endParaRPr lang="en-US" sz="2000" dirty="0"/>
                     </a:p>
                   </a:txBody>
-                  <a:tcPr marL="91440" marR="91440" marT="45720" marB="45720">
+                  <a:tcPr>
                     <a:lnL w="12700" cap="flat" cmpd="sng" algn="ctr">
                       <a:solidFill>
                         <a:srgbClr val="BDBDBD"/>
@@ -5481,7 +5538,7 @@
                     <a:bodyPr/>
                     <a:lstStyle/>
                     <a:p>
-                      <a:pPr indent="0" marL="0">
+                      <a:pPr marL="0" indent="0">
                         <a:buNone/>
                       </a:pPr>
                       <a:r>
@@ -5495,7 +5552,7 @@
                       <a:endParaRPr lang="en-US" sz="2000" dirty="0"/>
                     </a:p>
                   </a:txBody>
-                  <a:tcPr marL="91440" marR="91440" marT="45720" marB="45720">
+                  <a:tcPr>
                     <a:lnL w="12700" cap="flat" cmpd="sng" algn="ctr">
                       <a:solidFill>
                         <a:srgbClr val="BDBDBD"/>
@@ -5539,7 +5596,7 @@
                     <a:bodyPr/>
                     <a:lstStyle/>
                     <a:p>
-                      <a:pPr indent="0" marL="0">
+                      <a:pPr marL="0" indent="0">
                         <a:buNone/>
                       </a:pPr>
                       <a:r>
@@ -5553,7 +5610,7 @@
                       <a:endParaRPr lang="en-US" sz="2000" dirty="0"/>
                     </a:p>
                   </a:txBody>
-                  <a:tcPr marL="91440" marR="91440" marT="45720" marB="45720">
+                  <a:tcPr>
                     <a:lnL w="12700" cap="flat" cmpd="sng" algn="ctr">
                       <a:solidFill>
                         <a:srgbClr val="BDBDBD"/>
@@ -5592,6 +5649,11 @@
                     </a:lnB>
                   </a:tcPr>
                 </a:tc>
+                <a:extLst>
+                  <a:ext uri="{0D108BD9-81ED-4DB2-BD59-A6C34878D82A}">
+                    <a16:rowId xmlns:a16="http://schemas.microsoft.com/office/drawing/2014/main" val="10003"/>
+                  </a:ext>
+                </a:extLst>
               </a:tr>
               <a:tr h="914400">
                 <a:tc>
@@ -5599,7 +5661,7 @@
                     <a:bodyPr/>
                     <a:lstStyle/>
                     <a:p>
-                      <a:pPr indent="0" marL="0">
+                      <a:pPr marL="0" indent="0">
                         <a:buNone/>
                       </a:pPr>
                       <a:r>
@@ -5613,7 +5675,7 @@
                       <a:endParaRPr lang="en-US" sz="2000" dirty="0"/>
                     </a:p>
                     <a:p>
-                      <a:pPr indent="0" marL="0">
+                      <a:pPr marL="0" indent="0">
                         <a:buNone/>
                       </a:pPr>
                       <a:r>
@@ -5627,7 +5689,7 @@
                       <a:endParaRPr lang="en-US" sz="2000" dirty="0"/>
                     </a:p>
                   </a:txBody>
-                  <a:tcPr marL="91440" marR="91440" marT="45720" marB="45720">
+                  <a:tcPr>
                     <a:lnL w="12700" cap="flat" cmpd="sng" algn="ctr">
                       <a:solidFill>
                         <a:srgbClr val="BDBDBD"/>
@@ -5671,7 +5733,7 @@
                     <a:bodyPr/>
                     <a:lstStyle/>
                     <a:p>
-                      <a:pPr indent="0" marL="0">
+                      <a:pPr marL="0" indent="0">
                         <a:buNone/>
                       </a:pPr>
                       <a:r>
@@ -5685,7 +5747,7 @@
                       <a:endParaRPr lang="en-US" sz="2000" dirty="0"/>
                     </a:p>
                   </a:txBody>
-                  <a:tcPr marL="91440" marR="91440" marT="45720" marB="45720">
+                  <a:tcPr>
                     <a:lnL w="12700" cap="flat" cmpd="sng" algn="ctr">
                       <a:solidFill>
                         <a:srgbClr val="BDBDBD"/>
@@ -5729,7 +5791,7 @@
                     <a:bodyPr/>
                     <a:lstStyle/>
                     <a:p>
-                      <a:pPr indent="0" marL="0">
+                      <a:pPr marL="0" indent="0">
                         <a:buNone/>
                       </a:pPr>
                       <a:r>
@@ -5743,7 +5805,7 @@
                       <a:endParaRPr lang="en-US" sz="2000" dirty="0"/>
                     </a:p>
                   </a:txBody>
-                  <a:tcPr marL="91440" marR="91440" marT="45720" marB="45720">
+                  <a:tcPr>
                     <a:lnL w="12700" cap="flat" cmpd="sng" algn="ctr">
                       <a:solidFill>
                         <a:srgbClr val="BDBDBD"/>
@@ -5782,6 +5844,11 @@
                     </a:lnB>
                   </a:tcPr>
                 </a:tc>
+                <a:extLst>
+                  <a:ext uri="{0D108BD9-81ED-4DB2-BD59-A6C34878D82A}">
+                    <a16:rowId xmlns:a16="http://schemas.microsoft.com/office/drawing/2014/main" val="10004"/>
+                  </a:ext>
+                </a:extLst>
               </a:tr>
             </a:tbl>
           </a:graphicData>
@@ -5795,7 +5862,7 @@
         </p:nvSpPr>
         <p:spPr>
           <a:xfrm>
-            <a:off x="15503652" y="14447520"/>
+            <a:off x="15320486" y="10330656"/>
             <a:ext cx="14132052" cy="548640"/>
           </a:xfrm>
           <a:prstGeom prst="rect">
@@ -5808,7 +5875,7 @@
           <a:bodyPr wrap="square" rtlCol="0" anchor="ctr"/>
           <a:lstStyle/>
           <a:p>
-            <a:pPr indent="0" marL="0">
+            <a:pPr marL="0" indent="0">
               <a:buNone/>
             </a:pPr>
             <a:r>
@@ -5834,7 +5901,7 @@
         </p:nvSpPr>
         <p:spPr>
           <a:xfrm>
-            <a:off x="15320772" y="15361920"/>
+            <a:off x="15091601" y="11189372"/>
             <a:ext cx="822960" cy="822960"/>
           </a:xfrm>
           <a:prstGeom prst="ellipse">
@@ -5845,6 +5912,13 @@
           </a:solidFill>
           <a:ln/>
         </p:spPr>
+        <p:txBody>
+          <a:bodyPr/>
+          <a:lstStyle/>
+          <a:p>
+            <a:endParaRPr lang="ja-JP" altLang="en-US"/>
+          </a:p>
+        </p:txBody>
       </p:sp>
       <p:sp>
         <p:nvSpPr>
@@ -5854,7 +5928,7 @@
         </p:nvSpPr>
         <p:spPr>
           <a:xfrm>
-            <a:off x="15320772" y="15361920"/>
+            <a:off x="15091601" y="11189372"/>
             <a:ext cx="822960" cy="822960"/>
           </a:xfrm>
           <a:prstGeom prst="rect">
@@ -5867,7 +5941,7 @@
           <a:bodyPr wrap="square" rtlCol="0" anchor="ctr"/>
           <a:lstStyle/>
           <a:p>
-            <a:pPr algn="ctr" indent="0" marL="0">
+            <a:pPr marL="0" indent="0" algn="ctr">
               <a:buNone/>
             </a:pPr>
             <a:r>
@@ -5893,7 +5967,7 @@
         </p:nvSpPr>
         <p:spPr>
           <a:xfrm>
-            <a:off x="16280892" y="15361920"/>
+            <a:off x="16051721" y="11189372"/>
             <a:ext cx="13537692" cy="822960"/>
           </a:xfrm>
           <a:prstGeom prst="rect">
@@ -5906,7 +5980,7 @@
           <a:bodyPr wrap="square" lIns="0" tIns="0" rIns="0" bIns="0" rtlCol="0" anchor="ctr"/>
           <a:lstStyle/>
           <a:p>
-            <a:pPr indent="0" marL="0">
+            <a:pPr marL="0" indent="0">
               <a:buNone/>
             </a:pPr>
             <a:r>
@@ -5932,8 +6006,8 @@
         </p:nvSpPr>
         <p:spPr>
           <a:xfrm>
-            <a:off x="15320772" y="16367760"/>
-            <a:ext cx="14497812" cy="2560320"/>
+            <a:off x="15091601" y="12195212"/>
+            <a:ext cx="14497812" cy="3368040"/>
           </a:xfrm>
           <a:prstGeom prst="rect">
             <a:avLst/>
@@ -5943,13 +6017,20 @@
           </a:solidFill>
           <a:ln/>
           <a:effectLst>
-            <a:outerShdw sx="100000" sy="100000" kx="0" ky="0" algn="bl" rotWithShape="0" blurRad="25400" dist="12700" dir="8100000">
+            <a:outerShdw blurRad="25400" dist="12700" dir="8100000" algn="bl" rotWithShape="0">
               <a:srgbClr val="000000">
                 <a:alpha val="8000"/>
               </a:srgbClr>
             </a:outerShdw>
           </a:effectLst>
         </p:spPr>
+        <p:txBody>
+          <a:bodyPr/>
+          <a:lstStyle/>
+          <a:p>
+            <a:endParaRPr lang="ja-JP" altLang="en-US"/>
+          </a:p>
+        </p:txBody>
       </p:sp>
       <p:sp>
         <p:nvSpPr>
@@ -5959,7 +6040,7 @@
         </p:nvSpPr>
         <p:spPr>
           <a:xfrm>
-            <a:off x="15503652" y="16459200"/>
+            <a:off x="15274481" y="12286652"/>
             <a:ext cx="14132052" cy="457200"/>
           </a:xfrm>
           <a:prstGeom prst="rect">
@@ -5972,7 +6053,7 @@
           <a:bodyPr wrap="square" rtlCol="0" anchor="ctr"/>
           <a:lstStyle/>
           <a:p>
-            <a:pPr indent="0" marL="0">
+            <a:pPr marL="0" indent="0">
               <a:buNone/>
             </a:pPr>
             <a:r>
@@ -5992,29 +6073,41 @@
       </p:sp>
       <p:graphicFrame>
         <p:nvGraphicFramePr>
-          <p:cNvPr id="5" name="Table 3"/>
+          <p:cNvPr id="48" name="Table 3"/>
           <p:cNvGraphicFramePr>
             <a:graphicFrameLocks noGrp="1"/>
           </p:cNvGraphicFramePr>
           <p:nvPr>
             <p:extLst>
               <p:ext uri="{D42A27DB-BD31-4B8C-83A1-F6EECF244321}">
-                <p14:modId xmlns:p14="http://schemas.microsoft.com/office/powerpoint/2010/main" val="1579011935"/>
+                <p14:modId xmlns:p14="http://schemas.microsoft.com/office/powerpoint/2010/main" val="2834230399"/>
               </p:ext>
             </p:extLst>
           </p:nvPr>
         </p:nvGraphicFramePr>
         <p:xfrm>
-          <a:off x="15503652" y="16962120"/>
-          <a:ext cx="14132052" cy="914400"/>
+          <a:off x="15274481" y="12789572"/>
+          <a:ext cx="14132052" cy="2773680"/>
         </p:xfrm>
         <a:graphic>
           <a:graphicData uri="http://schemas.openxmlformats.org/drawingml/2006/table">
             <a:tbl>
               <a:tblPr/>
               <a:tblGrid>
-                <a:gridCol w="3109051"/>
-                <a:gridCol w="11023001"/>
+                <a:gridCol w="3109051">
+                  <a:extLst>
+                    <a:ext uri="{9D8B030D-6E8A-4147-A177-3AD203B41FA5}">
+                      <a16:colId xmlns:a16="http://schemas.microsoft.com/office/drawing/2014/main" val="20000"/>
+                    </a:ext>
+                  </a:extLst>
+                </a:gridCol>
+                <a:gridCol w="11023001">
+                  <a:extLst>
+                    <a:ext uri="{9D8B030D-6E8A-4147-A177-3AD203B41FA5}">
+                      <a16:colId xmlns:a16="http://schemas.microsoft.com/office/drawing/2014/main" val="20001"/>
+                    </a:ext>
+                  </a:extLst>
+                </a:gridCol>
               </a:tblGrid>
               <a:tr h="365760">
                 <a:tc>
@@ -6022,7 +6115,7 @@
                     <a:bodyPr/>
                     <a:lstStyle/>
                     <a:p>
-                      <a:pPr indent="0" marL="0">
+                      <a:pPr marL="0" indent="0">
                         <a:buNone/>
                       </a:pPr>
                       <a:r>
@@ -6036,7 +6129,7 @@
                       <a:endParaRPr lang="en-US" sz="2000" dirty="0"/>
                     </a:p>
                   </a:txBody>
-                  <a:tcPr marL="91440" marR="91440" marT="45720" marB="45720">
+                  <a:tcPr>
                     <a:lnL w="12700" cap="flat" cmpd="sng" algn="ctr">
                       <a:solidFill>
                         <a:srgbClr val="BDBDBD"/>
@@ -6083,7 +6176,7 @@
                     <a:bodyPr/>
                     <a:lstStyle/>
                     <a:p>
-                      <a:pPr indent="0" marL="0">
+                      <a:pPr marL="0" indent="0">
                         <a:buNone/>
                       </a:pPr>
                       <a:r>
@@ -6097,7 +6190,7 @@
                       <a:endParaRPr lang="en-US" sz="2000" dirty="0"/>
                     </a:p>
                   </a:txBody>
-                  <a:tcPr marL="91440" marR="91440" marT="45720" marB="45720">
+                  <a:tcPr>
                     <a:lnL w="12700" cap="flat" cmpd="sng" algn="ctr">
                       <a:solidFill>
                         <a:srgbClr val="BDBDBD"/>
@@ -6139,6 +6232,11 @@
                     </a:solidFill>
                   </a:tcPr>
                 </a:tc>
+                <a:extLst>
+                  <a:ext uri="{0D108BD9-81ED-4DB2-BD59-A6C34878D82A}">
+                    <a16:rowId xmlns:a16="http://schemas.microsoft.com/office/drawing/2014/main" val="10000"/>
+                  </a:ext>
+                </a:extLst>
               </a:tr>
               <a:tr h="365760">
                 <a:tc>
@@ -6146,7 +6244,7 @@
                     <a:bodyPr/>
                     <a:lstStyle/>
                     <a:p>
-                      <a:pPr indent="0" marL="0">
+                      <a:pPr marL="0" indent="0">
                         <a:buNone/>
                       </a:pPr>
                       <a:r>
@@ -6160,7 +6258,7 @@
                       <a:endParaRPr lang="en-US" sz="2000" dirty="0"/>
                     </a:p>
                   </a:txBody>
-                  <a:tcPr marL="91440" marR="91440" marT="45720" marB="45720">
+                  <a:tcPr>
                     <a:lnL w="12700" cap="flat" cmpd="sng" algn="ctr">
                       <a:solidFill>
                         <a:srgbClr val="BDBDBD"/>
@@ -6204,7 +6302,7 @@
                     <a:bodyPr/>
                     <a:lstStyle/>
                     <a:p>
-                      <a:pPr indent="0" marL="0">
+                      <a:pPr marL="0" indent="0">
                         <a:buNone/>
                       </a:pPr>
                       <a:r>
@@ -6218,7 +6316,7 @@
                       <a:endParaRPr lang="en-US" sz="2000" dirty="0"/>
                     </a:p>
                   </a:txBody>
-                  <a:tcPr marL="91440" marR="91440" marT="45720" marB="45720">
+                  <a:tcPr>
                     <a:lnL w="12700" cap="flat" cmpd="sng" algn="ctr">
                       <a:solidFill>
                         <a:srgbClr val="BDBDBD"/>
@@ -6257,6 +6355,11 @@
                     </a:lnB>
                   </a:tcPr>
                 </a:tc>
+                <a:extLst>
+                  <a:ext uri="{0D108BD9-81ED-4DB2-BD59-A6C34878D82A}">
+                    <a16:rowId xmlns:a16="http://schemas.microsoft.com/office/drawing/2014/main" val="10001"/>
+                  </a:ext>
+                </a:extLst>
               </a:tr>
               <a:tr h="365760">
                 <a:tc>
@@ -6264,7 +6367,7 @@
                     <a:bodyPr/>
                     <a:lstStyle/>
                     <a:p>
-                      <a:pPr indent="0" marL="0">
+                      <a:pPr marL="0" indent="0">
                         <a:buNone/>
                       </a:pPr>
                       <a:r>
@@ -6278,7 +6381,7 @@
                       <a:endParaRPr lang="en-US" sz="2000" dirty="0"/>
                     </a:p>
                   </a:txBody>
-                  <a:tcPr marL="91440" marR="91440" marT="45720" marB="45720">
+                  <a:tcPr>
                     <a:lnL w="12700" cap="flat" cmpd="sng" algn="ctr">
                       <a:solidFill>
                         <a:srgbClr val="BDBDBD"/>
@@ -6322,7 +6425,7 @@
                     <a:bodyPr/>
                     <a:lstStyle/>
                     <a:p>
-                      <a:pPr indent="0" marL="0">
+                      <a:pPr marL="0" indent="0">
                         <a:buNone/>
                       </a:pPr>
                       <a:r>
@@ -6331,12 +6434,20 @@
                             <a:srgbClr val="212121"/>
                           </a:solidFill>
                         </a:rPr>
-                        <a:t>EndeavourOS, Kernel 6.12.74-1-lts</a:t>
+                        <a:t>EndeavourOS, </a:t>
+                      </a:r>
+                      <a:r>
+                        <a:rPr lang="en-US" sz="2000">
+                          <a:solidFill>
+                            <a:srgbClr val="212121"/>
+                          </a:solidFill>
+                        </a:rPr>
+                        <a:t>Kernel 6.18.16-1-lts</a:t>
                       </a:r>
                       <a:endParaRPr lang="en-US" sz="2000" dirty="0"/>
                     </a:p>
                   </a:txBody>
-                  <a:tcPr marL="91440" marR="91440" marT="45720" marB="45720">
+                  <a:tcPr>
                     <a:lnL w="12700" cap="flat" cmpd="sng" algn="ctr">
                       <a:solidFill>
                         <a:srgbClr val="BDBDBD"/>
@@ -6375,6 +6486,11 @@
                     </a:lnB>
                   </a:tcPr>
                 </a:tc>
+                <a:extLst>
+                  <a:ext uri="{0D108BD9-81ED-4DB2-BD59-A6C34878D82A}">
+                    <a16:rowId xmlns:a16="http://schemas.microsoft.com/office/drawing/2014/main" val="10002"/>
+                  </a:ext>
+                </a:extLst>
               </a:tr>
               <a:tr h="365760">
                 <a:tc>
@@ -6382,7 +6498,7 @@
                     <a:bodyPr/>
                     <a:lstStyle/>
                     <a:p>
-                      <a:pPr indent="0" marL="0">
+                      <a:pPr marL="0" indent="0">
                         <a:buNone/>
                       </a:pPr>
                       <a:r>
@@ -6396,7 +6512,7 @@
                       <a:endParaRPr lang="en-US" sz="2000" dirty="0"/>
                     </a:p>
                   </a:txBody>
-                  <a:tcPr marL="91440" marR="91440" marT="45720" marB="45720">
+                  <a:tcPr>
                     <a:lnL w="12700" cap="flat" cmpd="sng" algn="ctr">
                       <a:solidFill>
                         <a:srgbClr val="BDBDBD"/>
@@ -6440,7 +6556,7 @@
                     <a:bodyPr/>
                     <a:lstStyle/>
                     <a:p>
-                      <a:pPr indent="0" marL="0">
+                      <a:pPr marL="0" indent="0">
                         <a:buNone/>
                       </a:pPr>
                       <a:r>
@@ -6454,7 +6570,7 @@
                       <a:endParaRPr lang="en-US" sz="2000" dirty="0"/>
                     </a:p>
                   </a:txBody>
-                  <a:tcPr marL="91440" marR="91440" marT="45720" marB="45720">
+                  <a:tcPr>
                     <a:lnL w="12700" cap="flat" cmpd="sng" algn="ctr">
                       <a:solidFill>
                         <a:srgbClr val="BDBDBD"/>
@@ -6493,6 +6609,11 @@
                     </a:lnB>
                   </a:tcPr>
                 </a:tc>
+                <a:extLst>
+                  <a:ext uri="{0D108BD9-81ED-4DB2-BD59-A6C34878D82A}">
+                    <a16:rowId xmlns:a16="http://schemas.microsoft.com/office/drawing/2014/main" val="10003"/>
+                  </a:ext>
+                </a:extLst>
               </a:tr>
               <a:tr h="365760">
                 <a:tc>
@@ -6500,7 +6621,7 @@
                     <a:bodyPr/>
                     <a:lstStyle/>
                     <a:p>
-                      <a:pPr indent="0" marL="0">
+                      <a:pPr marL="0" indent="0">
                         <a:buNone/>
                       </a:pPr>
                       <a:r>
@@ -6514,7 +6635,7 @@
                       <a:endParaRPr lang="en-US" sz="2000" dirty="0"/>
                     </a:p>
                   </a:txBody>
-                  <a:tcPr marL="91440" marR="91440" marT="45720" marB="45720">
+                  <a:tcPr>
                     <a:lnL w="12700" cap="flat" cmpd="sng" algn="ctr">
                       <a:solidFill>
                         <a:srgbClr val="BDBDBD"/>
@@ -6558,7 +6679,7 @@
                     <a:bodyPr/>
                     <a:lstStyle/>
                     <a:p>
-                      <a:pPr indent="0" marL="0">
+                      <a:pPr marL="0" indent="0">
                         <a:buNone/>
                       </a:pPr>
                       <a:r>
@@ -6572,7 +6693,7 @@
                       <a:endParaRPr lang="en-US" sz="2000" dirty="0"/>
                     </a:p>
                   </a:txBody>
-                  <a:tcPr marL="91440" marR="91440" marT="45720" marB="45720">
+                  <a:tcPr>
                     <a:lnL w="12700" cap="flat" cmpd="sng" algn="ctr">
                       <a:solidFill>
                         <a:srgbClr val="BDBDBD"/>
@@ -6611,6 +6732,11 @@
                     </a:lnB>
                   </a:tcPr>
                 </a:tc>
+                <a:extLst>
+                  <a:ext uri="{0D108BD9-81ED-4DB2-BD59-A6C34878D82A}">
+                    <a16:rowId xmlns:a16="http://schemas.microsoft.com/office/drawing/2014/main" val="10004"/>
+                  </a:ext>
+                </a:extLst>
               </a:tr>
               <a:tr h="365760">
                 <a:tc>
@@ -6618,7 +6744,7 @@
                     <a:bodyPr/>
                     <a:lstStyle/>
                     <a:p>
-                      <a:pPr indent="0" marL="0">
+                      <a:pPr marL="0" indent="0">
                         <a:buNone/>
                       </a:pPr>
                       <a:r>
@@ -6632,7 +6758,7 @@
                       <a:endParaRPr lang="en-US" sz="2000" dirty="0"/>
                     </a:p>
                   </a:txBody>
-                  <a:tcPr marL="91440" marR="91440" marT="45720" marB="45720">
+                  <a:tcPr>
                     <a:lnL w="12700" cap="flat" cmpd="sng" algn="ctr">
                       <a:solidFill>
                         <a:srgbClr val="BDBDBD"/>
@@ -6676,7 +6802,7 @@
                     <a:bodyPr/>
                     <a:lstStyle/>
                     <a:p>
-                      <a:pPr indent="0" marL="0">
+                      <a:pPr marL="0" indent="0">
                         <a:buNone/>
                       </a:pPr>
                       <a:r>
@@ -6690,7 +6816,7 @@
                       <a:endParaRPr lang="en-US" sz="2000" dirty="0"/>
                     </a:p>
                   </a:txBody>
-                  <a:tcPr marL="91440" marR="91440" marT="45720" marB="45720">
+                  <a:tcPr>
                     <a:lnL w="12700" cap="flat" cmpd="sng" algn="ctr">
                       <a:solidFill>
                         <a:srgbClr val="BDBDBD"/>
@@ -6729,6 +6855,11 @@
                     </a:lnB>
                   </a:tcPr>
                 </a:tc>
+                <a:extLst>
+                  <a:ext uri="{0D108BD9-81ED-4DB2-BD59-A6C34878D82A}">
+                    <a16:rowId xmlns:a16="http://schemas.microsoft.com/office/drawing/2014/main" val="10005"/>
+                  </a:ext>
+                </a:extLst>
               </a:tr>
               <a:tr h="320040">
                 <a:tc>
@@ -6736,21 +6867,25 @@
                     <a:bodyPr/>
                     <a:lstStyle/>
                     <a:p>
-                      <a:pPr indent="0" marL="0">
+                      <a:pPr marL="0" indent="0">
                         <a:buNone/>
                       </a:pPr>
                       <a:r>
                         <a:rPr lang="en-US" sz="2000" b="1" dirty="0">
                           <a:solidFill>
-                            <a:srgbClr val="616161"/>
+                            <a:srgbClr val="C00000"/>
                           </a:solidFill>
                         </a:rPr>
                         <a:t>Note</a:t>
                       </a:r>
-                      <a:endParaRPr lang="en-US" sz="2000" dirty="0"/>
+                      <a:endParaRPr lang="en-US" sz="2000" dirty="0">
+                        <a:solidFill>
+                          <a:srgbClr val="C00000"/>
+                        </a:solidFill>
+                      </a:endParaRPr>
                     </a:p>
                   </a:txBody>
-                  <a:tcPr marL="91440" marR="91440" marT="45720" marB="45720">
+                  <a:tcPr>
                     <a:lnL w="12700" cap="flat" cmpd="sng" algn="ctr">
                       <a:solidFill>
                         <a:srgbClr val="BDBDBD"/>
@@ -6794,21 +6929,20 @@
                     <a:bodyPr/>
                     <a:lstStyle/>
                     <a:p>
-                      <a:pPr indent="0" marL="0">
+                      <a:pPr marL="0" indent="0">
                         <a:buNone/>
                       </a:pPr>
                       <a:r>
                         <a:rPr lang="en-US" sz="1800" dirty="0">
                           <a:solidFill>
-                            <a:srgbClr val="616161"/>
+                            <a:srgbClr val="C00000"/>
                           </a:solidFill>
                         </a:rPr>
                         <a:t>Vulkan=0.17.4 vs ROCm=0.17.5: version difference is inherent to the dual-install; both tested as-shipped</a:t>
                       </a:r>
-                      <a:endParaRPr lang="en-US" sz="1800" dirty="0"/>
                     </a:p>
                   </a:txBody>
-                  <a:tcPr marL="91440" marR="91440" marT="45720" marB="45720">
+                  <a:tcPr>
                     <a:lnL w="12700" cap="flat" cmpd="sng" algn="ctr">
                       <a:solidFill>
                         <a:srgbClr val="BDBDBD"/>
@@ -6847,6 +6981,11 @@
                     </a:lnB>
                   </a:tcPr>
                 </a:tc>
+                <a:extLst>
+                  <a:ext uri="{0D108BD9-81ED-4DB2-BD59-A6C34878D82A}">
+                    <a16:rowId xmlns:a16="http://schemas.microsoft.com/office/drawing/2014/main" val="10006"/>
+                  </a:ext>
+                </a:extLst>
               </a:tr>
             </a:tbl>
           </a:graphicData>
@@ -6860,8 +6999,8 @@
         </p:nvSpPr>
         <p:spPr>
           <a:xfrm>
-            <a:off x="15320772" y="19659600"/>
-            <a:ext cx="14497812" cy="5029200"/>
+            <a:off x="15091601" y="16029984"/>
+            <a:ext cx="14497812" cy="5293987"/>
           </a:xfrm>
           <a:prstGeom prst="rect">
             <a:avLst/>
@@ -6871,13 +7010,20 @@
           </a:solidFill>
           <a:ln/>
           <a:effectLst>
-            <a:outerShdw sx="100000" sy="100000" kx="0" ky="0" algn="bl" rotWithShape="0" blurRad="25400" dist="12700" dir="8100000">
+            <a:outerShdw blurRad="25400" dist="12700" dir="8100000" algn="bl" rotWithShape="0">
               <a:srgbClr val="000000">
                 <a:alpha val="8000"/>
               </a:srgbClr>
             </a:outerShdw>
           </a:effectLst>
         </p:spPr>
+        <p:txBody>
+          <a:bodyPr/>
+          <a:lstStyle/>
+          <a:p>
+            <a:endParaRPr lang="ja-JP" altLang="en-US"/>
+          </a:p>
+        </p:txBody>
       </p:sp>
       <p:sp>
         <p:nvSpPr>
@@ -6887,7 +7033,7 @@
         </p:nvSpPr>
         <p:spPr>
           <a:xfrm>
-            <a:off x="15503652" y="19751040"/>
+            <a:off x="15274481" y="16137683"/>
             <a:ext cx="14132052" cy="457200"/>
           </a:xfrm>
           <a:prstGeom prst="rect">
@@ -6900,7 +7046,7 @@
           <a:bodyPr wrap="square" rtlCol="0" anchor="ctr"/>
           <a:lstStyle/>
           <a:p>
-            <a:pPr indent="0" marL="0">
+            <a:pPr marL="0" indent="0">
               <a:buNone/>
             </a:pPr>
             <a:r>
@@ -6920,30 +7066,48 @@
       </p:sp>
       <p:graphicFrame>
         <p:nvGraphicFramePr>
-          <p:cNvPr id="6" name="Table 4"/>
+          <p:cNvPr id="51" name="Table 4"/>
           <p:cNvGraphicFramePr>
             <a:graphicFrameLocks noGrp="1"/>
           </p:cNvGraphicFramePr>
           <p:nvPr>
             <p:extLst>
               <p:ext uri="{D42A27DB-BD31-4B8C-83A1-F6EECF244321}">
-                <p14:modId xmlns:p14="http://schemas.microsoft.com/office/powerpoint/2010/main" val="1579011935"/>
+                <p14:modId xmlns:p14="http://schemas.microsoft.com/office/powerpoint/2010/main" val="718436317"/>
               </p:ext>
             </p:extLst>
           </p:nvPr>
         </p:nvGraphicFramePr>
         <p:xfrm>
-          <a:off x="15503652" y="20253960"/>
-          <a:ext cx="14132052" cy="914400"/>
+          <a:off x="15274481" y="16640603"/>
+          <a:ext cx="14132052" cy="2651760"/>
         </p:xfrm>
         <a:graphic>
           <a:graphicData uri="http://schemas.openxmlformats.org/drawingml/2006/table">
             <a:tbl>
               <a:tblPr/>
               <a:tblGrid>
-                <a:gridCol w="2826410"/>
-                <a:gridCol w="5652821"/>
-                <a:gridCol w="5652821"/>
+                <a:gridCol w="2826410">
+                  <a:extLst>
+                    <a:ext uri="{9D8B030D-6E8A-4147-A177-3AD203B41FA5}">
+                      <a16:colId xmlns:a16="http://schemas.microsoft.com/office/drawing/2014/main" val="20000"/>
+                    </a:ext>
+                  </a:extLst>
+                </a:gridCol>
+                <a:gridCol w="5652821">
+                  <a:extLst>
+                    <a:ext uri="{9D8B030D-6E8A-4147-A177-3AD203B41FA5}">
+                      <a16:colId xmlns:a16="http://schemas.microsoft.com/office/drawing/2014/main" val="20001"/>
+                    </a:ext>
+                  </a:extLst>
+                </a:gridCol>
+                <a:gridCol w="5652821">
+                  <a:extLst>
+                    <a:ext uri="{9D8B030D-6E8A-4147-A177-3AD203B41FA5}">
+                      <a16:colId xmlns:a16="http://schemas.microsoft.com/office/drawing/2014/main" val="20002"/>
+                    </a:ext>
+                  </a:extLst>
+                </a:gridCol>
               </a:tblGrid>
               <a:tr h="548640">
                 <a:tc>
@@ -6951,7 +7115,7 @@
                     <a:bodyPr/>
                     <a:lstStyle/>
                     <a:p>
-                      <a:pPr indent="0" marL="0">
+                      <a:pPr marL="0" indent="0">
                         <a:buNone/>
                       </a:pPr>
                       <a:r>
@@ -6965,7 +7129,7 @@
                       <a:endParaRPr lang="en-US" sz="2000" dirty="0"/>
                     </a:p>
                   </a:txBody>
-                  <a:tcPr marL="91440" marR="91440" marT="45720" marB="45720">
+                  <a:tcPr>
                     <a:lnL w="12700" cap="flat" cmpd="sng" algn="ctr">
                       <a:solidFill>
                         <a:srgbClr val="BDBDBD"/>
@@ -7012,7 +7176,7 @@
                     <a:bodyPr/>
                     <a:lstStyle/>
                     <a:p>
-                      <a:pPr indent="0" marL="0">
+                      <a:pPr marL="0" indent="0">
                         <a:buNone/>
                       </a:pPr>
                       <a:r>
@@ -7026,7 +7190,7 @@
                       <a:endParaRPr lang="en-US" sz="1800" dirty="0"/>
                     </a:p>
                     <a:p>
-                      <a:pPr indent="0" marL="0">
+                      <a:pPr marL="0" indent="0">
                         <a:buNone/>
                       </a:pPr>
                       <a:r>
@@ -7040,7 +7204,7 @@
                       <a:endParaRPr lang="en-US" sz="1800" dirty="0"/>
                     </a:p>
                   </a:txBody>
-                  <a:tcPr marL="91440" marR="91440" marT="45720" marB="45720">
+                  <a:tcPr>
                     <a:lnL w="12700" cap="flat" cmpd="sng" algn="ctr">
                       <a:solidFill>
                         <a:srgbClr val="BDBDBD"/>
@@ -7087,7 +7251,7 @@
                     <a:bodyPr/>
                     <a:lstStyle/>
                     <a:p>
-                      <a:pPr indent="0" marL="0">
+                      <a:pPr marL="0" indent="0">
                         <a:buNone/>
                       </a:pPr>
                       <a:r>
@@ -7101,7 +7265,7 @@
                       <a:endParaRPr lang="en-US" sz="1800" dirty="0"/>
                     </a:p>
                     <a:p>
-                      <a:pPr indent="0" marL="0">
+                      <a:pPr marL="0" indent="0">
                         <a:buNone/>
                       </a:pPr>
                       <a:r>
@@ -7115,7 +7279,7 @@
                       <a:endParaRPr lang="en-US" sz="1800" dirty="0"/>
                     </a:p>
                   </a:txBody>
-                  <a:tcPr marL="91440" marR="91440" marT="45720" marB="45720">
+                  <a:tcPr>
                     <a:lnL w="12700" cap="flat" cmpd="sng" algn="ctr">
                       <a:solidFill>
                         <a:srgbClr val="BDBDBD"/>
@@ -7157,6 +7321,11 @@
                     </a:solidFill>
                   </a:tcPr>
                 </a:tc>
+                <a:extLst>
+                  <a:ext uri="{0D108BD9-81ED-4DB2-BD59-A6C34878D82A}">
+                    <a16:rowId xmlns:a16="http://schemas.microsoft.com/office/drawing/2014/main" val="10000"/>
+                  </a:ext>
+                </a:extLst>
               </a:tr>
               <a:tr h="502920">
                 <a:tc>
@@ -7164,7 +7333,7 @@
                     <a:bodyPr/>
                     <a:lstStyle/>
                     <a:p>
-                      <a:pPr indent="0" marL="0">
+                      <a:pPr marL="0" indent="0">
                         <a:buNone/>
                       </a:pPr>
                       <a:r>
@@ -7178,7 +7347,7 @@
                       <a:endParaRPr lang="en-US" sz="2000" dirty="0"/>
                     </a:p>
                   </a:txBody>
-                  <a:tcPr marL="91440" marR="91440" marT="45720" marB="45720">
+                  <a:tcPr>
                     <a:lnL w="12700" cap="flat" cmpd="sng" algn="ctr">
                       <a:solidFill>
                         <a:srgbClr val="BDBDBD"/>
@@ -7222,7 +7391,7 @@
                     <a:bodyPr/>
                     <a:lstStyle/>
                     <a:p>
-                      <a:pPr indent="0" marL="0">
+                      <a:pPr marL="0" indent="0">
                         <a:buNone/>
                       </a:pPr>
                       <a:r>
@@ -7236,7 +7405,7 @@
                       <a:endParaRPr lang="en-US" sz="2000" dirty="0"/>
                     </a:p>
                   </a:txBody>
-                  <a:tcPr marL="91440" marR="91440" marT="45720" marB="45720">
+                  <a:tcPr>
                     <a:lnL w="12700" cap="flat" cmpd="sng" algn="ctr">
                       <a:solidFill>
                         <a:srgbClr val="BDBDBD"/>
@@ -7280,7 +7449,7 @@
                     <a:bodyPr/>
                     <a:lstStyle/>
                     <a:p>
-                      <a:pPr indent="0" marL="0">
+                      <a:pPr marL="0" indent="0">
                         <a:buNone/>
                       </a:pPr>
                       <a:r>
@@ -7294,7 +7463,7 @@
                       <a:endParaRPr lang="en-US" sz="2000" dirty="0"/>
                     </a:p>
                   </a:txBody>
-                  <a:tcPr marL="91440" marR="91440" marT="45720" marB="45720">
+                  <a:tcPr>
                     <a:lnL w="12700" cap="flat" cmpd="sng" algn="ctr">
                       <a:solidFill>
                         <a:srgbClr val="BDBDBD"/>
@@ -7333,6 +7502,11 @@
                     </a:lnB>
                   </a:tcPr>
                 </a:tc>
+                <a:extLst>
+                  <a:ext uri="{0D108BD9-81ED-4DB2-BD59-A6C34878D82A}">
+                    <a16:rowId xmlns:a16="http://schemas.microsoft.com/office/drawing/2014/main" val="10001"/>
+                  </a:ext>
+                </a:extLst>
               </a:tr>
               <a:tr h="502920">
                 <a:tc>
@@ -7340,7 +7514,7 @@
                     <a:bodyPr/>
                     <a:lstStyle/>
                     <a:p>
-                      <a:pPr indent="0" marL="0">
+                      <a:pPr marL="0" indent="0">
                         <a:buNone/>
                       </a:pPr>
                       <a:r>
@@ -7354,7 +7528,7 @@
                       <a:endParaRPr lang="en-US" sz="2000" dirty="0"/>
                     </a:p>
                   </a:txBody>
-                  <a:tcPr marL="91440" marR="91440" marT="45720" marB="45720">
+                  <a:tcPr>
                     <a:lnL w="12700" cap="flat" cmpd="sng" algn="ctr">
                       <a:solidFill>
                         <a:srgbClr val="BDBDBD"/>
@@ -7398,7 +7572,7 @@
                     <a:bodyPr/>
                     <a:lstStyle/>
                     <a:p>
-                      <a:pPr indent="0" marL="0">
+                      <a:pPr marL="0" indent="0">
                         <a:buNone/>
                       </a:pPr>
                       <a:r>
@@ -7412,7 +7586,7 @@
                       <a:endParaRPr lang="en-US" sz="2000" dirty="0"/>
                     </a:p>
                   </a:txBody>
-                  <a:tcPr marL="91440" marR="91440" marT="45720" marB="45720">
+                  <a:tcPr>
                     <a:lnL w="12700" cap="flat" cmpd="sng" algn="ctr">
                       <a:solidFill>
                         <a:srgbClr val="BDBDBD"/>
@@ -7456,7 +7630,7 @@
                     <a:bodyPr/>
                     <a:lstStyle/>
                     <a:p>
-                      <a:pPr indent="0" marL="0">
+                      <a:pPr marL="0" indent="0">
                         <a:buNone/>
                       </a:pPr>
                       <a:r>
@@ -7470,7 +7644,7 @@
                       <a:endParaRPr lang="en-US" sz="2000" dirty="0"/>
                     </a:p>
                   </a:txBody>
-                  <a:tcPr marL="91440" marR="91440" marT="45720" marB="45720">
+                  <a:tcPr>
                     <a:lnL w="12700" cap="flat" cmpd="sng" algn="ctr">
                       <a:solidFill>
                         <a:srgbClr val="BDBDBD"/>
@@ -7509,6 +7683,11 @@
                     </a:lnB>
                   </a:tcPr>
                 </a:tc>
+                <a:extLst>
+                  <a:ext uri="{0D108BD9-81ED-4DB2-BD59-A6C34878D82A}">
+                    <a16:rowId xmlns:a16="http://schemas.microsoft.com/office/drawing/2014/main" val="10002"/>
+                  </a:ext>
+                </a:extLst>
               </a:tr>
               <a:tr h="502920">
                 <a:tc>
@@ -7516,7 +7695,7 @@
                     <a:bodyPr/>
                     <a:lstStyle/>
                     <a:p>
-                      <a:pPr indent="0" marL="0">
+                      <a:pPr marL="0" indent="0">
                         <a:buNone/>
                       </a:pPr>
                       <a:r>
@@ -7530,7 +7709,7 @@
                       <a:endParaRPr lang="en-US" sz="2000" dirty="0"/>
                     </a:p>
                   </a:txBody>
-                  <a:tcPr marL="91440" marR="91440" marT="45720" marB="45720">
+                  <a:tcPr>
                     <a:lnL w="12700" cap="flat" cmpd="sng" algn="ctr">
                       <a:solidFill>
                         <a:srgbClr val="BDBDBD"/>
@@ -7574,7 +7753,7 @@
                     <a:bodyPr/>
                     <a:lstStyle/>
                     <a:p>
-                      <a:pPr indent="0" marL="0">
+                      <a:pPr marL="0" indent="0">
                         <a:buNone/>
                       </a:pPr>
                       <a:r>
@@ -7588,7 +7767,7 @@
                       <a:endParaRPr lang="en-US" sz="2000" dirty="0"/>
                     </a:p>
                   </a:txBody>
-                  <a:tcPr marL="91440" marR="91440" marT="45720" marB="45720">
+                  <a:tcPr>
                     <a:lnL w="12700" cap="flat" cmpd="sng" algn="ctr">
                       <a:solidFill>
                         <a:srgbClr val="BDBDBD"/>
@@ -7632,7 +7811,7 @@
                     <a:bodyPr/>
                     <a:lstStyle/>
                     <a:p>
-                      <a:pPr indent="0" marL="0">
+                      <a:pPr marL="0" indent="0">
                         <a:buNone/>
                       </a:pPr>
                       <a:r>
@@ -7646,7 +7825,7 @@
                       <a:endParaRPr lang="en-US" sz="2000" dirty="0"/>
                     </a:p>
                   </a:txBody>
-                  <a:tcPr marL="91440" marR="91440" marT="45720" marB="45720">
+                  <a:tcPr>
                     <a:lnL w="12700" cap="flat" cmpd="sng" algn="ctr">
                       <a:solidFill>
                         <a:srgbClr val="BDBDBD"/>
@@ -7685,6 +7864,11 @@
                     </a:lnB>
                   </a:tcPr>
                 </a:tc>
+                <a:extLst>
+                  <a:ext uri="{0D108BD9-81ED-4DB2-BD59-A6C34878D82A}">
+                    <a16:rowId xmlns:a16="http://schemas.microsoft.com/office/drawing/2014/main" val="10003"/>
+                  </a:ext>
+                </a:extLst>
               </a:tr>
               <a:tr h="502920">
                 <a:tc>
@@ -7692,7 +7876,7 @@
                     <a:bodyPr/>
                     <a:lstStyle/>
                     <a:p>
-                      <a:pPr indent="0" marL="0">
+                      <a:pPr marL="0" indent="0">
                         <a:buNone/>
                       </a:pPr>
                       <a:r>
@@ -7706,7 +7890,7 @@
                       <a:endParaRPr lang="en-US" sz="2000" dirty="0"/>
                     </a:p>
                   </a:txBody>
-                  <a:tcPr marL="91440" marR="91440" marT="45720" marB="45720">
+                  <a:tcPr>
                     <a:lnL w="12700" cap="flat" cmpd="sng" algn="ctr">
                       <a:solidFill>
                         <a:srgbClr val="BDBDBD"/>
@@ -7750,7 +7934,7 @@
                     <a:bodyPr/>
                     <a:lstStyle/>
                     <a:p>
-                      <a:pPr indent="0" marL="0">
+                      <a:pPr marL="0" indent="0">
                         <a:buNone/>
                       </a:pPr>
                       <a:r>
@@ -7764,7 +7948,7 @@
                       <a:endParaRPr lang="en-US" sz="2000" dirty="0"/>
                     </a:p>
                   </a:txBody>
-                  <a:tcPr marL="91440" marR="91440" marT="45720" marB="45720">
+                  <a:tcPr>
                     <a:lnL w="12700" cap="flat" cmpd="sng" algn="ctr">
                       <a:solidFill>
                         <a:srgbClr val="BDBDBD"/>
@@ -7808,7 +7992,7 @@
                     <a:bodyPr/>
                     <a:lstStyle/>
                     <a:p>
-                      <a:pPr indent="0" marL="0">
+                      <a:pPr marL="0" indent="0">
                         <a:buNone/>
                       </a:pPr>
                       <a:r>
@@ -7822,7 +8006,7 @@
                       <a:endParaRPr lang="en-US" sz="2000" dirty="0"/>
                     </a:p>
                   </a:txBody>
-                  <a:tcPr marL="91440" marR="91440" marT="45720" marB="45720">
+                  <a:tcPr>
                     <a:lnL w="12700" cap="flat" cmpd="sng" algn="ctr">
                       <a:solidFill>
                         <a:srgbClr val="BDBDBD"/>
@@ -7861,6 +8045,11 @@
                     </a:lnB>
                   </a:tcPr>
                 </a:tc>
+                <a:extLst>
+                  <a:ext uri="{0D108BD9-81ED-4DB2-BD59-A6C34878D82A}">
+                    <a16:rowId xmlns:a16="http://schemas.microsoft.com/office/drawing/2014/main" val="10004"/>
+                  </a:ext>
+                </a:extLst>
               </a:tr>
             </a:tbl>
           </a:graphicData>
@@ -7874,7 +8063,7 @@
         </p:nvSpPr>
         <p:spPr>
           <a:xfrm>
-            <a:off x="15503652" y="22860000"/>
+            <a:off x="15274481" y="19246643"/>
             <a:ext cx="14132052" cy="1371600"/>
           </a:xfrm>
           <a:prstGeom prst="rect">
@@ -7887,11 +8076,11 @@
           <a:bodyPr wrap="square" rtlCol="0" anchor="t"/>
           <a:lstStyle/>
           <a:p>
-            <a:pPr indent="0" marL="0">
+            <a:pPr marL="0" indent="0">
               <a:buNone/>
             </a:pPr>
             <a:r>
-              <a:rPr lang="en-US" sz="1800" b="1" dirty="0">
+              <a:rPr lang="en-US" sz="2000" b="1" dirty="0">
                 <a:solidFill>
                   <a:srgbClr val="616161"/>
                 </a:solidFill>
@@ -7901,11 +8090,8 @@
               </a:rPr>
               <a:t>Note: </a:t>
             </a:r>
-            <a:pPr indent="0" marL="0">
-              <a:buNone/>
-            </a:pPr>
             <a:r>
-              <a:rPr lang="en-US" sz="1800" dirty="0">
+              <a:rPr lang="en-US" sz="2000" dirty="0">
                 <a:solidFill>
                   <a:srgbClr val="212121"/>
                 </a:solidFill>
@@ -7915,11 +8101,8 @@
               </a:rPr>
               <a:t>Vulkan succeeded with num_gpu=0 (no GPU offload). Failures occurred only when num_gpu&gt;=1 (GPU compute path active). </a:t>
             </a:r>
-            <a:pPr indent="0" marL="0">
-              <a:buNone/>
-            </a:pPr>
             <a:r>
-              <a:rPr lang="en-US" sz="1800" dirty="0">
+              <a:rPr lang="en-US" sz="2000" dirty="0">
                 <a:solidFill>
                   <a:srgbClr val="616161"/>
                 </a:solidFill>
@@ -7929,11 +8112,8 @@
               </a:rPr>
               <a:t>ROCm results are within this tested scope (single model, short fixed runs); broader workloads may differ. </a:t>
             </a:r>
-            <a:pPr indent="0" marL="0">
-              <a:buNone/>
-            </a:pPr>
             <a:r>
-              <a:rPr lang="en-US" sz="1800" dirty="0">
+              <a:rPr lang="en-US" sz="2000" dirty="0">
                 <a:solidFill>
                   <a:srgbClr val="212121"/>
                 </a:solidFill>
@@ -7943,11 +8123,8 @@
               </a:rPr>
               <a:t>Model dependency observed: tinyllama succeeded on Vulkan in earlier tests (run_20260307_003423, 20/20 OK); qwen3.5:2b triggers the SIGSEGV. </a:t>
             </a:r>
-            <a:pPr indent="0" marL="0">
-              <a:buNone/>
-            </a:pPr>
             <a:r>
-              <a:rPr lang="en-US" sz="1800" dirty="0">
+              <a:rPr lang="en-US" sz="2000" dirty="0">
                 <a:solidFill>
                   <a:srgbClr val="616161"/>
                 </a:solidFill>
@@ -7957,7 +8134,7 @@
               </a:rPr>
               <a:t>Also: num_gpu=0 runs may produce eval_count=512 with response_chars=0 — this is a model output quirk, not a crash.</a:t>
             </a:r>
-            <a:endParaRPr lang="en-US" sz="1800" dirty="0"/>
+            <a:endParaRPr lang="en-US" sz="2000" dirty="0"/>
           </a:p>
         </p:txBody>
       </p:sp>
@@ -7969,7 +8146,7 @@
         </p:nvSpPr>
         <p:spPr>
           <a:xfrm>
-            <a:off x="15503652" y="24231600"/>
+            <a:off x="15274481" y="20618243"/>
             <a:ext cx="14132052" cy="731520"/>
           </a:xfrm>
           <a:prstGeom prst="rect">
@@ -7982,11 +8159,11 @@
           <a:bodyPr wrap="square" rtlCol="0" anchor="t"/>
           <a:lstStyle/>
           <a:p>
-            <a:pPr indent="0" marL="0">
+            <a:pPr marL="0" indent="0">
               <a:buNone/>
             </a:pPr>
             <a:r>
-              <a:rPr lang="en-US" sz="1800" b="1" dirty="0">
+              <a:rPr lang="en-US" sz="2000" b="1" dirty="0">
                 <a:solidFill>
                   <a:srgbClr val="B71C1C"/>
                 </a:solidFill>
@@ -7996,11 +8173,8 @@
               </a:rPr>
               <a:t>Crash localization: </a:t>
             </a:r>
-            <a:pPr indent="0" marL="0">
-              <a:buNone/>
-            </a:pPr>
             <a:r>
-              <a:rPr lang="en-US" sz="1800" dirty="0">
+              <a:rPr lang="en-US" sz="2000" dirty="0">
                 <a:solidFill>
                   <a:srgbClr val="212121"/>
                 </a:solidFill>
@@ -8010,7 +8184,7 @@
               </a:rPr>
               <a:t>Vulkan SIGSEGV occurred in ggml_backend_sched_graph_compute_async → computeBatch, after model load completed and runner started. This is a compute-phase failure, not an initialization failure.</a:t>
             </a:r>
-            <a:endParaRPr lang="en-US" sz="1800" dirty="0"/>
+            <a:endParaRPr lang="en-US" sz="2000" dirty="0"/>
           </a:p>
         </p:txBody>
       </p:sp>
@@ -8022,7 +8196,7 @@
         </p:nvSpPr>
         <p:spPr>
           <a:xfrm>
-            <a:off x="15320772" y="25146000"/>
+            <a:off x="15091601" y="21532643"/>
             <a:ext cx="14497812" cy="3291840"/>
           </a:xfrm>
           <a:prstGeom prst="rect">
@@ -8033,13 +8207,20 @@
           </a:solidFill>
           <a:ln/>
           <a:effectLst>
-            <a:outerShdw sx="100000" sy="100000" kx="0" ky="0" algn="bl" rotWithShape="0" blurRad="25400" dist="12700" dir="8100000">
+            <a:outerShdw blurRad="25400" dist="12700" dir="8100000" algn="bl" rotWithShape="0">
               <a:srgbClr val="000000">
                 <a:alpha val="8000"/>
               </a:srgbClr>
             </a:outerShdw>
           </a:effectLst>
         </p:spPr>
+        <p:txBody>
+          <a:bodyPr/>
+          <a:lstStyle/>
+          <a:p>
+            <a:endParaRPr lang="ja-JP" altLang="en-US"/>
+          </a:p>
+        </p:txBody>
       </p:sp>
       <p:sp>
         <p:nvSpPr>
@@ -8049,7 +8230,7 @@
         </p:nvSpPr>
         <p:spPr>
           <a:xfrm>
-            <a:off x="15503652" y="25237440"/>
+            <a:off x="15274481" y="21624083"/>
             <a:ext cx="14132052" cy="457200"/>
           </a:xfrm>
           <a:prstGeom prst="rect">
@@ -8062,7 +8243,7 @@
           <a:bodyPr wrap="square" rtlCol="0" anchor="ctr"/>
           <a:lstStyle/>
           <a:p>
-            <a:pPr indent="0" marL="0">
+            <a:pPr marL="0" indent="0">
               <a:buNone/>
             </a:pPr>
             <a:r>
@@ -8082,30 +8263,48 @@
       </p:sp>
       <p:graphicFrame>
         <p:nvGraphicFramePr>
-          <p:cNvPr id="7" name="Table 5"/>
+          <p:cNvPr id="56" name="Table 5"/>
           <p:cNvGraphicFramePr>
             <a:graphicFrameLocks noGrp="1"/>
           </p:cNvGraphicFramePr>
           <p:nvPr>
             <p:extLst>
               <p:ext uri="{D42A27DB-BD31-4B8C-83A1-F6EECF244321}">
-                <p14:modId xmlns:p14="http://schemas.microsoft.com/office/powerpoint/2010/main" val="1579011935"/>
+                <p14:modId xmlns:p14="http://schemas.microsoft.com/office/powerpoint/2010/main" val="3399689225"/>
               </p:ext>
             </p:extLst>
           </p:nvPr>
         </p:nvGraphicFramePr>
         <p:xfrm>
-          <a:off x="15503652" y="25740360"/>
-          <a:ext cx="14132052" cy="914400"/>
+          <a:off x="15274481" y="22127003"/>
+          <a:ext cx="14132052" cy="2499360"/>
         </p:xfrm>
         <a:graphic>
           <a:graphicData uri="http://schemas.openxmlformats.org/drawingml/2006/table">
             <a:tbl>
               <a:tblPr/>
               <a:tblGrid>
-                <a:gridCol w="3109051"/>
-                <a:gridCol w="5652821"/>
-                <a:gridCol w="5370180"/>
+                <a:gridCol w="3109051">
+                  <a:extLst>
+                    <a:ext uri="{9D8B030D-6E8A-4147-A177-3AD203B41FA5}">
+                      <a16:colId xmlns:a16="http://schemas.microsoft.com/office/drawing/2014/main" val="20000"/>
+                    </a:ext>
+                  </a:extLst>
+                </a:gridCol>
+                <a:gridCol w="5652821">
+                  <a:extLst>
+                    <a:ext uri="{9D8B030D-6E8A-4147-A177-3AD203B41FA5}">
+                      <a16:colId xmlns:a16="http://schemas.microsoft.com/office/drawing/2014/main" val="20001"/>
+                    </a:ext>
+                  </a:extLst>
+                </a:gridCol>
+                <a:gridCol w="5370180">
+                  <a:extLst>
+                    <a:ext uri="{9D8B030D-6E8A-4147-A177-3AD203B41FA5}">
+                      <a16:colId xmlns:a16="http://schemas.microsoft.com/office/drawing/2014/main" val="20002"/>
+                    </a:ext>
+                  </a:extLst>
+                </a:gridCol>
               </a:tblGrid>
               <a:tr h="365760">
                 <a:tc>
@@ -8113,7 +8312,7 @@
                     <a:bodyPr/>
                     <a:lstStyle/>
                     <a:p>
-                      <a:pPr indent="0" marL="0">
+                      <a:pPr marL="0" indent="0">
                         <a:buNone/>
                       </a:pPr>
                       <a:r>
@@ -8127,7 +8326,7 @@
                       <a:endParaRPr lang="en-US" sz="2000" dirty="0"/>
                     </a:p>
                   </a:txBody>
-                  <a:tcPr marL="91440" marR="91440" marT="45720" marB="45720">
+                  <a:tcPr>
                     <a:lnL w="12700" cap="flat" cmpd="sng" algn="ctr">
                       <a:solidFill>
                         <a:srgbClr val="BDBDBD"/>
@@ -8174,7 +8373,7 @@
                     <a:bodyPr/>
                     <a:lstStyle/>
                     <a:p>
-                      <a:pPr indent="0" marL="0">
+                      <a:pPr marL="0" indent="0">
                         <a:buNone/>
                       </a:pPr>
                       <a:r>
@@ -8188,7 +8387,7 @@
                       <a:endParaRPr lang="en-US" sz="2000" dirty="0"/>
                     </a:p>
                   </a:txBody>
-                  <a:tcPr marL="91440" marR="91440" marT="45720" marB="45720">
+                  <a:tcPr>
                     <a:lnL w="12700" cap="flat" cmpd="sng" algn="ctr">
                       <a:solidFill>
                         <a:srgbClr val="BDBDBD"/>
@@ -8235,7 +8434,7 @@
                     <a:bodyPr/>
                     <a:lstStyle/>
                     <a:p>
-                      <a:pPr indent="0" marL="0">
+                      <a:pPr marL="0" indent="0">
                         <a:buNone/>
                       </a:pPr>
                       <a:r>
@@ -8249,7 +8448,7 @@
                       <a:endParaRPr lang="en-US" sz="2000" dirty="0"/>
                     </a:p>
                   </a:txBody>
-                  <a:tcPr marL="91440" marR="91440" marT="45720" marB="45720">
+                  <a:tcPr>
                     <a:lnL w="12700" cap="flat" cmpd="sng" algn="ctr">
                       <a:solidFill>
                         <a:srgbClr val="BDBDBD"/>
@@ -8291,6 +8490,11 @@
                     </a:solidFill>
                   </a:tcPr>
                 </a:tc>
+                <a:extLst>
+                  <a:ext uri="{0D108BD9-81ED-4DB2-BD59-A6C34878D82A}">
+                    <a16:rowId xmlns:a16="http://schemas.microsoft.com/office/drawing/2014/main" val="10000"/>
+                  </a:ext>
+                </a:extLst>
               </a:tr>
               <a:tr h="594360">
                 <a:tc>
@@ -8298,7 +8502,7 @@
                     <a:bodyPr/>
                     <a:lstStyle/>
                     <a:p>
-                      <a:pPr indent="0" marL="0">
+                      <a:pPr marL="0" indent="0">
                         <a:buNone/>
                       </a:pPr>
                       <a:r>
@@ -8312,7 +8516,7 @@
                       <a:endParaRPr lang="en-US" sz="2000" dirty="0"/>
                     </a:p>
                     <a:p>
-                      <a:pPr indent="0" marL="0">
+                      <a:pPr marL="0" indent="0">
                         <a:buNone/>
                       </a:pPr>
                       <a:r>
@@ -8326,7 +8530,7 @@
                       <a:endParaRPr lang="en-US" sz="2000" dirty="0"/>
                     </a:p>
                   </a:txBody>
-                  <a:tcPr marL="91440" marR="91440" marT="45720" marB="45720">
+                  <a:tcPr>
                     <a:lnL w="12700" cap="flat" cmpd="sng" algn="ctr">
                       <a:solidFill>
                         <a:srgbClr val="BDBDBD"/>
@@ -8370,7 +8574,7 @@
                     <a:bodyPr/>
                     <a:lstStyle/>
                     <a:p>
-                      <a:pPr indent="0" marL="0">
+                      <a:pPr marL="0" indent="0">
                         <a:buNone/>
                       </a:pPr>
                       <a:r>
@@ -8384,7 +8588,7 @@
                       <a:endParaRPr lang="en-US" sz="2000" dirty="0"/>
                     </a:p>
                   </a:txBody>
-                  <a:tcPr marL="91440" marR="91440" marT="45720" marB="45720">
+                  <a:tcPr>
                     <a:lnL w="12700" cap="flat" cmpd="sng" algn="ctr">
                       <a:solidFill>
                         <a:srgbClr val="BDBDBD"/>
@@ -8428,7 +8632,7 @@
                     <a:bodyPr/>
                     <a:lstStyle/>
                     <a:p>
-                      <a:pPr indent="0" marL="0">
+                      <a:pPr marL="0" indent="0">
                         <a:buNone/>
                       </a:pPr>
                       <a:r>
@@ -8442,7 +8646,7 @@
                       <a:endParaRPr lang="en-US" sz="2000" dirty="0"/>
                     </a:p>
                     <a:p>
-                      <a:pPr indent="0" marL="0">
+                      <a:pPr marL="0" indent="0">
                         <a:buNone/>
                       </a:pPr>
                       <a:r>
@@ -8456,7 +8660,7 @@
                       <a:endParaRPr lang="en-US" sz="2000" dirty="0"/>
                     </a:p>
                   </a:txBody>
-                  <a:tcPr marL="91440" marR="91440" marT="45720" marB="45720">
+                  <a:tcPr>
                     <a:lnL w="12700" cap="flat" cmpd="sng" algn="ctr">
                       <a:solidFill>
                         <a:srgbClr val="BDBDBD"/>
@@ -8495,6 +8699,11 @@
                     </a:lnB>
                   </a:tcPr>
                 </a:tc>
+                <a:extLst>
+                  <a:ext uri="{0D108BD9-81ED-4DB2-BD59-A6C34878D82A}">
+                    <a16:rowId xmlns:a16="http://schemas.microsoft.com/office/drawing/2014/main" val="10001"/>
+                  </a:ext>
+                </a:extLst>
               </a:tr>
               <a:tr h="594360">
                 <a:tc>
@@ -8502,7 +8711,7 @@
                     <a:bodyPr/>
                     <a:lstStyle/>
                     <a:p>
-                      <a:pPr indent="0" marL="0">
+                      <a:pPr marL="0" indent="0">
                         <a:buNone/>
                       </a:pPr>
                       <a:r>
@@ -8516,7 +8725,7 @@
                       <a:endParaRPr lang="en-US" sz="2000" dirty="0"/>
                     </a:p>
                     <a:p>
-                      <a:pPr indent="0" marL="0">
+                      <a:pPr marL="0" indent="0">
                         <a:buNone/>
                       </a:pPr>
                       <a:r>
@@ -8530,7 +8739,7 @@
                       <a:endParaRPr lang="en-US" sz="2000" dirty="0"/>
                     </a:p>
                   </a:txBody>
-                  <a:tcPr marL="91440" marR="91440" marT="45720" marB="45720">
+                  <a:tcPr>
                     <a:lnL w="12700" cap="flat" cmpd="sng" algn="ctr">
                       <a:solidFill>
                         <a:srgbClr val="BDBDBD"/>
@@ -8574,7 +8783,7 @@
                     <a:bodyPr/>
                     <a:lstStyle/>
                     <a:p>
-                      <a:pPr indent="0" marL="0">
+                      <a:pPr marL="0" indent="0">
                         <a:buNone/>
                       </a:pPr>
                       <a:r>
@@ -8588,7 +8797,7 @@
                       <a:endParaRPr lang="en-US" sz="2000" dirty="0"/>
                     </a:p>
                   </a:txBody>
-                  <a:tcPr marL="91440" marR="91440" marT="45720" marB="45720">
+                  <a:tcPr>
                     <a:lnL w="12700" cap="flat" cmpd="sng" algn="ctr">
                       <a:solidFill>
                         <a:srgbClr val="BDBDBD"/>
@@ -8632,7 +8841,7 @@
                     <a:bodyPr/>
                     <a:lstStyle/>
                     <a:p>
-                      <a:pPr indent="0" marL="0">
+                      <a:pPr marL="0" indent="0">
                         <a:buNone/>
                       </a:pPr>
                       <a:r>
@@ -8646,7 +8855,7 @@
                       <a:endParaRPr lang="en-US" sz="2000" dirty="0"/>
                     </a:p>
                     <a:p>
-                      <a:pPr indent="0" marL="0">
+                      <a:pPr marL="0" indent="0">
                         <a:buNone/>
                       </a:pPr>
                       <a:r>
@@ -8660,7 +8869,7 @@
                       <a:endParaRPr lang="en-US" sz="2000" dirty="0"/>
                     </a:p>
                   </a:txBody>
-                  <a:tcPr marL="91440" marR="91440" marT="45720" marB="45720">
+                  <a:tcPr>
                     <a:lnL w="12700" cap="flat" cmpd="sng" algn="ctr">
                       <a:solidFill>
                         <a:srgbClr val="BDBDBD"/>
@@ -8699,6 +8908,11 @@
                     </a:lnB>
                   </a:tcPr>
                 </a:tc>
+                <a:extLst>
+                  <a:ext uri="{0D108BD9-81ED-4DB2-BD59-A6C34878D82A}">
+                    <a16:rowId xmlns:a16="http://schemas.microsoft.com/office/drawing/2014/main" val="10002"/>
+                  </a:ext>
+                </a:extLst>
               </a:tr>
               <a:tr h="594360">
                 <a:tc>
@@ -8706,7 +8920,7 @@
                     <a:bodyPr/>
                     <a:lstStyle/>
                     <a:p>
-                      <a:pPr indent="0" marL="0">
+                      <a:pPr marL="0" indent="0">
                         <a:buNone/>
                       </a:pPr>
                       <a:r>
@@ -8720,7 +8934,7 @@
                       <a:endParaRPr lang="en-US" sz="2000" dirty="0"/>
                     </a:p>
                     <a:p>
-                      <a:pPr indent="0" marL="0">
+                      <a:pPr marL="0" indent="0">
                         <a:buNone/>
                       </a:pPr>
                       <a:r>
@@ -8734,7 +8948,7 @@
                       <a:endParaRPr lang="en-US" sz="2000" dirty="0"/>
                     </a:p>
                   </a:txBody>
-                  <a:tcPr marL="91440" marR="91440" marT="45720" marB="45720">
+                  <a:tcPr>
                     <a:lnL w="12700" cap="flat" cmpd="sng" algn="ctr">
                       <a:solidFill>
                         <a:srgbClr val="BDBDBD"/>
@@ -8778,7 +8992,7 @@
                     <a:bodyPr/>
                     <a:lstStyle/>
                     <a:p>
-                      <a:pPr indent="0" marL="0">
+                      <a:pPr marL="0" indent="0">
                         <a:buNone/>
                       </a:pPr>
                       <a:r>
@@ -8792,7 +9006,7 @@
                       <a:endParaRPr lang="en-US" sz="2000" dirty="0"/>
                     </a:p>
                     <a:p>
-                      <a:pPr indent="0" marL="0">
+                      <a:pPr marL="0" indent="0">
                         <a:buNone/>
                       </a:pPr>
                       <a:r>
@@ -8806,7 +9020,7 @@
                       <a:endParaRPr lang="en-US" sz="2000" dirty="0"/>
                     </a:p>
                   </a:txBody>
-                  <a:tcPr marL="91440" marR="91440" marT="45720" marB="45720">
+                  <a:tcPr>
                     <a:lnL w="12700" cap="flat" cmpd="sng" algn="ctr">
                       <a:solidFill>
                         <a:srgbClr val="BDBDBD"/>
@@ -8850,7 +9064,7 @@
                     <a:bodyPr/>
                     <a:lstStyle/>
                     <a:p>
-                      <a:pPr indent="0" marL="0">
+                      <a:pPr marL="0" indent="0">
                         <a:buNone/>
                       </a:pPr>
                       <a:r>
@@ -8864,7 +9078,7 @@
                       <a:endParaRPr lang="en-US" sz="2200" dirty="0"/>
                     </a:p>
                   </a:txBody>
-                  <a:tcPr marL="91440" marR="91440" marT="45720" marB="45720">
+                  <a:tcPr>
                     <a:lnL w="12700" cap="flat" cmpd="sng" algn="ctr">
                       <a:solidFill>
                         <a:srgbClr val="BDBDBD"/>
@@ -8903,6 +9117,11 @@
                     </a:lnB>
                   </a:tcPr>
                 </a:tc>
+                <a:extLst>
+                  <a:ext uri="{0D108BD9-81ED-4DB2-BD59-A6C34878D82A}">
+                    <a16:rowId xmlns:a16="http://schemas.microsoft.com/office/drawing/2014/main" val="10003"/>
+                  </a:ext>
+                </a:extLst>
               </a:tr>
             </a:tbl>
           </a:graphicData>
@@ -8916,7 +9135,7 @@
         </p:nvSpPr>
         <p:spPr>
           <a:xfrm>
-            <a:off x="15320772" y="28620720"/>
+            <a:off x="15091601" y="25007363"/>
             <a:ext cx="14497812" cy="2377440"/>
           </a:xfrm>
           <a:prstGeom prst="rect">
@@ -8927,13 +9146,20 @@
           </a:solidFill>
           <a:ln/>
           <a:effectLst>
-            <a:outerShdw sx="100000" sy="100000" kx="0" ky="0" algn="bl" rotWithShape="0" blurRad="25400" dist="12700" dir="8100000">
+            <a:outerShdw blurRad="25400" dist="12700" dir="8100000" algn="bl" rotWithShape="0">
               <a:srgbClr val="000000">
                 <a:alpha val="8000"/>
               </a:srgbClr>
             </a:outerShdw>
           </a:effectLst>
         </p:spPr>
+        <p:txBody>
+          <a:bodyPr/>
+          <a:lstStyle/>
+          <a:p>
+            <a:endParaRPr lang="ja-JP" altLang="en-US"/>
+          </a:p>
+        </p:txBody>
       </p:sp>
       <p:sp>
         <p:nvSpPr>
@@ -8943,7 +9169,7 @@
         </p:nvSpPr>
         <p:spPr>
           <a:xfrm>
-            <a:off x="15503652" y="28712160"/>
+            <a:off x="15274481" y="25098803"/>
             <a:ext cx="14132052" cy="457200"/>
           </a:xfrm>
           <a:prstGeom prst="rect">
@@ -8956,7 +9182,7 @@
           <a:bodyPr wrap="square" rtlCol="0" anchor="ctr"/>
           <a:lstStyle/>
           <a:p>
-            <a:pPr indent="0" marL="0">
+            <a:pPr marL="0" indent="0">
               <a:buNone/>
             </a:pPr>
             <a:r>
@@ -8982,7 +9208,7 @@
         </p:nvSpPr>
         <p:spPr>
           <a:xfrm>
-            <a:off x="15503652" y="29215080"/>
+            <a:off x="15274481" y="25601723"/>
             <a:ext cx="14132052" cy="1645920"/>
           </a:xfrm>
           <a:prstGeom prst="rect">
@@ -8995,7 +9221,7 @@
           <a:bodyPr wrap="square" lIns="635" tIns="1905" rIns="1905" bIns="635" rtlCol="0" anchor="t"/>
           <a:lstStyle/>
           <a:p>
-            <a:pPr indent="0" marL="0">
+            <a:pPr marL="0" indent="0">
               <a:buNone/>
             </a:pPr>
             <a:r>
@@ -9007,29 +9233,12 @@
                 <a:ea typeface="Calibri" pitchFamily="34" charset="-122"/>
                 <a:cs typeface="Calibri" pitchFamily="34" charset="-120"/>
               </a:rPr>
-              <a:t>ROCm changelog says "no longer built by default" rather than "forbidden." </a:t>
+              <a:t>ROCm changelog says "no longer built by default" rather than "forbidden." In the local install, gfx900 hsaco artifacts and libggml-hip.so strings were verified present. </a:t>
             </a:r>
-            <a:pPr indent="0" marL="0">
-              <a:buNone/>
-            </a:pPr>
-            <a:r>
-              <a:rPr lang="en-US" sz="2000" dirty="0">
-                <a:solidFill>
-                  <a:srgbClr val="212121"/>
-                </a:solidFill>
-                <a:latin typeface="Calibri" pitchFamily="34" charset="0"/>
-                <a:ea typeface="Calibri" pitchFamily="34" charset="-122"/>
-                <a:cs typeface="Calibri" pitchFamily="34" charset="-120"/>
-              </a:rPr>
-              <a:t>In the local install, gfx900 hsaco artifacts and libggml-hip.so strings were verified present. </a:t>
-            </a:r>
-            <a:pPr indent="0" marL="0">
-              <a:buNone/>
-            </a:pPr>
             <a:endParaRPr lang="en-US" sz="2000" dirty="0"/>
           </a:p>
           <a:p>
-            <a:pPr indent="0" marL="0">
+            <a:pPr marL="0" indent="0">
               <a:buNone/>
             </a:pPr>
             <a:r>
@@ -9046,7 +9255,7 @@
             <a:endParaRPr lang="en-US" sz="2000" dirty="0"/>
           </a:p>
           <a:p>
-            <a:pPr indent="0" marL="0">
+            <a:pPr marL="0" indent="0">
               <a:buNone/>
             </a:pPr>
             <a:r>
@@ -9072,8 +9281,8 @@
         </p:nvSpPr>
         <p:spPr>
           <a:xfrm>
-            <a:off x="15320772" y="31181040"/>
-            <a:ext cx="14497812" cy="2377440"/>
+            <a:off x="15091601" y="27567682"/>
+            <a:ext cx="14497812" cy="2778205"/>
           </a:xfrm>
           <a:prstGeom prst="rect">
             <a:avLst/>
@@ -9083,13 +9292,20 @@
           </a:solidFill>
           <a:ln/>
           <a:effectLst>
-            <a:outerShdw sx="100000" sy="100000" kx="0" ky="0" algn="bl" rotWithShape="0" blurRad="25400" dist="12700" dir="8100000">
+            <a:outerShdw blurRad="25400" dist="12700" dir="8100000" algn="bl" rotWithShape="0">
               <a:srgbClr val="000000">
                 <a:alpha val="8000"/>
               </a:srgbClr>
             </a:outerShdw>
           </a:effectLst>
         </p:spPr>
+        <p:txBody>
+          <a:bodyPr/>
+          <a:lstStyle/>
+          <a:p>
+            <a:endParaRPr lang="ja-JP" altLang="en-US"/>
+          </a:p>
+        </p:txBody>
       </p:sp>
       <p:sp>
         <p:nvSpPr>
@@ -9099,7 +9315,7 @@
         </p:nvSpPr>
         <p:spPr>
           <a:xfrm>
-            <a:off x="15503652" y="31272480"/>
+            <a:off x="15274481" y="27659123"/>
             <a:ext cx="14132052" cy="411480"/>
           </a:xfrm>
           <a:prstGeom prst="rect">
@@ -9112,7 +9328,7 @@
           <a:bodyPr wrap="square" rtlCol="0" anchor="ctr"/>
           <a:lstStyle/>
           <a:p>
-            <a:pPr indent="0" marL="0">
+            <a:pPr marL="0" indent="0">
               <a:buNone/>
             </a:pPr>
             <a:r>
@@ -9138,8 +9354,8 @@
         </p:nvSpPr>
         <p:spPr>
           <a:xfrm>
-            <a:off x="15503652" y="31683960"/>
-            <a:ext cx="14132052" cy="1737360"/>
+            <a:off x="15274481" y="28070602"/>
+            <a:ext cx="14132052" cy="2778205"/>
           </a:xfrm>
           <a:prstGeom prst="rect">
             <a:avLst/>
@@ -9151,11 +9367,11 @@
           <a:bodyPr wrap="square" lIns="635" tIns="1905" rIns="1905" bIns="635" rtlCol="0" anchor="t"/>
           <a:lstStyle/>
           <a:p>
-            <a:pPr indent="0" marL="0">
+            <a:pPr marL="0" indent="0">
               <a:buNone/>
             </a:pPr>
             <a:r>
-              <a:rPr lang="en-US" sz="1800" b="1" dirty="0">
+              <a:rPr lang="en-US" sz="2000" b="1" dirty="0">
                 <a:solidFill>
                   <a:srgbClr val="B71C1C"/>
                 </a:solidFill>
@@ -9165,11 +9381,8 @@
               </a:rPr>
               <a:t>Limitations: </a:t>
             </a:r>
-            <a:pPr indent="0" marL="0">
-              <a:buNone/>
-            </a:pPr>
             <a:r>
-              <a:rPr lang="en-US" sz="1800" dirty="0">
+              <a:rPr lang="en-US" sz="2000" dirty="0">
                 <a:solidFill>
                   <a:srgbClr val="212121"/>
                 </a:solidFill>
@@ -9179,23 +9392,20 @@
               </a:rPr>
               <a:t>Matched comparison used short fixed runs (1 epoch, 512 tokens) with a single model (qwen3.5:2b). Vulkan and ROCm Ollama versions differ (0.17.4 vs 0.17.5). tinyllama behaved differently from qwen3.5 on Vulkan, indicating model-dependent failure conditions. Results should not be generalized beyond this tested scope without further verification.</a:t>
             </a:r>
-            <a:pPr indent="0" marL="0">
+            <a:endParaRPr lang="en-US" sz="2000" dirty="0"/>
+          </a:p>
+          <a:p>
+            <a:pPr marL="0" indent="0">
               <a:buNone/>
             </a:pPr>
-            <a:endParaRPr lang="en-US" sz="1800" dirty="0"/>
+            <a:endParaRPr lang="en-US" sz="2000" dirty="0"/>
           </a:p>
           <a:p>
-            <a:pPr indent="0" marL="0">
-              <a:buNone/>
-            </a:pPr>
-            <a:endParaRPr lang="en-US" sz="1800" dirty="0"/>
-          </a:p>
-          <a:p>
-            <a:pPr indent="0" marL="0">
+            <a:pPr marL="0" indent="0">
               <a:buNone/>
             </a:pPr>
             <a:r>
-              <a:rPr lang="en-US" sz="1800" b="1" dirty="0">
+              <a:rPr lang="en-US" sz="2000" b="1" dirty="0">
                 <a:solidFill>
                   <a:srgbClr val="0D47A1"/>
                 </a:solidFill>
@@ -9205,14 +9415,14 @@
               </a:rPr>
               <a:t>Future work: </a:t>
             </a:r>
-            <a:endParaRPr lang="en-US" sz="1800" dirty="0"/>
+            <a:endParaRPr lang="en-US" sz="2000" dirty="0"/>
           </a:p>
           <a:p>
-            <a:pPr indent="0" marL="0">
+            <a:pPr marL="0" indent="0">
               <a:buNone/>
             </a:pPr>
             <a:r>
-              <a:rPr lang="en-US" sz="1800" dirty="0">
+              <a:rPr lang="en-US" sz="2000" dirty="0">
                 <a:solidFill>
                   <a:srgbClr val="212121"/>
                 </a:solidFill>
@@ -9222,7 +9432,7 @@
               </a:rPr>
               <a:t>Multi-epoch stress tests, additional models (llm-jp, phi-3), ROCm version comparison (6.x vs 7.x), and GGML_CUDA_NO_PEER_COPY experiments to isolate offload-path failure mechanisms. Reproducibility infrastructure (workaround matrix with 15 documented cases) is available in the repo for community use.</a:t>
             </a:r>
-            <a:endParaRPr lang="en-US" sz="1800" dirty="0"/>
+            <a:endParaRPr lang="en-US" sz="2000" dirty="0"/>
           </a:p>
         </p:txBody>
       </p:sp>
@@ -9245,13 +9455,20 @@
           </a:solidFill>
           <a:ln/>
           <a:effectLst>
-            <a:outerShdw sx="100000" sy="100000" kx="0" ky="0" algn="bl" rotWithShape="0" blurRad="25400" dist="12700" dir="8100000">
+            <a:outerShdw blurRad="25400" dist="12700" dir="8100000" algn="bl" rotWithShape="0">
               <a:srgbClr val="000000">
                 <a:alpha val="8000"/>
               </a:srgbClr>
             </a:outerShdw>
           </a:effectLst>
         </p:spPr>
+        <p:txBody>
+          <a:bodyPr/>
+          <a:lstStyle/>
+          <a:p>
+            <a:endParaRPr lang="ja-JP" altLang="en-US"/>
+          </a:p>
+        </p:txBody>
       </p:sp>
       <p:sp>
         <p:nvSpPr>
@@ -9272,6 +9489,13 @@
           </a:solidFill>
           <a:ln/>
         </p:spPr>
+        <p:txBody>
+          <a:bodyPr/>
+          <a:lstStyle/>
+          <a:p>
+            <a:endParaRPr lang="ja-JP" altLang="en-US"/>
+          </a:p>
+        </p:txBody>
       </p:sp>
       <p:sp>
         <p:nvSpPr>
@@ -9294,7 +9518,7 @@
           <a:bodyPr wrap="square" rtlCol="0" anchor="ctr"/>
           <a:lstStyle/>
           <a:p>
-            <a:pPr algn="ctr" indent="0" marL="0">
+            <a:pPr marL="0" indent="0" algn="ctr">
               <a:buNone/>
             </a:pPr>
             <a:r>
@@ -9333,7 +9557,7 @@
           <a:bodyPr wrap="square" lIns="0" tIns="0" rIns="0" bIns="0" rtlCol="0" anchor="ctr"/>
           <a:lstStyle/>
           <a:p>
-            <a:pPr indent="0" marL="0">
+            <a:pPr marL="0" indent="0">
               <a:buNone/>
             </a:pPr>
             <a:r>
@@ -9370,13 +9594,20 @@
           </a:solidFill>
           <a:ln/>
           <a:effectLst>
-            <a:outerShdw sx="100000" sy="100000" kx="0" ky="0" algn="bl" rotWithShape="0" blurRad="25400" dist="12700" dir="8100000">
+            <a:outerShdw blurRad="25400" dist="12700" dir="8100000" algn="bl" rotWithShape="0">
               <a:srgbClr val="000000">
                 <a:alpha val="8000"/>
               </a:srgbClr>
             </a:outerShdw>
           </a:effectLst>
         </p:spPr>
+        <p:txBody>
+          <a:bodyPr/>
+          <a:lstStyle/>
+          <a:p>
+            <a:endParaRPr lang="ja-JP" altLang="en-US"/>
+          </a:p>
+        </p:txBody>
       </p:sp>
       <p:sp>
         <p:nvSpPr>
@@ -9397,6 +9628,13 @@
           </a:solidFill>
           <a:ln/>
         </p:spPr>
+        <p:txBody>
+          <a:bodyPr/>
+          <a:lstStyle/>
+          <a:p>
+            <a:endParaRPr lang="ja-JP" altLang="en-US"/>
+          </a:p>
+        </p:txBody>
       </p:sp>
       <p:sp>
         <p:nvSpPr>
@@ -9419,7 +9657,7 @@
           <a:bodyPr wrap="square" rtlCol="0" anchor="ctr"/>
           <a:lstStyle/>
           <a:p>
-            <a:pPr indent="0" marL="0">
+            <a:pPr marL="0" indent="0">
               <a:buNone/>
             </a:pPr>
             <a:r>
@@ -9455,7 +9693,7 @@
           <a:bodyPr wrap="square" rtlCol="0" anchor="ctr"/>
           <a:lstStyle/>
           <a:p>
-            <a:pPr indent="0" marL="0">
+            <a:pPr marL="0" indent="0">
               <a:buNone/>
             </a:pPr>
             <a:r>
@@ -9494,7 +9732,7 @@
           <a:bodyPr wrap="square" rtlCol="0" anchor="t"/>
           <a:lstStyle/>
           <a:p>
-            <a:pPr indent="0" marL="0">
+            <a:pPr marL="0" indent="0">
               <a:buNone/>
             </a:pPr>
             <a:r>
@@ -9531,13 +9769,20 @@
           </a:solidFill>
           <a:ln/>
           <a:effectLst>
-            <a:outerShdw sx="100000" sy="100000" kx="0" ky="0" algn="bl" rotWithShape="0" blurRad="25400" dist="12700" dir="8100000">
+            <a:outerShdw blurRad="25400" dist="12700" dir="8100000" algn="bl" rotWithShape="0">
               <a:srgbClr val="000000">
                 <a:alpha val="8000"/>
               </a:srgbClr>
             </a:outerShdw>
           </a:effectLst>
         </p:spPr>
+        <p:txBody>
+          <a:bodyPr/>
+          <a:lstStyle/>
+          <a:p>
+            <a:endParaRPr lang="ja-JP" altLang="en-US"/>
+          </a:p>
+        </p:txBody>
       </p:sp>
       <p:sp>
         <p:nvSpPr>
@@ -9558,6 +9803,13 @@
           </a:solidFill>
           <a:ln/>
         </p:spPr>
+        <p:txBody>
+          <a:bodyPr/>
+          <a:lstStyle/>
+          <a:p>
+            <a:endParaRPr lang="ja-JP" altLang="en-US"/>
+          </a:p>
+        </p:txBody>
       </p:sp>
       <p:sp>
         <p:nvSpPr>
@@ -9580,7 +9832,7 @@
           <a:bodyPr wrap="square" rtlCol="0" anchor="ctr"/>
           <a:lstStyle/>
           <a:p>
-            <a:pPr indent="0" marL="0">
+            <a:pPr marL="0" indent="0">
               <a:buNone/>
             </a:pPr>
             <a:r>
@@ -9616,7 +9868,7 @@
           <a:bodyPr wrap="square" rtlCol="0" anchor="ctr"/>
           <a:lstStyle/>
           <a:p>
-            <a:pPr indent="0" marL="0">
+            <a:pPr marL="0" indent="0">
               <a:buNone/>
             </a:pPr>
             <a:r>
@@ -9624,7 +9876,7 @@
                 <a:solidFill>
                   <a:srgbClr val="0D47A1"/>
                 </a:solidFill>
-                <a:latin typeface="Arial" pitchFamily="34" charset="0"/>
+                <a:latin typeface="Arial" panose="020B0604020202020204" pitchFamily="34" charset="0"/>
                 <a:ea typeface="Arial" pitchFamily="34" charset="-122"/>
                 <a:cs typeface="Arial" pitchFamily="34" charset="-120"/>
               </a:rPr>
@@ -9655,7 +9907,7 @@
           <a:bodyPr wrap="square" rtlCol="0" anchor="t"/>
           <a:lstStyle/>
           <a:p>
-            <a:pPr indent="0" marL="0">
+            <a:pPr marL="0" indent="0">
               <a:buNone/>
             </a:pPr>
             <a:r>
@@ -9692,13 +9944,20 @@
           </a:solidFill>
           <a:ln/>
           <a:effectLst>
-            <a:outerShdw sx="100000" sy="100000" kx="0" ky="0" algn="bl" rotWithShape="0" blurRad="25400" dist="12700" dir="8100000">
+            <a:outerShdw blurRad="25400" dist="12700" dir="8100000" algn="bl" rotWithShape="0">
               <a:srgbClr val="000000">
                 <a:alpha val="8000"/>
               </a:srgbClr>
             </a:outerShdw>
           </a:effectLst>
         </p:spPr>
+        <p:txBody>
+          <a:bodyPr/>
+          <a:lstStyle/>
+          <a:p>
+            <a:endParaRPr lang="ja-JP" altLang="en-US"/>
+          </a:p>
+        </p:txBody>
       </p:sp>
       <p:sp>
         <p:nvSpPr>
@@ -9719,6 +9978,13 @@
           </a:solidFill>
           <a:ln/>
         </p:spPr>
+        <p:txBody>
+          <a:bodyPr/>
+          <a:lstStyle/>
+          <a:p>
+            <a:endParaRPr lang="ja-JP" altLang="en-US"/>
+          </a:p>
+        </p:txBody>
       </p:sp>
       <p:sp>
         <p:nvSpPr>
@@ -9741,7 +10007,7 @@
           <a:bodyPr wrap="square" rtlCol="0" anchor="ctr"/>
           <a:lstStyle/>
           <a:p>
-            <a:pPr indent="0" marL="0">
+            <a:pPr marL="0" indent="0">
               <a:buNone/>
             </a:pPr>
             <a:r>
@@ -9777,7 +10043,7 @@
           <a:bodyPr wrap="square" rtlCol="0" anchor="ctr"/>
           <a:lstStyle/>
           <a:p>
-            <a:pPr indent="0" marL="0">
+            <a:pPr marL="0" indent="0">
               <a:buNone/>
             </a:pPr>
             <a:r>
@@ -9816,7 +10082,7 @@
           <a:bodyPr wrap="square" rtlCol="0" anchor="t"/>
           <a:lstStyle/>
           <a:p>
-            <a:pPr indent="0" marL="0">
+            <a:pPr marL="0" indent="0">
               <a:buNone/>
             </a:pPr>
             <a:r>
@@ -9842,7 +10108,7 @@
         </p:nvSpPr>
         <p:spPr>
           <a:xfrm>
-            <a:off x="457200" y="42162984"/>
+            <a:off x="365760" y="41548858"/>
             <a:ext cx="29361384" cy="457200"/>
           </a:xfrm>
           <a:prstGeom prst="rect">
@@ -9855,11 +10121,11 @@
           <a:bodyPr wrap="square" rtlCol="0" anchor="ctr"/>
           <a:lstStyle/>
           <a:p>
-            <a:pPr algn="ctr" indent="0" marL="0">
+            <a:pPr marL="0" indent="0" algn="ctr">
               <a:buNone/>
             </a:pPr>
             <a:r>
-              <a:rPr lang="en-US" sz="2400" i="1" dirty="0">
+              <a:rPr lang="en-US" sz="3600" b="1" i="1" dirty="0">
                 <a:solidFill>
                   <a:srgbClr val="616161"/>
                 </a:solidFill>
@@ -9867,9 +10133,9 @@
                 <a:ea typeface="Calibri" pitchFamily="34" charset="-122"/>
                 <a:cs typeface="Calibri" pitchFamily="34" charset="-120"/>
               </a:rPr>
-              <a:t>Unsupported ≠ Impossible.  |  Legacy ≠ Poor.  |  Backend choice matters.  |  Audit: audit-log.md</a:t>
+              <a:t>Unsupported ≠ Impossible.  |  Legacy ≠ Poor.  |  Backend choice matters.</a:t>
             </a:r>
-            <a:endParaRPr lang="en-US" sz="2400" dirty="0"/>
+            <a:endParaRPr lang="en-US" sz="3600" b="1" dirty="0"/>
           </a:p>
         </p:txBody>
       </p:sp>
@@ -10174,4 +10440,319 @@
     </a:ext>
   </a:extLst>
 </a:theme>
+</file>
+
+<file path=ppt/theme/theme2.xml><?xml version="1.0" encoding="utf-8"?>
+<a:theme xmlns:a="http://schemas.openxmlformats.org/drawingml/2006/main" name="Office テーマ">
+  <a:themeElements>
+    <a:clrScheme name="Office">
+      <a:dk1>
+        <a:sysClr val="windowText" lastClr="000000"/>
+      </a:dk1>
+      <a:lt1>
+        <a:sysClr val="window" lastClr="FFFFFF"/>
+      </a:lt1>
+      <a:dk2>
+        <a:srgbClr val="0E2841"/>
+      </a:dk2>
+      <a:lt2>
+        <a:srgbClr val="E8E8E8"/>
+      </a:lt2>
+      <a:accent1>
+        <a:srgbClr val="156082"/>
+      </a:accent1>
+      <a:accent2>
+        <a:srgbClr val="E97132"/>
+      </a:accent2>
+      <a:accent3>
+        <a:srgbClr val="196B24"/>
+      </a:accent3>
+      <a:accent4>
+        <a:srgbClr val="0F9ED5"/>
+      </a:accent4>
+      <a:accent5>
+        <a:srgbClr val="A02B93"/>
+      </a:accent5>
+      <a:accent6>
+        <a:srgbClr val="4EA72E"/>
+      </a:accent6>
+      <a:hlink>
+        <a:srgbClr val="467886"/>
+      </a:hlink>
+      <a:folHlink>
+        <a:srgbClr val="96607D"/>
+      </a:folHlink>
+    </a:clrScheme>
+    <a:fontScheme name="Office">
+      <a:majorFont>
+        <a:latin typeface="游ゴシック Light" panose="02110004020202020204"/>
+        <a:ea typeface=""/>
+        <a:cs typeface=""/>
+        <a:font script="Jpan" typeface="游ゴシック Light"/>
+        <a:font script="Hang" typeface="맑은 고딕"/>
+        <a:font script="Hans" typeface="等线 Light"/>
+        <a:font script="Hant" typeface="新細明體"/>
+        <a:font script="Arab" typeface="Times New Roman"/>
+        <a:font script="Hebr" typeface="Times New Roman"/>
+        <a:font script="Thai" typeface="Angsana New"/>
+        <a:font script="Ethi" typeface="Nyala"/>
+        <a:font script="Beng" typeface="Vrinda"/>
+        <a:font script="Gujr" typeface="Shruti"/>
+        <a:font script="Khmr" typeface="MoolBoran"/>
+        <a:font script="Knda" typeface="Tunga"/>
+        <a:font script="Guru" typeface="Raavi"/>
+        <a:font script="Cans" typeface="Euphemia"/>
+        <a:font script="Cher" typeface="Plantagenet Cherokee"/>
+        <a:font script="Yiii" typeface="Microsoft Yi Baiti"/>
+        <a:font script="Tibt" typeface="Microsoft Himalaya"/>
+        <a:font script="Thaa" typeface="MV Boli"/>
+        <a:font script="Deva" typeface="Mangal"/>
+        <a:font script="Telu" typeface="Gautami"/>
+        <a:font script="Taml" typeface="Latha"/>
+        <a:font script="Syrc" typeface="Estrangelo Edessa"/>
+        <a:font script="Orya" typeface="Kalinga"/>
+        <a:font script="Mlym" typeface="Kartika"/>
+        <a:font script="Laoo" typeface="DokChampa"/>
+        <a:font script="Sinh" typeface="Iskoola Pota"/>
+        <a:font script="Mong" typeface="Mongolian Baiti"/>
+        <a:font script="Viet" typeface="Times New Roman"/>
+        <a:font script="Uigh" typeface="Microsoft Uighur"/>
+        <a:font script="Geor" typeface="Sylfaen"/>
+        <a:font script="Armn" typeface="Arial"/>
+        <a:font script="Bugi" typeface="Leelawadee UI"/>
+        <a:font script="Bopo" typeface="Microsoft JhengHei"/>
+        <a:font script="Java" typeface="Javanese Text"/>
+        <a:font script="Lisu" typeface="Segoe UI"/>
+        <a:font script="Mymr" typeface="Myanmar Text"/>
+        <a:font script="Nkoo" typeface="Ebrima"/>
+        <a:font script="Olck" typeface="Nirmala UI"/>
+        <a:font script="Osma" typeface="Ebrima"/>
+        <a:font script="Phag" typeface="Phagspa"/>
+        <a:font script="Syrn" typeface="Estrangelo Edessa"/>
+        <a:font script="Syrj" typeface="Estrangelo Edessa"/>
+        <a:font script="Syre" typeface="Estrangelo Edessa"/>
+        <a:font script="Sora" typeface="Nirmala UI"/>
+        <a:font script="Tale" typeface="Microsoft Tai Le"/>
+        <a:font script="Talu" typeface="Microsoft New Tai Lue"/>
+        <a:font script="Tfng" typeface="Ebrima"/>
+      </a:majorFont>
+      <a:minorFont>
+        <a:latin typeface="游ゴシック" panose="02110004020202020204"/>
+        <a:ea typeface=""/>
+        <a:cs typeface=""/>
+        <a:font script="Jpan" typeface="游ゴシック"/>
+        <a:font script="Hang" typeface="맑은 고딕"/>
+        <a:font script="Hans" typeface="等线"/>
+        <a:font script="Hant" typeface="新細明體"/>
+        <a:font script="Arab" typeface="Arial"/>
+        <a:font script="Hebr" typeface="Arial"/>
+        <a:font script="Thai" typeface="Cordia New"/>
+        <a:font script="Ethi" typeface="Nyala"/>
+        <a:font script="Beng" typeface="Vrinda"/>
+        <a:font script="Gujr" typeface="Shruti"/>
+        <a:font script="Khmr" typeface="DaunPenh"/>
+        <a:font script="Knda" typeface="Tunga"/>
+        <a:font script="Guru" typeface="Raavi"/>
+        <a:font script="Cans" typeface="Euphemia"/>
+        <a:font script="Cher" typeface="Plantagenet Cherokee"/>
+        <a:font script="Yiii" typeface="Microsoft Yi Baiti"/>
+        <a:font script="Tibt" typeface="Microsoft Himalaya"/>
+        <a:font script="Thaa" typeface="MV Boli"/>
+        <a:font script="Deva" typeface="Mangal"/>
+        <a:font script="Telu" typeface="Gautami"/>
+        <a:font script="Taml" typeface="Latha"/>
+        <a:font script="Syrc" typeface="Estrangelo Edessa"/>
+        <a:font script="Orya" typeface="Kalinga"/>
+        <a:font script="Mlym" typeface="Kartika"/>
+        <a:font script="Laoo" typeface="DokChampa"/>
+        <a:font script="Sinh" typeface="Iskoola Pota"/>
+        <a:font script="Mong" typeface="Mongolian Baiti"/>
+        <a:font script="Viet" typeface="Arial"/>
+        <a:font script="Uigh" typeface="Microsoft Uighur"/>
+        <a:font script="Geor" typeface="Sylfaen"/>
+        <a:font script="Armn" typeface="Arial"/>
+        <a:font script="Bugi" typeface="Leelawadee UI"/>
+        <a:font script="Bopo" typeface="Microsoft JhengHei"/>
+        <a:font script="Java" typeface="Javanese Text"/>
+        <a:font script="Lisu" typeface="Segoe UI"/>
+        <a:font script="Mymr" typeface="Myanmar Text"/>
+        <a:font script="Nkoo" typeface="Ebrima"/>
+        <a:font script="Olck" typeface="Nirmala UI"/>
+        <a:font script="Osma" typeface="Ebrima"/>
+        <a:font script="Phag" typeface="Phagspa"/>
+        <a:font script="Syrn" typeface="Estrangelo Edessa"/>
+        <a:font script="Syrj" typeface="Estrangelo Edessa"/>
+        <a:font script="Syre" typeface="Estrangelo Edessa"/>
+        <a:font script="Sora" typeface="Nirmala UI"/>
+        <a:font script="Tale" typeface="Microsoft Tai Le"/>
+        <a:font script="Talu" typeface="Microsoft New Tai Lue"/>
+        <a:font script="Tfng" typeface="Ebrima"/>
+      </a:minorFont>
+    </a:fontScheme>
+    <a:fmtScheme name="Office">
+      <a:fillStyleLst>
+        <a:solidFill>
+          <a:schemeClr val="phClr"/>
+        </a:solidFill>
+        <a:gradFill rotWithShape="1">
+          <a:gsLst>
+            <a:gs pos="0">
+              <a:schemeClr val="phClr">
+                <a:lumMod val="110000"/>
+                <a:satMod val="105000"/>
+                <a:tint val="67000"/>
+              </a:schemeClr>
+            </a:gs>
+            <a:gs pos="50000">
+              <a:schemeClr val="phClr">
+                <a:lumMod val="105000"/>
+                <a:satMod val="103000"/>
+                <a:tint val="73000"/>
+              </a:schemeClr>
+            </a:gs>
+            <a:gs pos="100000">
+              <a:schemeClr val="phClr">
+                <a:lumMod val="105000"/>
+                <a:satMod val="109000"/>
+                <a:tint val="81000"/>
+              </a:schemeClr>
+            </a:gs>
+          </a:gsLst>
+          <a:lin ang="5400000" scaled="0"/>
+        </a:gradFill>
+        <a:gradFill rotWithShape="1">
+          <a:gsLst>
+            <a:gs pos="0">
+              <a:schemeClr val="phClr">
+                <a:satMod val="103000"/>
+                <a:lumMod val="102000"/>
+                <a:tint val="94000"/>
+              </a:schemeClr>
+            </a:gs>
+            <a:gs pos="50000">
+              <a:schemeClr val="phClr">
+                <a:satMod val="110000"/>
+                <a:lumMod val="100000"/>
+                <a:shade val="100000"/>
+              </a:schemeClr>
+            </a:gs>
+            <a:gs pos="100000">
+              <a:schemeClr val="phClr">
+                <a:lumMod val="99000"/>
+                <a:satMod val="120000"/>
+                <a:shade val="78000"/>
+              </a:schemeClr>
+            </a:gs>
+          </a:gsLst>
+          <a:lin ang="5400000" scaled="0"/>
+        </a:gradFill>
+      </a:fillStyleLst>
+      <a:lnStyleLst>
+        <a:ln w="12700" cap="flat" cmpd="sng" algn="ctr">
+          <a:solidFill>
+            <a:schemeClr val="phClr"/>
+          </a:solidFill>
+          <a:prstDash val="solid"/>
+          <a:miter lim="800000"/>
+        </a:ln>
+        <a:ln w="19050" cap="flat" cmpd="sng" algn="ctr">
+          <a:solidFill>
+            <a:schemeClr val="phClr"/>
+          </a:solidFill>
+          <a:prstDash val="solid"/>
+          <a:miter lim="800000"/>
+        </a:ln>
+        <a:ln w="25400" cap="flat" cmpd="sng" algn="ctr">
+          <a:solidFill>
+            <a:schemeClr val="phClr"/>
+          </a:solidFill>
+          <a:prstDash val="solid"/>
+          <a:miter lim="800000"/>
+        </a:ln>
+      </a:lnStyleLst>
+      <a:effectStyleLst>
+        <a:effectStyle>
+          <a:effectLst/>
+        </a:effectStyle>
+        <a:effectStyle>
+          <a:effectLst/>
+        </a:effectStyle>
+        <a:effectStyle>
+          <a:effectLst>
+            <a:outerShdw blurRad="57150" dist="19050" dir="5400000" algn="ctr" rotWithShape="0">
+              <a:srgbClr val="000000">
+                <a:alpha val="63000"/>
+              </a:srgbClr>
+            </a:outerShdw>
+          </a:effectLst>
+        </a:effectStyle>
+      </a:effectStyleLst>
+      <a:bgFillStyleLst>
+        <a:solidFill>
+          <a:schemeClr val="phClr"/>
+        </a:solidFill>
+        <a:solidFill>
+          <a:schemeClr val="phClr">
+            <a:tint val="95000"/>
+            <a:satMod val="170000"/>
+          </a:schemeClr>
+        </a:solidFill>
+        <a:gradFill rotWithShape="1">
+          <a:gsLst>
+            <a:gs pos="0">
+              <a:schemeClr val="phClr">
+                <a:tint val="93000"/>
+                <a:satMod val="150000"/>
+                <a:shade val="98000"/>
+                <a:lumMod val="102000"/>
+              </a:schemeClr>
+            </a:gs>
+            <a:gs pos="50000">
+              <a:schemeClr val="phClr">
+                <a:tint val="98000"/>
+                <a:satMod val="130000"/>
+                <a:shade val="90000"/>
+                <a:lumMod val="103000"/>
+              </a:schemeClr>
+            </a:gs>
+            <a:gs pos="100000">
+              <a:schemeClr val="phClr">
+                <a:shade val="63000"/>
+                <a:satMod val="120000"/>
+              </a:schemeClr>
+            </a:gs>
+          </a:gsLst>
+          <a:lin ang="5400000" scaled="0"/>
+        </a:gradFill>
+      </a:bgFillStyleLst>
+    </a:fmtScheme>
+  </a:themeElements>
+  <a:objectDefaults>
+    <a:lnDef>
+      <a:spPr/>
+      <a:bodyPr/>
+      <a:lstStyle/>
+      <a:style>
+        <a:lnRef idx="2">
+          <a:schemeClr val="accent1"/>
+        </a:lnRef>
+        <a:fillRef idx="0">
+          <a:schemeClr val="accent1"/>
+        </a:fillRef>
+        <a:effectRef idx="1">
+          <a:schemeClr val="accent1"/>
+        </a:effectRef>
+        <a:fontRef idx="minor">
+          <a:schemeClr val="tx1"/>
+        </a:fontRef>
+      </a:style>
+    </a:lnDef>
+  </a:objectDefaults>
+  <a:extraClrSchemeLst/>
+  <a:extLst>
+    <a:ext uri="{05A4C25C-085E-4340-85A3-A5531E510DB2}">
+      <thm15:themeFamily xmlns:thm15="http://schemas.microsoft.com/office/thememl/2012/main" name="Office Theme" id="{2E142A2C-CD16-42D6-873A-C26D2A0506FA}" vid="{1BDDFF52-6CD6-40A5-AB3C-68EB2F1E4D0A}"/>
+    </a:ext>
+  </a:extLst>
+</a:theme>
 </file>